--- a/PIA - BDR .pptx
+++ b/PIA - BDR .pptx
@@ -5,7 +5,7 @@
     <p:sldMasterId id="2147483726" r:id="rId1"/>
   </p:sldMasterIdLst>
   <p:notesMasterIdLst>
-    <p:notesMasterId r:id="rId7"/>
+    <p:notesMasterId r:id="rId8"/>
   </p:notesMasterIdLst>
   <p:sldIdLst>
     <p:sldId id="256" r:id="rId2"/>
@@ -13,6 +13,7 @@
     <p:sldId id="258" r:id="rId4"/>
     <p:sldId id="259" r:id="rId5"/>
     <p:sldId id="260" r:id="rId6"/>
+    <p:sldId id="261" r:id="rId7"/>
   </p:sldIdLst>
   <p:sldSz cx="12192000" cy="6858000"/>
   <p:notesSz cx="6858000" cy="9144000"/>
@@ -16958,6 +16959,125 @@
 </p:sld>
 </file>
 
+<file path=ppt/slides/slide6.xml><?xml version="1.0" encoding="utf-8"?>
+<p:sld xmlns:a="http://schemas.openxmlformats.org/drawingml/2006/main" xmlns:r="http://schemas.openxmlformats.org/officeDocument/2006/relationships" xmlns:p="http://schemas.openxmlformats.org/presentationml/2006/main">
+  <p:cSld>
+    <p:spTree>
+      <p:nvGrpSpPr>
+        <p:cNvPr id="1" name=""/>
+        <p:cNvGrpSpPr/>
+        <p:nvPr/>
+      </p:nvGrpSpPr>
+      <p:grpSpPr>
+        <a:xfrm>
+          <a:off x="0" y="0"/>
+          <a:ext cx="0" cy="0"/>
+          <a:chOff x="0" y="0"/>
+          <a:chExt cx="0" cy="0"/>
+        </a:xfrm>
+      </p:grpSpPr>
+      <p:sp>
+        <p:nvSpPr>
+          <p:cNvPr id="2" name="Título 1">
+            <a:extLst>
+              <a:ext uri="{FF2B5EF4-FFF2-40B4-BE49-F238E27FC236}">
+                <a16:creationId xmlns:a16="http://schemas.microsoft.com/office/drawing/2014/main" id="{7B4E6944-EEB0-F2CF-2925-73D883C4827C}"/>
+              </a:ext>
+            </a:extLst>
+          </p:cNvPr>
+          <p:cNvSpPr>
+            <a:spLocks noGrp="1"/>
+          </p:cNvSpPr>
+          <p:nvPr>
+            <p:ph type="title"/>
+          </p:nvPr>
+        </p:nvSpPr>
+        <p:spPr/>
+        <p:txBody>
+          <a:bodyPr/>
+          <a:lstStyle/>
+          <a:p>
+            <a:r>
+              <a:rPr lang="es-MX" dirty="0" err="1"/>
+              <a:t>Bibliografia</a:t>
+            </a:r>
+            <a:endParaRPr lang="es-MX" dirty="0"/>
+          </a:p>
+        </p:txBody>
+      </p:sp>
+      <p:sp>
+        <p:nvSpPr>
+          <p:cNvPr id="3" name="Marcador de contenido 2">
+            <a:extLst>
+              <a:ext uri="{FF2B5EF4-FFF2-40B4-BE49-F238E27FC236}">
+                <a16:creationId xmlns:a16="http://schemas.microsoft.com/office/drawing/2014/main" id="{A69D269F-BCAE-DF80-E839-C337243DDC8A}"/>
+              </a:ext>
+            </a:extLst>
+          </p:cNvPr>
+          <p:cNvSpPr>
+            <a:spLocks noGrp="1"/>
+          </p:cNvSpPr>
+          <p:nvPr>
+            <p:ph idx="1"/>
+          </p:nvPr>
+        </p:nvSpPr>
+        <p:spPr/>
+        <p:txBody>
+          <a:bodyPr/>
+          <a:lstStyle/>
+          <a:p>
+            <a:r>
+              <a:rPr lang="en-US" dirty="0"/>
+              <a:t>Apache </a:t>
+            </a:r>
+            <a:r>
+              <a:rPr lang="en-US" dirty="0" err="1"/>
+              <a:t>SparkTM</a:t>
+            </a:r>
+            <a:r>
+              <a:rPr lang="en-US" dirty="0"/>
+              <a:t> - Unified Engine for large-scale data analytics. (s. f.). </a:t>
+            </a:r>
+            <a:r>
+              <a:rPr lang="en-US" dirty="0">
+                <a:hlinkClick r:id="rId2"/>
+              </a:rPr>
+              <a:t>https://spark.apache.org/</a:t>
+            </a:r>
+            <a:endParaRPr lang="en-US" dirty="0"/>
+          </a:p>
+          <a:p>
+            <a:r>
+              <a:rPr lang="en-US" dirty="0"/>
+              <a:t>Databricks: Leading Data and AI Solutions for Enterprises. (s. f.). Databricks. </a:t>
+            </a:r>
+            <a:r>
+              <a:rPr lang="en-US" dirty="0">
+                <a:hlinkClick r:id="rId3"/>
+              </a:rPr>
+              <a:t>https://www.databricks.com/</a:t>
+            </a:r>
+            <a:r>
+              <a:rPr lang="en-US" dirty="0"/>
+              <a:t> </a:t>
+            </a:r>
+            <a:endParaRPr lang="es-MX" dirty="0"/>
+          </a:p>
+        </p:txBody>
+      </p:sp>
+    </p:spTree>
+    <p:extLst>
+      <p:ext uri="{BB962C8B-B14F-4D97-AF65-F5344CB8AC3E}">
+        <p14:creationId xmlns:p14="http://schemas.microsoft.com/office/powerpoint/2010/main" val="778547300"/>
+      </p:ext>
+    </p:extLst>
+  </p:cSld>
+  <p:clrMapOvr>
+    <a:masterClrMapping/>
+  </p:clrMapOvr>
+</p:sld>
+</file>
+
 <file path=ppt/theme/theme1.xml><?xml version="1.0" encoding="utf-8"?>
 <a:theme xmlns:a="http://schemas.openxmlformats.org/drawingml/2006/main" name="GestaltVTI">
   <a:themeElements>

--- a/PIA - BDR .pptx
+++ b/PIA - BDR .pptx
@@ -5,7 +5,7 @@
     <p:sldMasterId id="2147483726" r:id="rId1"/>
   </p:sldMasterIdLst>
   <p:notesMasterIdLst>
-    <p:notesMasterId r:id="rId8"/>
+    <p:notesMasterId r:id="rId9"/>
   </p:notesMasterIdLst>
   <p:sldIdLst>
     <p:sldId id="256" r:id="rId2"/>
@@ -13,7 +13,8 @@
     <p:sldId id="258" r:id="rId4"/>
     <p:sldId id="259" r:id="rId5"/>
     <p:sldId id="260" r:id="rId6"/>
-    <p:sldId id="261" r:id="rId7"/>
+    <p:sldId id="262" r:id="rId7"/>
+    <p:sldId id="261" r:id="rId8"/>
   </p:sldIdLst>
   <p:sldSz cx="12192000" cy="6858000"/>
   <p:notesSz cx="6858000" cy="9144000"/>
@@ -112,11 +113,798 @@
       </a:defRPr>
     </a:lvl9pPr>
   </p:defaultTextStyle>
+  <p:extLst>
+    <p:ext uri="{EFAFB233-063F-42B5-8137-9DF3F51BA10A}">
+      <p15:sldGuideLst xmlns:p15="http://schemas.microsoft.com/office/powerpoint/2012/main"/>
+    </p:ext>
+  </p:extLst>
 </p:presentation>
 </file>
 
 <file path=ppt/diagrams/colors1.xml><?xml version="1.0" encoding="utf-8"?>
-<dgm:colorsDef xmlns:dgm="http://schemas.openxmlformats.org/drawingml/2006/diagram" xmlns:a="http://schemas.openxmlformats.org/drawingml/2006/main" uniqueId="urn:microsoft.com/office/officeart/2018/5/colors/Iconchunking_neutralbg_colorful1">
+<dgm:colorsDef xmlns:dgm="http://schemas.openxmlformats.org/drawingml/2006/diagram" xmlns:a="http://schemas.openxmlformats.org/drawingml/2006/main" uniqueId="urn:microsoft.com/office/officeart/2005/8/colors/colorful5">
+  <dgm:title val=""/>
+  <dgm:desc val=""/>
+  <dgm:catLst>
+    <dgm:cat type="colorful" pri="10500"/>
+  </dgm:catLst>
+  <dgm:styleLbl name="node0">
+    <dgm:fillClrLst meth="repeat">
+      <a:schemeClr val="accent4"/>
+    </dgm:fillClrLst>
+    <dgm:linClrLst meth="repeat">
+      <a:schemeClr val="lt1"/>
+    </dgm:linClrLst>
+    <dgm:effectClrLst/>
+    <dgm:txLinClrLst/>
+    <dgm:txFillClrLst/>
+    <dgm:txEffectClrLst/>
+  </dgm:styleLbl>
+  <dgm:styleLbl name="node1">
+    <dgm:fillClrLst>
+      <a:schemeClr val="accent5"/>
+      <a:schemeClr val="accent6"/>
+    </dgm:fillClrLst>
+    <dgm:linClrLst meth="repeat">
+      <a:schemeClr val="lt1"/>
+    </dgm:linClrLst>
+    <dgm:effectClrLst/>
+    <dgm:txLinClrLst/>
+    <dgm:txFillClrLst/>
+    <dgm:txEffectClrLst/>
+  </dgm:styleLbl>
+  <dgm:styleLbl name="alignNode1">
+    <dgm:fillClrLst>
+      <a:schemeClr val="accent5"/>
+      <a:schemeClr val="accent6"/>
+    </dgm:fillClrLst>
+    <dgm:linClrLst>
+      <a:schemeClr val="accent5"/>
+      <a:schemeClr val="accent6"/>
+    </dgm:linClrLst>
+    <dgm:effectClrLst/>
+    <dgm:txLinClrLst/>
+    <dgm:txFillClrLst/>
+    <dgm:txEffectClrLst/>
+  </dgm:styleLbl>
+  <dgm:styleLbl name="lnNode1">
+    <dgm:fillClrLst>
+      <a:schemeClr val="accent5"/>
+      <a:schemeClr val="accent6"/>
+    </dgm:fillClrLst>
+    <dgm:linClrLst meth="repeat">
+      <a:schemeClr val="lt1"/>
+    </dgm:linClrLst>
+    <dgm:effectClrLst/>
+    <dgm:txLinClrLst/>
+    <dgm:txFillClrLst/>
+    <dgm:txEffectClrLst/>
+  </dgm:styleLbl>
+  <dgm:styleLbl name="vennNode1">
+    <dgm:fillClrLst>
+      <a:schemeClr val="accent5">
+        <a:alpha val="50000"/>
+      </a:schemeClr>
+      <a:schemeClr val="accent6">
+        <a:alpha val="50000"/>
+      </a:schemeClr>
+    </dgm:fillClrLst>
+    <dgm:linClrLst meth="repeat">
+      <a:schemeClr val="lt1"/>
+    </dgm:linClrLst>
+    <dgm:effectClrLst/>
+    <dgm:txLinClrLst/>
+    <dgm:txFillClrLst/>
+    <dgm:txEffectClrLst/>
+  </dgm:styleLbl>
+  <dgm:styleLbl name="node2">
+    <dgm:fillClrLst>
+      <a:schemeClr val="accent6"/>
+    </dgm:fillClrLst>
+    <dgm:linClrLst meth="repeat">
+      <a:schemeClr val="lt1"/>
+    </dgm:linClrLst>
+    <dgm:effectClrLst/>
+    <dgm:txLinClrLst/>
+    <dgm:txFillClrLst/>
+    <dgm:txEffectClrLst/>
+  </dgm:styleLbl>
+  <dgm:styleLbl name="node3">
+    <dgm:fillClrLst>
+      <a:schemeClr val="accent1"/>
+    </dgm:fillClrLst>
+    <dgm:linClrLst meth="repeat">
+      <a:schemeClr val="lt1"/>
+    </dgm:linClrLst>
+    <dgm:effectClrLst/>
+    <dgm:txLinClrLst/>
+    <dgm:txFillClrLst/>
+    <dgm:txEffectClrLst/>
+  </dgm:styleLbl>
+  <dgm:styleLbl name="node4">
+    <dgm:fillClrLst>
+      <a:schemeClr val="accent2"/>
+    </dgm:fillClrLst>
+    <dgm:linClrLst meth="repeat">
+      <a:schemeClr val="lt1"/>
+    </dgm:linClrLst>
+    <dgm:effectClrLst/>
+    <dgm:txLinClrLst/>
+    <dgm:txFillClrLst/>
+    <dgm:txEffectClrLst/>
+  </dgm:styleLbl>
+  <dgm:styleLbl name="fgImgPlace1">
+    <dgm:fillClrLst>
+      <a:schemeClr val="accent5">
+        <a:tint val="50000"/>
+      </a:schemeClr>
+      <a:schemeClr val="accent6">
+        <a:tint val="50000"/>
+      </a:schemeClr>
+    </dgm:fillClrLst>
+    <dgm:linClrLst meth="repeat">
+      <a:schemeClr val="lt1"/>
+    </dgm:linClrLst>
+    <dgm:effectClrLst/>
+    <dgm:txLinClrLst/>
+    <dgm:txFillClrLst meth="repeat">
+      <a:schemeClr val="lt1"/>
+    </dgm:txFillClrLst>
+    <dgm:txEffectClrLst/>
+  </dgm:styleLbl>
+  <dgm:styleLbl name="alignImgPlace1">
+    <dgm:fillClrLst>
+      <a:schemeClr val="accent5">
+        <a:tint val="50000"/>
+      </a:schemeClr>
+      <a:schemeClr val="accent6">
+        <a:tint val="20000"/>
+      </a:schemeClr>
+    </dgm:fillClrLst>
+    <dgm:linClrLst meth="repeat">
+      <a:schemeClr val="lt1"/>
+    </dgm:linClrLst>
+    <dgm:effectClrLst/>
+    <dgm:txLinClrLst/>
+    <dgm:txFillClrLst meth="repeat">
+      <a:schemeClr val="lt1"/>
+    </dgm:txFillClrLst>
+    <dgm:txEffectClrLst/>
+  </dgm:styleLbl>
+  <dgm:styleLbl name="bgImgPlace1">
+    <dgm:fillClrLst>
+      <a:schemeClr val="accent5">
+        <a:tint val="50000"/>
+      </a:schemeClr>
+      <a:schemeClr val="accent6">
+        <a:tint val="20000"/>
+      </a:schemeClr>
+    </dgm:fillClrLst>
+    <dgm:linClrLst meth="repeat">
+      <a:schemeClr val="lt1"/>
+    </dgm:linClrLst>
+    <dgm:effectClrLst/>
+    <dgm:txLinClrLst/>
+    <dgm:txFillClrLst meth="repeat">
+      <a:schemeClr val="lt1"/>
+    </dgm:txFillClrLst>
+    <dgm:txEffectClrLst/>
+  </dgm:styleLbl>
+  <dgm:styleLbl name="sibTrans2D1">
+    <dgm:fillClrLst>
+      <a:schemeClr val="accent5"/>
+      <a:schemeClr val="accent6"/>
+    </dgm:fillClrLst>
+    <dgm:linClrLst meth="repeat">
+      <a:schemeClr val="lt1"/>
+    </dgm:linClrLst>
+    <dgm:effectClrLst/>
+    <dgm:txLinClrLst/>
+    <dgm:txFillClrLst/>
+    <dgm:txEffectClrLst/>
+  </dgm:styleLbl>
+  <dgm:styleLbl name="fgSibTrans2D1">
+    <dgm:fillClrLst>
+      <a:schemeClr val="accent5"/>
+      <a:schemeClr val="accent6"/>
+    </dgm:fillClrLst>
+    <dgm:linClrLst meth="repeat">
+      <a:schemeClr val="lt1"/>
+    </dgm:linClrLst>
+    <dgm:effectClrLst/>
+    <dgm:txLinClrLst/>
+    <dgm:txFillClrLst meth="repeat">
+      <a:schemeClr val="lt1"/>
+    </dgm:txFillClrLst>
+    <dgm:txEffectClrLst/>
+  </dgm:styleLbl>
+  <dgm:styleLbl name="bgSibTrans2D1">
+    <dgm:fillClrLst>
+      <a:schemeClr val="accent5"/>
+      <a:schemeClr val="accent6"/>
+    </dgm:fillClrLst>
+    <dgm:linClrLst meth="repeat">
+      <a:schemeClr val="lt1"/>
+    </dgm:linClrLst>
+    <dgm:effectClrLst/>
+    <dgm:txLinClrLst/>
+    <dgm:txFillClrLst meth="repeat">
+      <a:schemeClr val="lt1"/>
+    </dgm:txFillClrLst>
+    <dgm:txEffectClrLst/>
+  </dgm:styleLbl>
+  <dgm:styleLbl name="sibTrans1D1">
+    <dgm:fillClrLst/>
+    <dgm:linClrLst>
+      <a:schemeClr val="accent5"/>
+      <a:schemeClr val="accent6"/>
+    </dgm:linClrLst>
+    <dgm:effectClrLst/>
+    <dgm:txLinClrLst/>
+    <dgm:txFillClrLst meth="repeat">
+      <a:schemeClr val="tx1"/>
+    </dgm:txFillClrLst>
+    <dgm:txEffectClrLst/>
+  </dgm:styleLbl>
+  <dgm:styleLbl name="callout">
+    <dgm:fillClrLst meth="repeat">
+      <a:schemeClr val="accent5"/>
+    </dgm:fillClrLst>
+    <dgm:linClrLst meth="repeat">
+      <a:schemeClr val="accent5">
+        <a:tint val="50000"/>
+      </a:schemeClr>
+    </dgm:linClrLst>
+    <dgm:effectClrLst/>
+    <dgm:txLinClrLst/>
+    <dgm:txFillClrLst meth="repeat">
+      <a:schemeClr val="tx1"/>
+    </dgm:txFillClrLst>
+    <dgm:txEffectClrLst/>
+  </dgm:styleLbl>
+  <dgm:styleLbl name="asst0">
+    <dgm:fillClrLst meth="repeat">
+      <a:schemeClr val="accent5"/>
+    </dgm:fillClrLst>
+    <dgm:linClrLst meth="repeat">
+      <a:schemeClr val="lt1">
+        <a:shade val="80000"/>
+      </a:schemeClr>
+    </dgm:linClrLst>
+    <dgm:effectClrLst/>
+    <dgm:txLinClrLst/>
+    <dgm:txFillClrLst/>
+    <dgm:txEffectClrLst/>
+  </dgm:styleLbl>
+  <dgm:styleLbl name="asst1">
+    <dgm:fillClrLst meth="repeat">
+      <a:schemeClr val="accent6"/>
+    </dgm:fillClrLst>
+    <dgm:linClrLst meth="repeat">
+      <a:schemeClr val="lt1">
+        <a:shade val="80000"/>
+      </a:schemeClr>
+    </dgm:linClrLst>
+    <dgm:effectClrLst/>
+    <dgm:txLinClrLst/>
+    <dgm:txFillClrLst/>
+    <dgm:txEffectClrLst/>
+  </dgm:styleLbl>
+  <dgm:styleLbl name="asst2">
+    <dgm:fillClrLst>
+      <a:schemeClr val="accent1"/>
+    </dgm:fillClrLst>
+    <dgm:linClrLst meth="repeat">
+      <a:schemeClr val="lt1"/>
+    </dgm:linClrLst>
+    <dgm:effectClrLst/>
+    <dgm:txLinClrLst/>
+    <dgm:txFillClrLst/>
+    <dgm:txEffectClrLst/>
+  </dgm:styleLbl>
+  <dgm:styleLbl name="asst3">
+    <dgm:fillClrLst>
+      <a:schemeClr val="accent2"/>
+    </dgm:fillClrLst>
+    <dgm:linClrLst meth="repeat">
+      <a:schemeClr val="lt1"/>
+    </dgm:linClrLst>
+    <dgm:effectClrLst/>
+    <dgm:txLinClrLst/>
+    <dgm:txFillClrLst/>
+    <dgm:txEffectClrLst/>
+  </dgm:styleLbl>
+  <dgm:styleLbl name="asst4">
+    <dgm:fillClrLst>
+      <a:schemeClr val="accent3"/>
+    </dgm:fillClrLst>
+    <dgm:linClrLst meth="repeat">
+      <a:schemeClr val="lt1"/>
+    </dgm:linClrLst>
+    <dgm:effectClrLst/>
+    <dgm:txLinClrLst/>
+    <dgm:txFillClrLst/>
+    <dgm:txEffectClrLst/>
+  </dgm:styleLbl>
+  <dgm:styleLbl name="parChTrans2D1">
+    <dgm:fillClrLst meth="repeat">
+      <a:schemeClr val="accent5"/>
+    </dgm:fillClrLst>
+    <dgm:linClrLst meth="repeat">
+      <a:schemeClr val="lt1"/>
+    </dgm:linClrLst>
+    <dgm:effectClrLst/>
+    <dgm:txLinClrLst/>
+    <dgm:txFillClrLst meth="repeat">
+      <a:schemeClr val="lt1"/>
+    </dgm:txFillClrLst>
+    <dgm:txEffectClrLst/>
+  </dgm:styleLbl>
+  <dgm:styleLbl name="parChTrans2D2">
+    <dgm:fillClrLst meth="repeat">
+      <a:schemeClr val="accent6"/>
+    </dgm:fillClrLst>
+    <dgm:linClrLst meth="repeat">
+      <a:schemeClr val="lt1"/>
+    </dgm:linClrLst>
+    <dgm:effectClrLst/>
+    <dgm:txLinClrLst/>
+    <dgm:txFillClrLst/>
+    <dgm:txEffectClrLst/>
+  </dgm:styleLbl>
+  <dgm:styleLbl name="parChTrans2D3">
+    <dgm:fillClrLst meth="repeat">
+      <a:schemeClr val="accent6"/>
+    </dgm:fillClrLst>
+    <dgm:linClrLst meth="repeat">
+      <a:schemeClr val="lt1"/>
+    </dgm:linClrLst>
+    <dgm:effectClrLst/>
+    <dgm:txLinClrLst/>
+    <dgm:txFillClrLst/>
+    <dgm:txEffectClrLst/>
+  </dgm:styleLbl>
+  <dgm:styleLbl name="parChTrans2D4">
+    <dgm:fillClrLst meth="repeat">
+      <a:schemeClr val="accent1"/>
+    </dgm:fillClrLst>
+    <dgm:linClrLst meth="repeat">
+      <a:schemeClr val="lt1"/>
+    </dgm:linClrLst>
+    <dgm:effectClrLst/>
+    <dgm:txLinClrLst/>
+    <dgm:txFillClrLst meth="repeat">
+      <a:schemeClr val="lt1"/>
+    </dgm:txFillClrLst>
+    <dgm:txEffectClrLst/>
+  </dgm:styleLbl>
+  <dgm:styleLbl name="parChTrans1D1">
+    <dgm:fillClrLst meth="repeat">
+      <a:schemeClr val="accent5"/>
+    </dgm:fillClrLst>
+    <dgm:linClrLst meth="repeat">
+      <a:schemeClr val="accent5"/>
+    </dgm:linClrLst>
+    <dgm:effectClrLst/>
+    <dgm:txLinClrLst/>
+    <dgm:txFillClrLst meth="repeat">
+      <a:schemeClr val="tx1"/>
+    </dgm:txFillClrLst>
+    <dgm:txEffectClrLst/>
+  </dgm:styleLbl>
+  <dgm:styleLbl name="parChTrans1D2">
+    <dgm:fillClrLst meth="repeat">
+      <a:schemeClr val="accent6">
+        <a:tint val="90000"/>
+      </a:schemeClr>
+    </dgm:fillClrLst>
+    <dgm:linClrLst meth="repeat">
+      <a:schemeClr val="accent6"/>
+    </dgm:linClrLst>
+    <dgm:effectClrLst/>
+    <dgm:txLinClrLst/>
+    <dgm:txFillClrLst meth="repeat">
+      <a:schemeClr val="tx1"/>
+    </dgm:txFillClrLst>
+    <dgm:txEffectClrLst/>
+  </dgm:styleLbl>
+  <dgm:styleLbl name="parChTrans1D3">
+    <dgm:fillClrLst meth="repeat">
+      <a:schemeClr val="accent6">
+        <a:tint val="70000"/>
+      </a:schemeClr>
+    </dgm:fillClrLst>
+    <dgm:linClrLst meth="repeat">
+      <a:schemeClr val="accent1"/>
+    </dgm:linClrLst>
+    <dgm:effectClrLst/>
+    <dgm:txLinClrLst/>
+    <dgm:txFillClrLst meth="repeat">
+      <a:schemeClr val="tx1"/>
+    </dgm:txFillClrLst>
+    <dgm:txEffectClrLst/>
+  </dgm:styleLbl>
+  <dgm:styleLbl name="parChTrans1D4">
+    <dgm:fillClrLst meth="repeat">
+      <a:schemeClr val="accent6">
+        <a:tint val="50000"/>
+      </a:schemeClr>
+    </dgm:fillClrLst>
+    <dgm:linClrLst meth="repeat">
+      <a:schemeClr val="accent2"/>
+    </dgm:linClrLst>
+    <dgm:effectClrLst/>
+    <dgm:txLinClrLst/>
+    <dgm:txFillClrLst meth="repeat">
+      <a:schemeClr val="tx1"/>
+    </dgm:txFillClrLst>
+    <dgm:txEffectClrLst/>
+  </dgm:styleLbl>
+  <dgm:styleLbl name="fgAcc1">
+    <dgm:fillClrLst meth="repeat">
+      <a:schemeClr val="lt1">
+        <a:alpha val="90000"/>
+      </a:schemeClr>
+    </dgm:fillClrLst>
+    <dgm:linClrLst>
+      <a:schemeClr val="accent5"/>
+      <a:schemeClr val="accent6"/>
+    </dgm:linClrLst>
+    <dgm:effectClrLst/>
+    <dgm:txLinClrLst/>
+    <dgm:txFillClrLst meth="repeat">
+      <a:schemeClr val="dk1"/>
+    </dgm:txFillClrLst>
+    <dgm:txEffectClrLst/>
+  </dgm:styleLbl>
+  <dgm:styleLbl name="conFgAcc1">
+    <dgm:fillClrLst meth="repeat">
+      <a:schemeClr val="lt1">
+        <a:alpha val="90000"/>
+      </a:schemeClr>
+    </dgm:fillClrLst>
+    <dgm:linClrLst>
+      <a:schemeClr val="accent5"/>
+      <a:schemeClr val="accent6"/>
+    </dgm:linClrLst>
+    <dgm:effectClrLst/>
+    <dgm:txLinClrLst/>
+    <dgm:txFillClrLst meth="repeat">
+      <a:schemeClr val="dk1"/>
+    </dgm:txFillClrLst>
+    <dgm:txEffectClrLst/>
+  </dgm:styleLbl>
+  <dgm:styleLbl name="alignAcc1">
+    <dgm:fillClrLst meth="repeat">
+      <a:schemeClr val="lt1">
+        <a:alpha val="90000"/>
+      </a:schemeClr>
+    </dgm:fillClrLst>
+    <dgm:linClrLst>
+      <a:schemeClr val="accent5"/>
+      <a:schemeClr val="accent6"/>
+    </dgm:linClrLst>
+    <dgm:effectClrLst/>
+    <dgm:txLinClrLst/>
+    <dgm:txFillClrLst meth="repeat">
+      <a:schemeClr val="dk1"/>
+    </dgm:txFillClrLst>
+    <dgm:txEffectClrLst/>
+  </dgm:styleLbl>
+  <dgm:styleLbl name="trAlignAcc1">
+    <dgm:fillClrLst meth="repeat">
+      <a:schemeClr val="lt1">
+        <a:alpha val="40000"/>
+      </a:schemeClr>
+    </dgm:fillClrLst>
+    <dgm:linClrLst meth="repeat">
+      <a:schemeClr val="accent5"/>
+    </dgm:linClrLst>
+    <dgm:effectClrLst/>
+    <dgm:txLinClrLst/>
+    <dgm:txFillClrLst meth="repeat">
+      <a:schemeClr val="dk1"/>
+    </dgm:txFillClrLst>
+    <dgm:txEffectClrLst/>
+  </dgm:styleLbl>
+  <dgm:styleLbl name="bgAcc1">
+    <dgm:fillClrLst meth="repeat">
+      <a:schemeClr val="lt1">
+        <a:alpha val="90000"/>
+      </a:schemeClr>
+    </dgm:fillClrLst>
+    <dgm:linClrLst>
+      <a:schemeClr val="accent5"/>
+      <a:schemeClr val="accent6"/>
+    </dgm:linClrLst>
+    <dgm:effectClrLst/>
+    <dgm:txLinClrLst/>
+    <dgm:txFillClrLst meth="repeat">
+      <a:schemeClr val="dk1"/>
+    </dgm:txFillClrLst>
+    <dgm:txEffectClrLst/>
+  </dgm:styleLbl>
+  <dgm:styleLbl name="solidFgAcc1">
+    <dgm:fillClrLst meth="repeat">
+      <a:schemeClr val="lt1"/>
+    </dgm:fillClrLst>
+    <dgm:linClrLst>
+      <a:schemeClr val="accent5"/>
+      <a:schemeClr val="accent6"/>
+    </dgm:linClrLst>
+    <dgm:effectClrLst/>
+    <dgm:txLinClrLst/>
+    <dgm:txFillClrLst meth="repeat">
+      <a:schemeClr val="dk1"/>
+    </dgm:txFillClrLst>
+    <dgm:txEffectClrLst/>
+  </dgm:styleLbl>
+  <dgm:styleLbl name="solidAlignAcc1">
+    <dgm:fillClrLst meth="repeat">
+      <a:schemeClr val="lt1"/>
+    </dgm:fillClrLst>
+    <dgm:linClrLst>
+      <a:schemeClr val="accent5"/>
+      <a:schemeClr val="accent6"/>
+    </dgm:linClrLst>
+    <dgm:effectClrLst/>
+    <dgm:txLinClrLst/>
+    <dgm:txFillClrLst meth="repeat">
+      <a:schemeClr val="dk1"/>
+    </dgm:txFillClrLst>
+    <dgm:txEffectClrLst/>
+  </dgm:styleLbl>
+  <dgm:styleLbl name="solidBgAcc1">
+    <dgm:fillClrLst meth="repeat">
+      <a:schemeClr val="lt1"/>
+    </dgm:fillClrLst>
+    <dgm:linClrLst>
+      <a:schemeClr val="accent5"/>
+      <a:schemeClr val="accent6"/>
+    </dgm:linClrLst>
+    <dgm:effectClrLst/>
+    <dgm:txLinClrLst/>
+    <dgm:txFillClrLst meth="repeat">
+      <a:schemeClr val="dk1"/>
+    </dgm:txFillClrLst>
+    <dgm:txEffectClrLst/>
+  </dgm:styleLbl>
+  <dgm:styleLbl name="fgAccFollowNode1">
+    <dgm:fillClrLst>
+      <a:schemeClr val="accent5">
+        <a:tint val="40000"/>
+        <a:alpha val="90000"/>
+      </a:schemeClr>
+      <a:schemeClr val="accent6">
+        <a:tint val="40000"/>
+        <a:alpha val="90000"/>
+      </a:schemeClr>
+    </dgm:fillClrLst>
+    <dgm:linClrLst>
+      <a:schemeClr val="accent5">
+        <a:tint val="40000"/>
+        <a:alpha val="90000"/>
+      </a:schemeClr>
+      <a:schemeClr val="accent5">
+        <a:tint val="40000"/>
+        <a:alpha val="90000"/>
+      </a:schemeClr>
+    </dgm:linClrLst>
+    <dgm:effectClrLst/>
+    <dgm:txLinClrLst/>
+    <dgm:txFillClrLst meth="repeat">
+      <a:schemeClr val="dk1"/>
+    </dgm:txFillClrLst>
+    <dgm:txEffectClrLst/>
+  </dgm:styleLbl>
+  <dgm:styleLbl name="alignAccFollowNode1">
+    <dgm:fillClrLst>
+      <a:schemeClr val="accent5">
+        <a:tint val="40000"/>
+        <a:alpha val="90000"/>
+      </a:schemeClr>
+      <a:schemeClr val="accent6">
+        <a:tint val="40000"/>
+        <a:alpha val="90000"/>
+      </a:schemeClr>
+    </dgm:fillClrLst>
+    <dgm:linClrLst>
+      <a:schemeClr val="accent5">
+        <a:tint val="40000"/>
+        <a:alpha val="90000"/>
+      </a:schemeClr>
+      <a:schemeClr val="accent6">
+        <a:tint val="40000"/>
+        <a:alpha val="90000"/>
+      </a:schemeClr>
+    </dgm:linClrLst>
+    <dgm:effectClrLst/>
+    <dgm:txLinClrLst/>
+    <dgm:txFillClrLst meth="repeat">
+      <a:schemeClr val="dk1"/>
+    </dgm:txFillClrLst>
+    <dgm:txEffectClrLst/>
+  </dgm:styleLbl>
+  <dgm:styleLbl name="bgAccFollowNode1">
+    <dgm:fillClrLst>
+      <a:schemeClr val="accent5">
+        <a:tint val="40000"/>
+        <a:alpha val="90000"/>
+      </a:schemeClr>
+      <a:schemeClr val="accent6">
+        <a:tint val="40000"/>
+        <a:alpha val="90000"/>
+      </a:schemeClr>
+    </dgm:fillClrLst>
+    <dgm:linClrLst>
+      <a:schemeClr val="accent5">
+        <a:tint val="40000"/>
+        <a:alpha val="90000"/>
+      </a:schemeClr>
+      <a:schemeClr val="accent6">
+        <a:tint val="40000"/>
+        <a:alpha val="90000"/>
+      </a:schemeClr>
+    </dgm:linClrLst>
+    <dgm:effectClrLst/>
+    <dgm:txLinClrLst/>
+    <dgm:txFillClrLst meth="repeat">
+      <a:schemeClr val="dk1"/>
+    </dgm:txFillClrLst>
+    <dgm:txEffectClrLst/>
+  </dgm:styleLbl>
+  <dgm:styleLbl name="fgAcc0">
+    <dgm:fillClrLst meth="repeat">
+      <a:schemeClr val="lt1">
+        <a:alpha val="90000"/>
+      </a:schemeClr>
+    </dgm:fillClrLst>
+    <dgm:linClrLst>
+      <a:schemeClr val="accent4"/>
+    </dgm:linClrLst>
+    <dgm:effectClrLst/>
+    <dgm:txLinClrLst/>
+    <dgm:txFillClrLst meth="repeat">
+      <a:schemeClr val="dk1"/>
+    </dgm:txFillClrLst>
+    <dgm:txEffectClrLst/>
+  </dgm:styleLbl>
+  <dgm:styleLbl name="fgAcc2">
+    <dgm:fillClrLst meth="repeat">
+      <a:schemeClr val="lt1">
+        <a:alpha val="90000"/>
+      </a:schemeClr>
+    </dgm:fillClrLst>
+    <dgm:linClrLst>
+      <a:schemeClr val="accent6"/>
+    </dgm:linClrLst>
+    <dgm:effectClrLst/>
+    <dgm:txLinClrLst/>
+    <dgm:txFillClrLst meth="repeat">
+      <a:schemeClr val="dk1"/>
+    </dgm:txFillClrLst>
+    <dgm:txEffectClrLst/>
+  </dgm:styleLbl>
+  <dgm:styleLbl name="fgAcc3">
+    <dgm:fillClrLst meth="repeat">
+      <a:schemeClr val="lt1">
+        <a:alpha val="90000"/>
+      </a:schemeClr>
+    </dgm:fillClrLst>
+    <dgm:linClrLst>
+      <a:schemeClr val="accent1"/>
+    </dgm:linClrLst>
+    <dgm:effectClrLst/>
+    <dgm:txLinClrLst/>
+    <dgm:txFillClrLst meth="repeat">
+      <a:schemeClr val="dk1"/>
+    </dgm:txFillClrLst>
+    <dgm:txEffectClrLst/>
+  </dgm:styleLbl>
+  <dgm:styleLbl name="fgAcc4">
+    <dgm:fillClrLst meth="repeat">
+      <a:schemeClr val="lt1">
+        <a:alpha val="90000"/>
+      </a:schemeClr>
+    </dgm:fillClrLst>
+    <dgm:linClrLst>
+      <a:schemeClr val="accent2"/>
+    </dgm:linClrLst>
+    <dgm:effectClrLst/>
+    <dgm:txLinClrLst/>
+    <dgm:txFillClrLst meth="repeat">
+      <a:schemeClr val="dk1"/>
+    </dgm:txFillClrLst>
+    <dgm:txEffectClrLst/>
+  </dgm:styleLbl>
+  <dgm:styleLbl name="bgShp">
+    <dgm:fillClrLst meth="repeat">
+      <a:schemeClr val="accent5">
+        <a:tint val="40000"/>
+      </a:schemeClr>
+    </dgm:fillClrLst>
+    <dgm:linClrLst meth="repeat">
+      <a:schemeClr val="dk1"/>
+    </dgm:linClrLst>
+    <dgm:effectClrLst/>
+    <dgm:txLinClrLst/>
+    <dgm:txFillClrLst meth="repeat">
+      <a:schemeClr val="dk1"/>
+    </dgm:txFillClrLst>
+    <dgm:txEffectClrLst/>
+  </dgm:styleLbl>
+  <dgm:styleLbl name="dkBgShp">
+    <dgm:fillClrLst meth="repeat">
+      <a:schemeClr val="accent5">
+        <a:shade val="90000"/>
+      </a:schemeClr>
+    </dgm:fillClrLst>
+    <dgm:linClrLst meth="repeat">
+      <a:schemeClr val="dk1"/>
+    </dgm:linClrLst>
+    <dgm:effectClrLst/>
+    <dgm:txLinClrLst/>
+    <dgm:txFillClrLst meth="repeat">
+      <a:schemeClr val="lt1"/>
+    </dgm:txFillClrLst>
+    <dgm:txEffectClrLst/>
+  </dgm:styleLbl>
+  <dgm:styleLbl name="trBgShp">
+    <dgm:fillClrLst meth="repeat">
+      <a:schemeClr val="accent5">
+        <a:tint val="50000"/>
+        <a:alpha val="40000"/>
+      </a:schemeClr>
+    </dgm:fillClrLst>
+    <dgm:linClrLst meth="repeat">
+      <a:schemeClr val="accent5"/>
+    </dgm:linClrLst>
+    <dgm:effectClrLst/>
+    <dgm:txLinClrLst/>
+    <dgm:txFillClrLst meth="repeat">
+      <a:schemeClr val="lt1"/>
+    </dgm:txFillClrLst>
+    <dgm:txEffectClrLst/>
+  </dgm:styleLbl>
+  <dgm:styleLbl name="fgShp">
+    <dgm:fillClrLst meth="repeat">
+      <a:schemeClr val="accent5">
+        <a:tint val="40000"/>
+      </a:schemeClr>
+    </dgm:fillClrLst>
+    <dgm:linClrLst meth="repeat">
+      <a:schemeClr val="lt1"/>
+    </dgm:linClrLst>
+    <dgm:effectClrLst/>
+    <dgm:txLinClrLst/>
+    <dgm:txFillClrLst meth="repeat">
+      <a:schemeClr val="dk1"/>
+    </dgm:txFillClrLst>
+    <dgm:txEffectClrLst/>
+  </dgm:styleLbl>
+  <dgm:styleLbl name="revTx">
+    <dgm:fillClrLst meth="repeat">
+      <a:schemeClr val="lt1">
+        <a:alpha val="0"/>
+      </a:schemeClr>
+    </dgm:fillClrLst>
+    <dgm:linClrLst meth="repeat">
+      <a:schemeClr val="dk1">
+        <a:alpha val="0"/>
+      </a:schemeClr>
+    </dgm:linClrLst>
+    <dgm:effectClrLst/>
+    <dgm:txLinClrLst/>
+    <dgm:txFillClrLst meth="repeat">
+      <a:schemeClr val="tx1"/>
+    </dgm:txFillClrLst>
+    <dgm:txEffectClrLst/>
+  </dgm:styleLbl>
+</dgm:colorsDef>
+</file>
+
+<file path=ppt/diagrams/colors2.xml><?xml version="1.0" encoding="utf-8"?>
+<dgm:colorsDef xmlns:dgm="http://schemas.openxmlformats.org/drawingml/2006/diagram" xmlns:a="http://schemas.openxmlformats.org/drawingml/2006/main" uniqueId="urn:microsoft.com/office/officeart/2018/5/colors/Iconchunking_neutralicon_colorful1">
   <dgm:title val=""/>
   <dgm:desc val=""/>
   <dgm:catLst>
@@ -136,11 +924,7 @@
   </dgm:styleLbl>
   <dgm:styleLbl name="node1">
     <dgm:fillClrLst meth="repeat">
-      <a:schemeClr val="accent2"/>
-      <a:schemeClr val="accent3"/>
-      <a:schemeClr val="accent4"/>
-      <a:schemeClr val="accent5"/>
-      <a:schemeClr val="accent6"/>
+      <a:schemeClr val="bg1"/>
     </dgm:fillClrLst>
     <dgm:linClrLst meth="repeat">
       <a:schemeClr val="lt1">
@@ -149,7 +933,9 @@
     </dgm:linClrLst>
     <dgm:effectClrLst/>
     <dgm:txLinClrLst/>
-    <dgm:txFillClrLst/>
+    <dgm:txFillClrLst meth="repeat">
+      <a:schemeClr val="dk1"/>
+    </dgm:txFillClrLst>
     <dgm:txEffectClrLst/>
   </dgm:styleLbl>
   <dgm:styleLbl name="alignNode1">
@@ -952,925 +1738,6 @@
   </dgm:styleLbl>
   <dgm:styleLbl name="bgShp">
     <dgm:fillClrLst meth="repeat">
-      <a:schemeClr val="bg1">
-        <a:lumMod val="95000"/>
-      </a:schemeClr>
-    </dgm:fillClrLst>
-    <dgm:linClrLst meth="repeat">
-      <a:schemeClr val="dk1"/>
-    </dgm:linClrLst>
-    <dgm:effectClrLst/>
-    <dgm:txLinClrLst/>
-    <dgm:txFillClrLst meth="repeat">
-      <a:schemeClr val="dk1"/>
-    </dgm:txFillClrLst>
-    <dgm:txEffectClrLst/>
-  </dgm:styleLbl>
-  <dgm:styleLbl name="dkBgShp">
-    <dgm:fillClrLst meth="repeat">
-      <a:schemeClr val="accent2">
-        <a:shade val="90000"/>
-      </a:schemeClr>
-    </dgm:fillClrLst>
-    <dgm:linClrLst meth="repeat">
-      <a:schemeClr val="dk1"/>
-    </dgm:linClrLst>
-    <dgm:effectClrLst/>
-    <dgm:txLinClrLst/>
-    <dgm:txFillClrLst meth="repeat">
-      <a:schemeClr val="lt1"/>
-    </dgm:txFillClrLst>
-    <dgm:txEffectClrLst/>
-  </dgm:styleLbl>
-  <dgm:styleLbl name="trBgShp">
-    <dgm:fillClrLst meth="repeat">
-      <a:schemeClr val="accent1">
-        <a:tint val="50000"/>
-        <a:alpha val="40000"/>
-      </a:schemeClr>
-    </dgm:fillClrLst>
-    <dgm:linClrLst meth="repeat">
-      <a:schemeClr val="accent2"/>
-    </dgm:linClrLst>
-    <dgm:effectClrLst/>
-    <dgm:txLinClrLst/>
-    <dgm:txFillClrLst meth="repeat">
-      <a:schemeClr val="lt1"/>
-    </dgm:txFillClrLst>
-    <dgm:txEffectClrLst/>
-  </dgm:styleLbl>
-  <dgm:styleLbl name="fgShp">
-    <dgm:fillClrLst meth="repeat">
-      <a:schemeClr val="accent2">
-        <a:tint val="40000"/>
-      </a:schemeClr>
-    </dgm:fillClrLst>
-    <dgm:linClrLst meth="repeat">
-      <a:schemeClr val="lt1"/>
-    </dgm:linClrLst>
-    <dgm:effectClrLst/>
-    <dgm:txLinClrLst/>
-    <dgm:txFillClrLst meth="repeat">
-      <a:schemeClr val="dk1"/>
-    </dgm:txFillClrLst>
-    <dgm:txEffectClrLst/>
-  </dgm:styleLbl>
-  <dgm:styleLbl name="revTx">
-    <dgm:fillClrLst meth="repeat">
-      <a:schemeClr val="lt1">
-        <a:alpha val="0"/>
-      </a:schemeClr>
-    </dgm:fillClrLst>
-    <dgm:linClrLst meth="repeat">
-      <a:schemeClr val="dk1">
-        <a:alpha val="0"/>
-      </a:schemeClr>
-    </dgm:linClrLst>
-    <dgm:effectClrLst/>
-    <dgm:txLinClrLst/>
-    <dgm:txFillClrLst meth="repeat">
-      <a:schemeClr val="tx1"/>
-    </dgm:txFillClrLst>
-    <dgm:txEffectClrLst/>
-  </dgm:styleLbl>
-</dgm:colorsDef>
-</file>
-
-<file path=ppt/diagrams/colors2.xml><?xml version="1.0" encoding="utf-8"?>
-<dgm:colorsDef xmlns:dgm="http://schemas.openxmlformats.org/drawingml/2006/diagram" xmlns:a="http://schemas.openxmlformats.org/drawingml/2006/main" uniqueId="urn:microsoft.com/office/officeart/2018/5/colors/Iconchunking_neutralicon_colorful1">
-  <dgm:title val=""/>
-  <dgm:desc val=""/>
-  <dgm:catLst>
-    <dgm:cat type="colorful" pri="10100"/>
-  </dgm:catLst>
-  <dgm:styleLbl name="node0">
-    <dgm:fillClrLst meth="repeat">
-      <a:schemeClr val="accent1"/>
-    </dgm:fillClrLst>
-    <dgm:linClrLst meth="repeat">
-      <a:schemeClr val="lt1"/>
-    </dgm:linClrLst>
-    <dgm:effectClrLst/>
-    <dgm:txLinClrLst/>
-    <dgm:txFillClrLst/>
-    <dgm:txEffectClrLst/>
-  </dgm:styleLbl>
-  <dgm:styleLbl name="node1">
-    <dgm:fillClrLst meth="repeat">
-      <a:schemeClr val="bg1"/>
-    </dgm:fillClrLst>
-    <dgm:linClrLst meth="repeat">
-      <a:schemeClr val="lt1">
-        <a:alpha val="0"/>
-      </a:schemeClr>
-    </dgm:linClrLst>
-    <dgm:effectClrLst/>
-    <dgm:txLinClrLst/>
-    <dgm:txFillClrLst meth="repeat">
-      <a:schemeClr val="dk1"/>
-    </dgm:txFillClrLst>
-    <dgm:txEffectClrLst/>
-  </dgm:styleLbl>
-  <dgm:styleLbl name="alignNode1">
-    <dgm:fillClrLst meth="repeat">
-      <a:schemeClr val="accent2"/>
-      <a:schemeClr val="accent3"/>
-      <a:schemeClr val="accent4"/>
-      <a:schemeClr val="accent5"/>
-      <a:schemeClr val="accent6"/>
-    </dgm:fillClrLst>
-    <dgm:linClrLst meth="repeat">
-      <a:schemeClr val="accent2"/>
-      <a:schemeClr val="accent3"/>
-      <a:schemeClr val="accent4"/>
-      <a:schemeClr val="accent5"/>
-      <a:schemeClr val="accent6"/>
-    </dgm:linClrLst>
-    <dgm:effectClrLst/>
-    <dgm:txLinClrLst/>
-    <dgm:txFillClrLst/>
-    <dgm:txEffectClrLst/>
-  </dgm:styleLbl>
-  <dgm:styleLbl name="lnNode1">
-    <dgm:fillClrLst meth="repeat">
-      <a:schemeClr val="accent2"/>
-      <a:schemeClr val="accent3"/>
-      <a:schemeClr val="accent4"/>
-      <a:schemeClr val="accent5"/>
-      <a:schemeClr val="accent6"/>
-    </dgm:fillClrLst>
-    <dgm:linClrLst meth="repeat">
-      <a:schemeClr val="lt1"/>
-    </dgm:linClrLst>
-    <dgm:effectClrLst/>
-    <dgm:txLinClrLst/>
-    <dgm:txFillClrLst/>
-    <dgm:txEffectClrLst/>
-  </dgm:styleLbl>
-  <dgm:styleLbl name="vennNode1">
-    <dgm:fillClrLst meth="repeat">
-      <a:schemeClr val="accent2">
-        <a:alpha val="50000"/>
-      </a:schemeClr>
-      <a:schemeClr val="accent3">
-        <a:alpha val="50000"/>
-      </a:schemeClr>
-      <a:schemeClr val="accent4">
-        <a:alpha val="50000"/>
-      </a:schemeClr>
-      <a:schemeClr val="accent5">
-        <a:alpha val="50000"/>
-      </a:schemeClr>
-      <a:schemeClr val="accent6">
-        <a:alpha val="50000"/>
-      </a:schemeClr>
-    </dgm:fillClrLst>
-    <dgm:linClrLst meth="repeat">
-      <a:schemeClr val="lt1"/>
-    </dgm:linClrLst>
-    <dgm:effectClrLst/>
-    <dgm:txLinClrLst/>
-    <dgm:txFillClrLst/>
-    <dgm:txEffectClrLst/>
-  </dgm:styleLbl>
-  <dgm:styleLbl name="node2">
-    <dgm:fillClrLst>
-      <a:schemeClr val="accent2"/>
-    </dgm:fillClrLst>
-    <dgm:linClrLst meth="repeat">
-      <a:schemeClr val="lt1"/>
-    </dgm:linClrLst>
-    <dgm:effectClrLst/>
-    <dgm:txLinClrLst/>
-    <dgm:txFillClrLst/>
-    <dgm:txEffectClrLst/>
-  </dgm:styleLbl>
-  <dgm:styleLbl name="node3">
-    <dgm:fillClrLst>
-      <a:schemeClr val="accent3"/>
-    </dgm:fillClrLst>
-    <dgm:linClrLst meth="repeat">
-      <a:schemeClr val="lt1"/>
-    </dgm:linClrLst>
-    <dgm:effectClrLst/>
-    <dgm:txLinClrLst/>
-    <dgm:txFillClrLst/>
-    <dgm:txEffectClrLst/>
-  </dgm:styleLbl>
-  <dgm:styleLbl name="node4">
-    <dgm:fillClrLst>
-      <a:schemeClr val="accent4"/>
-    </dgm:fillClrLst>
-    <dgm:linClrLst meth="repeat">
-      <a:schemeClr val="lt1"/>
-    </dgm:linClrLst>
-    <dgm:effectClrLst/>
-    <dgm:txLinClrLst/>
-    <dgm:txFillClrLst/>
-    <dgm:txEffectClrLst/>
-  </dgm:styleLbl>
-  <dgm:styleLbl name="fgImgPlace1">
-    <dgm:fillClrLst meth="repeat">
-      <a:schemeClr val="accent2">
-        <a:tint val="50000"/>
-      </a:schemeClr>
-      <a:schemeClr val="accent3">
-        <a:tint val="50000"/>
-      </a:schemeClr>
-      <a:schemeClr val="accent4">
-        <a:tint val="50000"/>
-      </a:schemeClr>
-      <a:schemeClr val="accent5">
-        <a:tint val="50000"/>
-      </a:schemeClr>
-      <a:schemeClr val="accent6">
-        <a:tint val="50000"/>
-      </a:schemeClr>
-    </dgm:fillClrLst>
-    <dgm:linClrLst meth="repeat">
-      <a:schemeClr val="lt1"/>
-    </dgm:linClrLst>
-    <dgm:effectClrLst/>
-    <dgm:txLinClrLst/>
-    <dgm:txFillClrLst meth="repeat">
-      <a:schemeClr val="lt1"/>
-    </dgm:txFillClrLst>
-    <dgm:txEffectClrLst/>
-  </dgm:styleLbl>
-  <dgm:styleLbl name="alignImgPlace1">
-    <dgm:fillClrLst>
-      <a:schemeClr val="accent1">
-        <a:tint val="50000"/>
-      </a:schemeClr>
-      <a:schemeClr val="accent2">
-        <a:tint val="20000"/>
-      </a:schemeClr>
-    </dgm:fillClrLst>
-    <dgm:linClrLst meth="repeat">
-      <a:schemeClr val="lt1"/>
-    </dgm:linClrLst>
-    <dgm:effectClrLst/>
-    <dgm:txLinClrLst/>
-    <dgm:txFillClrLst meth="repeat">
-      <a:schemeClr val="lt1"/>
-    </dgm:txFillClrLst>
-    <dgm:txEffectClrLst/>
-  </dgm:styleLbl>
-  <dgm:styleLbl name="bgImgPlace1">
-    <dgm:fillClrLst>
-      <a:schemeClr val="accent1">
-        <a:tint val="50000"/>
-      </a:schemeClr>
-      <a:schemeClr val="accent2">
-        <a:tint val="20000"/>
-      </a:schemeClr>
-    </dgm:fillClrLst>
-    <dgm:linClrLst meth="repeat">
-      <a:schemeClr val="lt1"/>
-    </dgm:linClrLst>
-    <dgm:effectClrLst/>
-    <dgm:txLinClrLst/>
-    <dgm:txFillClrLst meth="repeat">
-      <a:schemeClr val="lt1"/>
-    </dgm:txFillClrLst>
-    <dgm:txEffectClrLst/>
-  </dgm:styleLbl>
-  <dgm:styleLbl name="sibTrans2D1">
-    <dgm:fillClrLst meth="repeat">
-      <a:schemeClr val="accent2"/>
-      <a:schemeClr val="accent3"/>
-      <a:schemeClr val="accent4"/>
-      <a:schemeClr val="accent5"/>
-      <a:schemeClr val="accent6"/>
-    </dgm:fillClrLst>
-    <dgm:linClrLst meth="cycle">
-      <a:schemeClr val="lt1"/>
-    </dgm:linClrLst>
-    <dgm:effectClrLst/>
-    <dgm:txLinClrLst/>
-    <dgm:txFillClrLst/>
-    <dgm:txEffectClrLst/>
-  </dgm:styleLbl>
-  <dgm:styleLbl name="fgSibTrans2D1">
-    <dgm:fillClrLst meth="repeat">
-      <a:schemeClr val="accent2"/>
-      <a:schemeClr val="accent3"/>
-      <a:schemeClr val="accent4"/>
-      <a:schemeClr val="accent5"/>
-      <a:schemeClr val="accent6"/>
-    </dgm:fillClrLst>
-    <dgm:linClrLst meth="cycle">
-      <a:schemeClr val="lt1"/>
-    </dgm:linClrLst>
-    <dgm:effectClrLst/>
-    <dgm:txLinClrLst/>
-    <dgm:txFillClrLst meth="repeat">
-      <a:schemeClr val="lt1"/>
-    </dgm:txFillClrLst>
-    <dgm:txEffectClrLst/>
-  </dgm:styleLbl>
-  <dgm:styleLbl name="bgSibTrans2D1">
-    <dgm:fillClrLst meth="repeat">
-      <a:schemeClr val="accent2"/>
-      <a:schemeClr val="accent3"/>
-      <a:schemeClr val="accent4"/>
-      <a:schemeClr val="accent5"/>
-      <a:schemeClr val="accent6"/>
-    </dgm:fillClrLst>
-    <dgm:linClrLst meth="cycle">
-      <a:schemeClr val="lt1"/>
-    </dgm:linClrLst>
-    <dgm:effectClrLst/>
-    <dgm:txLinClrLst/>
-    <dgm:txFillClrLst meth="repeat">
-      <a:schemeClr val="lt1"/>
-    </dgm:txFillClrLst>
-    <dgm:txEffectClrLst/>
-  </dgm:styleLbl>
-  <dgm:styleLbl name="sibTrans1D1">
-    <dgm:fillClrLst meth="repeat">
-      <a:schemeClr val="accent2"/>
-      <a:schemeClr val="accent3"/>
-      <a:schemeClr val="accent4"/>
-      <a:schemeClr val="accent5"/>
-      <a:schemeClr val="accent6"/>
-    </dgm:fillClrLst>
-    <dgm:linClrLst meth="repeat">
-      <a:schemeClr val="accent2"/>
-      <a:schemeClr val="accent3"/>
-      <a:schemeClr val="accent4"/>
-      <a:schemeClr val="accent5"/>
-      <a:schemeClr val="accent6"/>
-    </dgm:linClrLst>
-    <dgm:effectClrLst/>
-    <dgm:txLinClrLst/>
-    <dgm:txFillClrLst meth="repeat">
-      <a:schemeClr val="tx1"/>
-    </dgm:txFillClrLst>
-    <dgm:txEffectClrLst/>
-  </dgm:styleLbl>
-  <dgm:styleLbl name="callout">
-    <dgm:fillClrLst meth="repeat">
-      <a:schemeClr val="accent2"/>
-    </dgm:fillClrLst>
-    <dgm:linClrLst meth="repeat">
-      <a:schemeClr val="accent2">
-        <a:tint val="50000"/>
-      </a:schemeClr>
-    </dgm:linClrLst>
-    <dgm:effectClrLst/>
-    <dgm:txLinClrLst/>
-    <dgm:txFillClrLst meth="repeat">
-      <a:schemeClr val="tx1"/>
-    </dgm:txFillClrLst>
-    <dgm:txEffectClrLst/>
-  </dgm:styleLbl>
-  <dgm:styleLbl name="asst0">
-    <dgm:fillClrLst meth="repeat">
-      <a:schemeClr val="accent1"/>
-    </dgm:fillClrLst>
-    <dgm:linClrLst meth="repeat">
-      <a:schemeClr val="lt1"/>
-    </dgm:linClrLst>
-    <dgm:effectClrLst/>
-    <dgm:txLinClrLst/>
-    <dgm:txFillClrLst/>
-    <dgm:txEffectClrLst/>
-  </dgm:styleLbl>
-  <dgm:styleLbl name="asst1">
-    <dgm:fillClrLst meth="repeat">
-      <a:schemeClr val="accent2"/>
-    </dgm:fillClrLst>
-    <dgm:linClrLst meth="repeat">
-      <a:schemeClr val="lt1"/>
-    </dgm:linClrLst>
-    <dgm:effectClrLst/>
-    <dgm:txLinClrLst/>
-    <dgm:txFillClrLst/>
-    <dgm:txEffectClrLst/>
-  </dgm:styleLbl>
-  <dgm:styleLbl name="asst2">
-    <dgm:fillClrLst>
-      <a:schemeClr val="accent3"/>
-    </dgm:fillClrLst>
-    <dgm:linClrLst meth="repeat">
-      <a:schemeClr val="lt1"/>
-    </dgm:linClrLst>
-    <dgm:effectClrLst/>
-    <dgm:txLinClrLst/>
-    <dgm:txFillClrLst/>
-    <dgm:txEffectClrLst/>
-  </dgm:styleLbl>
-  <dgm:styleLbl name="asst3">
-    <dgm:fillClrLst>
-      <a:schemeClr val="accent4"/>
-    </dgm:fillClrLst>
-    <dgm:linClrLst meth="repeat">
-      <a:schemeClr val="lt1"/>
-    </dgm:linClrLst>
-    <dgm:effectClrLst/>
-    <dgm:txLinClrLst/>
-    <dgm:txFillClrLst/>
-    <dgm:txEffectClrLst/>
-  </dgm:styleLbl>
-  <dgm:styleLbl name="asst4">
-    <dgm:fillClrLst>
-      <a:schemeClr val="accent5"/>
-    </dgm:fillClrLst>
-    <dgm:linClrLst meth="repeat">
-      <a:schemeClr val="lt1"/>
-    </dgm:linClrLst>
-    <dgm:effectClrLst/>
-    <dgm:txLinClrLst/>
-    <dgm:txFillClrLst/>
-    <dgm:txEffectClrLst/>
-  </dgm:styleLbl>
-  <dgm:styleLbl name="parChTrans2D1">
-    <dgm:fillClrLst meth="repeat">
-      <a:schemeClr val="accent2"/>
-    </dgm:fillClrLst>
-    <dgm:linClrLst meth="repeat">
-      <a:schemeClr val="lt1"/>
-    </dgm:linClrLst>
-    <dgm:effectClrLst/>
-    <dgm:txLinClrLst/>
-    <dgm:txFillClrLst meth="repeat">
-      <a:schemeClr val="lt1"/>
-    </dgm:txFillClrLst>
-    <dgm:txEffectClrLst/>
-  </dgm:styleLbl>
-  <dgm:styleLbl name="parChTrans2D2">
-    <dgm:fillClrLst meth="repeat">
-      <a:schemeClr val="accent3"/>
-    </dgm:fillClrLst>
-    <dgm:linClrLst meth="repeat">
-      <a:schemeClr val="lt1"/>
-    </dgm:linClrLst>
-    <dgm:effectClrLst/>
-    <dgm:txLinClrLst/>
-    <dgm:txFillClrLst/>
-    <dgm:txEffectClrLst/>
-  </dgm:styleLbl>
-  <dgm:styleLbl name="parChTrans2D3">
-    <dgm:fillClrLst meth="repeat">
-      <a:schemeClr val="accent4"/>
-    </dgm:fillClrLst>
-    <dgm:linClrLst meth="repeat">
-      <a:schemeClr val="lt1"/>
-    </dgm:linClrLst>
-    <dgm:effectClrLst/>
-    <dgm:txLinClrLst/>
-    <dgm:txFillClrLst/>
-    <dgm:txEffectClrLst/>
-  </dgm:styleLbl>
-  <dgm:styleLbl name="parChTrans2D4">
-    <dgm:fillClrLst meth="repeat">
-      <a:schemeClr val="accent5"/>
-    </dgm:fillClrLst>
-    <dgm:linClrLst meth="repeat">
-      <a:schemeClr val="lt1"/>
-    </dgm:linClrLst>
-    <dgm:effectClrLst/>
-    <dgm:txLinClrLst/>
-    <dgm:txFillClrLst meth="repeat">
-      <a:schemeClr val="lt1"/>
-    </dgm:txFillClrLst>
-    <dgm:txEffectClrLst/>
-  </dgm:styleLbl>
-  <dgm:styleLbl name="parChTrans1D1">
-    <dgm:fillClrLst meth="repeat">
-      <a:schemeClr val="accent2"/>
-    </dgm:fillClrLst>
-    <dgm:linClrLst meth="repeat">
-      <a:schemeClr val="accent1"/>
-    </dgm:linClrLst>
-    <dgm:effectClrLst/>
-    <dgm:txLinClrLst/>
-    <dgm:txFillClrLst meth="repeat">
-      <a:schemeClr val="tx1"/>
-    </dgm:txFillClrLst>
-    <dgm:txEffectClrLst/>
-  </dgm:styleLbl>
-  <dgm:styleLbl name="parChTrans1D2">
-    <dgm:fillClrLst meth="repeat">
-      <a:schemeClr val="accent3">
-        <a:tint val="90000"/>
-      </a:schemeClr>
-    </dgm:fillClrLst>
-    <dgm:linClrLst meth="repeat">
-      <a:schemeClr val="accent2"/>
-    </dgm:linClrLst>
-    <dgm:effectClrLst/>
-    <dgm:txLinClrLst/>
-    <dgm:txFillClrLst meth="repeat">
-      <a:schemeClr val="tx1"/>
-    </dgm:txFillClrLst>
-    <dgm:txEffectClrLst/>
-  </dgm:styleLbl>
-  <dgm:styleLbl name="parChTrans1D3">
-    <dgm:fillClrLst meth="repeat">
-      <a:schemeClr val="accent4">
-        <a:tint val="70000"/>
-      </a:schemeClr>
-    </dgm:fillClrLst>
-    <dgm:linClrLst meth="repeat">
-      <a:schemeClr val="accent3"/>
-    </dgm:linClrLst>
-    <dgm:effectClrLst/>
-    <dgm:txLinClrLst/>
-    <dgm:txFillClrLst meth="repeat">
-      <a:schemeClr val="tx1"/>
-    </dgm:txFillClrLst>
-    <dgm:txEffectClrLst/>
-  </dgm:styleLbl>
-  <dgm:styleLbl name="parChTrans1D4">
-    <dgm:fillClrLst meth="repeat">
-      <a:schemeClr val="accent5">
-        <a:tint val="50000"/>
-      </a:schemeClr>
-    </dgm:fillClrLst>
-    <dgm:linClrLst meth="repeat">
-      <a:schemeClr val="accent4"/>
-    </dgm:linClrLst>
-    <dgm:effectClrLst/>
-    <dgm:txLinClrLst/>
-    <dgm:txFillClrLst meth="repeat">
-      <a:schemeClr val="tx1"/>
-    </dgm:txFillClrLst>
-    <dgm:txEffectClrLst/>
-  </dgm:styleLbl>
-  <dgm:styleLbl name="fgAcc1">
-    <dgm:fillClrLst meth="repeat">
-      <a:schemeClr val="lt1">
-        <a:alpha val="90000"/>
-      </a:schemeClr>
-    </dgm:fillClrLst>
-    <dgm:linClrLst meth="repeat">
-      <a:schemeClr val="accent2"/>
-      <a:schemeClr val="accent3"/>
-      <a:schemeClr val="accent4"/>
-      <a:schemeClr val="accent5"/>
-      <a:schemeClr val="accent6"/>
-    </dgm:linClrLst>
-    <dgm:effectClrLst/>
-    <dgm:txLinClrLst/>
-    <dgm:txFillClrLst meth="repeat">
-      <a:schemeClr val="dk1"/>
-    </dgm:txFillClrLst>
-    <dgm:txEffectClrLst/>
-  </dgm:styleLbl>
-  <dgm:styleLbl name="conFgAcc1">
-    <dgm:fillClrLst meth="repeat">
-      <a:schemeClr val="lt1">
-        <a:alpha val="90000"/>
-      </a:schemeClr>
-    </dgm:fillClrLst>
-    <dgm:linClrLst meth="repeat">
-      <a:schemeClr val="accent2"/>
-      <a:schemeClr val="accent3"/>
-      <a:schemeClr val="accent4"/>
-      <a:schemeClr val="accent5"/>
-      <a:schemeClr val="accent6"/>
-    </dgm:linClrLst>
-    <dgm:effectClrLst/>
-    <dgm:txLinClrLst/>
-    <dgm:txFillClrLst meth="repeat">
-      <a:schemeClr val="dk1"/>
-    </dgm:txFillClrLst>
-    <dgm:txEffectClrLst/>
-  </dgm:styleLbl>
-  <dgm:styleLbl name="alignAcc1">
-    <dgm:fillClrLst meth="repeat">
-      <a:schemeClr val="lt1">
-        <a:alpha val="90000"/>
-      </a:schemeClr>
-    </dgm:fillClrLst>
-    <dgm:linClrLst meth="repeat">
-      <a:schemeClr val="accent2"/>
-      <a:schemeClr val="accent3"/>
-      <a:schemeClr val="accent4"/>
-      <a:schemeClr val="accent5"/>
-      <a:schemeClr val="accent6"/>
-    </dgm:linClrLst>
-    <dgm:effectClrLst/>
-    <dgm:txLinClrLst/>
-    <dgm:txFillClrLst meth="repeat">
-      <a:schemeClr val="dk1"/>
-    </dgm:txFillClrLst>
-    <dgm:txEffectClrLst/>
-  </dgm:styleLbl>
-  <dgm:styleLbl name="trAlignAcc1">
-    <dgm:fillClrLst meth="repeat">
-      <a:schemeClr val="lt1">
-        <a:alpha val="40000"/>
-      </a:schemeClr>
-    </dgm:fillClrLst>
-    <dgm:linClrLst meth="repeat">
-      <a:schemeClr val="accent1"/>
-    </dgm:linClrLst>
-    <dgm:effectClrLst/>
-    <dgm:txLinClrLst/>
-    <dgm:txFillClrLst meth="repeat">
-      <a:schemeClr val="dk1"/>
-    </dgm:txFillClrLst>
-    <dgm:txEffectClrLst/>
-  </dgm:styleLbl>
-  <dgm:styleLbl name="bgAcc1">
-    <dgm:fillClrLst meth="repeat">
-      <a:schemeClr val="lt1">
-        <a:alpha val="90000"/>
-      </a:schemeClr>
-    </dgm:fillClrLst>
-    <dgm:linClrLst meth="repeat">
-      <a:schemeClr val="accent2"/>
-      <a:schemeClr val="accent3"/>
-      <a:schemeClr val="accent4"/>
-      <a:schemeClr val="accent5"/>
-      <a:schemeClr val="accent6"/>
-    </dgm:linClrLst>
-    <dgm:effectClrLst/>
-    <dgm:txLinClrLst/>
-    <dgm:txFillClrLst meth="repeat">
-      <a:schemeClr val="dk1"/>
-    </dgm:txFillClrLst>
-    <dgm:txEffectClrLst/>
-  </dgm:styleLbl>
-  <dgm:styleLbl name="solidFgAcc1">
-    <dgm:fillClrLst meth="repeat">
-      <a:schemeClr val="lt1"/>
-    </dgm:fillClrLst>
-    <dgm:linClrLst meth="repeat">
-      <a:schemeClr val="accent2"/>
-      <a:schemeClr val="accent3"/>
-      <a:schemeClr val="accent4"/>
-      <a:schemeClr val="accent5"/>
-      <a:schemeClr val="accent6"/>
-    </dgm:linClrLst>
-    <dgm:effectClrLst/>
-    <dgm:txLinClrLst/>
-    <dgm:txFillClrLst meth="repeat">
-      <a:schemeClr val="dk1"/>
-    </dgm:txFillClrLst>
-    <dgm:txEffectClrLst/>
-  </dgm:styleLbl>
-  <dgm:styleLbl name="solidAlignAcc1">
-    <dgm:fillClrLst meth="repeat">
-      <a:schemeClr val="lt1"/>
-    </dgm:fillClrLst>
-    <dgm:linClrLst meth="repeat">
-      <a:schemeClr val="accent2"/>
-      <a:schemeClr val="accent3"/>
-      <a:schemeClr val="accent4"/>
-      <a:schemeClr val="accent5"/>
-      <a:schemeClr val="accent6"/>
-    </dgm:linClrLst>
-    <dgm:effectClrLst/>
-    <dgm:txLinClrLst/>
-    <dgm:txFillClrLst meth="repeat">
-      <a:schemeClr val="dk1"/>
-    </dgm:txFillClrLst>
-    <dgm:txEffectClrLst/>
-  </dgm:styleLbl>
-  <dgm:styleLbl name="solidBgAcc1">
-    <dgm:fillClrLst meth="repeat">
-      <a:schemeClr val="lt1"/>
-    </dgm:fillClrLst>
-    <dgm:linClrLst meth="repeat">
-      <a:schemeClr val="accent2"/>
-      <a:schemeClr val="accent3"/>
-      <a:schemeClr val="accent4"/>
-      <a:schemeClr val="accent5"/>
-      <a:schemeClr val="accent6"/>
-    </dgm:linClrLst>
-    <dgm:effectClrLst/>
-    <dgm:txLinClrLst/>
-    <dgm:txFillClrLst meth="repeat">
-      <a:schemeClr val="dk1"/>
-    </dgm:txFillClrLst>
-    <dgm:txEffectClrLst/>
-  </dgm:styleLbl>
-  <dgm:styleLbl name="fgAccFollowNode1">
-    <dgm:fillClrLst meth="repeat">
-      <a:schemeClr val="accent2">
-        <a:tint val="40000"/>
-        <a:alpha val="90000"/>
-      </a:schemeClr>
-      <a:schemeClr val="accent3">
-        <a:tint val="40000"/>
-        <a:alpha val="90000"/>
-      </a:schemeClr>
-      <a:schemeClr val="accent4">
-        <a:tint val="40000"/>
-        <a:alpha val="90000"/>
-      </a:schemeClr>
-      <a:schemeClr val="accent5">
-        <a:tint val="40000"/>
-        <a:alpha val="90000"/>
-      </a:schemeClr>
-      <a:schemeClr val="accent6">
-        <a:tint val="40000"/>
-        <a:alpha val="90000"/>
-      </a:schemeClr>
-    </dgm:fillClrLst>
-    <dgm:linClrLst meth="repeat">
-      <a:schemeClr val="accent2">
-        <a:tint val="40000"/>
-        <a:alpha val="90000"/>
-      </a:schemeClr>
-      <a:schemeClr val="accent3">
-        <a:tint val="40000"/>
-        <a:alpha val="90000"/>
-      </a:schemeClr>
-      <a:schemeClr val="accent4">
-        <a:tint val="40000"/>
-        <a:alpha val="90000"/>
-      </a:schemeClr>
-      <a:schemeClr val="accent5">
-        <a:tint val="40000"/>
-        <a:alpha val="90000"/>
-      </a:schemeClr>
-      <a:schemeClr val="accent6">
-        <a:tint val="40000"/>
-        <a:alpha val="90000"/>
-      </a:schemeClr>
-    </dgm:linClrLst>
-    <dgm:effectClrLst/>
-    <dgm:txLinClrLst/>
-    <dgm:txFillClrLst meth="repeat">
-      <a:schemeClr val="dk1"/>
-    </dgm:txFillClrLst>
-    <dgm:txEffectClrLst/>
-  </dgm:styleLbl>
-  <dgm:styleLbl name="alignAccFollowNode1">
-    <dgm:fillClrLst meth="repeat">
-      <a:schemeClr val="accent2">
-        <a:tint val="40000"/>
-        <a:alpha val="90000"/>
-      </a:schemeClr>
-      <a:schemeClr val="accent3">
-        <a:tint val="40000"/>
-        <a:alpha val="90000"/>
-      </a:schemeClr>
-      <a:schemeClr val="accent4">
-        <a:tint val="40000"/>
-        <a:alpha val="90000"/>
-      </a:schemeClr>
-      <a:schemeClr val="accent5">
-        <a:tint val="40000"/>
-        <a:alpha val="90000"/>
-      </a:schemeClr>
-      <a:schemeClr val="accent6">
-        <a:tint val="40000"/>
-        <a:alpha val="90000"/>
-      </a:schemeClr>
-    </dgm:fillClrLst>
-    <dgm:linClrLst meth="repeat">
-      <a:schemeClr val="accent2">
-        <a:tint val="40000"/>
-        <a:alpha val="90000"/>
-      </a:schemeClr>
-      <a:schemeClr val="accent3">
-        <a:tint val="40000"/>
-        <a:alpha val="90000"/>
-      </a:schemeClr>
-      <a:schemeClr val="accent4">
-        <a:tint val="40000"/>
-        <a:alpha val="90000"/>
-      </a:schemeClr>
-      <a:schemeClr val="accent5">
-        <a:tint val="40000"/>
-        <a:alpha val="90000"/>
-      </a:schemeClr>
-      <a:schemeClr val="accent6">
-        <a:tint val="40000"/>
-        <a:alpha val="90000"/>
-      </a:schemeClr>
-    </dgm:linClrLst>
-    <dgm:effectClrLst/>
-    <dgm:txLinClrLst/>
-    <dgm:txFillClrLst meth="repeat">
-      <a:schemeClr val="dk1"/>
-    </dgm:txFillClrLst>
-    <dgm:txEffectClrLst/>
-  </dgm:styleLbl>
-  <dgm:styleLbl name="bgAccFollowNode1">
-    <dgm:fillClrLst meth="repeat">
-      <a:schemeClr val="accent2">
-        <a:tint val="40000"/>
-        <a:alpha val="90000"/>
-      </a:schemeClr>
-      <a:schemeClr val="accent3">
-        <a:tint val="40000"/>
-        <a:alpha val="90000"/>
-      </a:schemeClr>
-      <a:schemeClr val="accent4">
-        <a:tint val="40000"/>
-        <a:alpha val="90000"/>
-      </a:schemeClr>
-      <a:schemeClr val="accent5">
-        <a:tint val="40000"/>
-        <a:alpha val="90000"/>
-      </a:schemeClr>
-      <a:schemeClr val="accent6">
-        <a:tint val="40000"/>
-        <a:alpha val="90000"/>
-      </a:schemeClr>
-    </dgm:fillClrLst>
-    <dgm:linClrLst meth="repeat">
-      <a:schemeClr val="accent2">
-        <a:tint val="40000"/>
-        <a:alpha val="90000"/>
-      </a:schemeClr>
-      <a:schemeClr val="accent3">
-        <a:tint val="40000"/>
-        <a:alpha val="90000"/>
-      </a:schemeClr>
-      <a:schemeClr val="accent4">
-        <a:tint val="40000"/>
-        <a:alpha val="90000"/>
-      </a:schemeClr>
-      <a:schemeClr val="accent5">
-        <a:tint val="40000"/>
-        <a:alpha val="90000"/>
-      </a:schemeClr>
-      <a:schemeClr val="accent6">
-        <a:tint val="40000"/>
-        <a:alpha val="90000"/>
-      </a:schemeClr>
-    </dgm:linClrLst>
-    <dgm:effectClrLst/>
-    <dgm:txLinClrLst/>
-    <dgm:txFillClrLst meth="repeat">
-      <a:schemeClr val="dk1"/>
-    </dgm:txFillClrLst>
-    <dgm:txEffectClrLst/>
-  </dgm:styleLbl>
-  <dgm:styleLbl name="fgAcc0">
-    <dgm:fillClrLst meth="repeat">
-      <a:schemeClr val="lt1">
-        <a:alpha val="90000"/>
-      </a:schemeClr>
-    </dgm:fillClrLst>
-    <dgm:linClrLst>
-      <a:schemeClr val="accent1"/>
-    </dgm:linClrLst>
-    <dgm:effectClrLst/>
-    <dgm:txLinClrLst/>
-    <dgm:txFillClrLst meth="repeat">
-      <a:schemeClr val="dk1"/>
-    </dgm:txFillClrLst>
-    <dgm:txEffectClrLst/>
-  </dgm:styleLbl>
-  <dgm:styleLbl name="fgAcc2">
-    <dgm:fillClrLst meth="repeat">
-      <a:schemeClr val="lt1">
-        <a:alpha val="90000"/>
-      </a:schemeClr>
-    </dgm:fillClrLst>
-    <dgm:linClrLst>
-      <a:schemeClr val="accent2"/>
-    </dgm:linClrLst>
-    <dgm:effectClrLst/>
-    <dgm:txLinClrLst/>
-    <dgm:txFillClrLst meth="repeat">
-      <a:schemeClr val="dk1"/>
-    </dgm:txFillClrLst>
-    <dgm:txEffectClrLst/>
-  </dgm:styleLbl>
-  <dgm:styleLbl name="fgAcc3">
-    <dgm:fillClrLst meth="repeat">
-      <a:schemeClr val="lt1">
-        <a:alpha val="90000"/>
-      </a:schemeClr>
-    </dgm:fillClrLst>
-    <dgm:linClrLst>
-      <a:schemeClr val="accent3"/>
-    </dgm:linClrLst>
-    <dgm:effectClrLst/>
-    <dgm:txLinClrLst/>
-    <dgm:txFillClrLst meth="repeat">
-      <a:schemeClr val="dk1"/>
-    </dgm:txFillClrLst>
-    <dgm:txEffectClrLst/>
-  </dgm:styleLbl>
-  <dgm:styleLbl name="fgAcc4">
-    <dgm:fillClrLst meth="repeat">
-      <a:schemeClr val="lt1">
-        <a:alpha val="90000"/>
-      </a:schemeClr>
-    </dgm:fillClrLst>
-    <dgm:linClrLst>
-      <a:schemeClr val="accent4"/>
-    </dgm:linClrLst>
-    <dgm:effectClrLst/>
-    <dgm:txLinClrLst/>
-    <dgm:txFillClrLst meth="repeat">
-      <a:schemeClr val="dk1"/>
-    </dgm:txFillClrLst>
-    <dgm:txEffectClrLst/>
-  </dgm:styleLbl>
-  <dgm:styleLbl name="bgShp">
-    <dgm:fillClrLst meth="repeat">
       <a:schemeClr val="accent2"/>
       <a:schemeClr val="accent3"/>
       <a:schemeClr val="accent4"/>
@@ -2768,7 +2635,7 @@
 <dgm:dataModel xmlns:dgm="http://schemas.openxmlformats.org/drawingml/2006/diagram" xmlns:a="http://schemas.openxmlformats.org/drawingml/2006/main">
   <dgm:ptLst>
     <dgm:pt modelId="{048F03C7-C8C4-4DE8-840C-E9819713C300}" type="doc">
-      <dgm:prSet loTypeId="urn:microsoft.com/office/officeart/2018/2/layout/IconVerticalSolidList" loCatId="icon" qsTypeId="urn:microsoft.com/office/officeart/2005/8/quickstyle/simple1" qsCatId="simple" csTypeId="urn:microsoft.com/office/officeart/2018/5/colors/Iconchunking_neutralbg_colorful1" csCatId="colorful" phldr="1"/>
+      <dgm:prSet loTypeId="urn:microsoft.com/office/officeart/2008/layout/LinedList" loCatId="list" qsTypeId="urn:microsoft.com/office/officeart/2005/8/quickstyle/simple5" qsCatId="simple" csTypeId="urn:microsoft.com/office/officeart/2005/8/colors/colorful5" csCatId="colorful" phldr="1"/>
       <dgm:spPr/>
       <dgm:t>
         <a:bodyPr/>
@@ -2905,202 +2772,91 @@
         </a:p>
       </dgm:t>
     </dgm:pt>
-    <dgm:pt modelId="{B90DB1A2-F134-4D61-A3BF-FB88AE324CEA}" type="pres">
-      <dgm:prSet presAssocID="{048F03C7-C8C4-4DE8-840C-E9819713C300}" presName="root" presStyleCnt="0">
+    <dgm:pt modelId="{2D85BAEE-1F2B-42ED-BB60-370AD692EC90}" type="pres">
+      <dgm:prSet presAssocID="{048F03C7-C8C4-4DE8-840C-E9819713C300}" presName="vert0" presStyleCnt="0">
         <dgm:presLayoutVars>
           <dgm:dir/>
-          <dgm:resizeHandles val="exact"/>
+          <dgm:animOne val="branch"/>
+          <dgm:animLvl val="lvl"/>
         </dgm:presLayoutVars>
       </dgm:prSet>
       <dgm:spPr/>
     </dgm:pt>
-    <dgm:pt modelId="{44BB0ED9-AF6C-470C-822C-C261D7F66902}" type="pres">
-      <dgm:prSet presAssocID="{120755E6-FAED-471B-93C5-C20339594CD7}" presName="compNode" presStyleCnt="0"/>
+    <dgm:pt modelId="{3A5BDE82-DA80-4486-9BFC-C812E223675B}" type="pres">
+      <dgm:prSet presAssocID="{120755E6-FAED-471B-93C5-C20339594CD7}" presName="thickLine" presStyleLbl="alignNode1" presStyleIdx="0" presStyleCnt="3"/>
       <dgm:spPr/>
     </dgm:pt>
-    <dgm:pt modelId="{0150BFE2-AFBD-4D0C-A2AC-D41DC30AB828}" type="pres">
-      <dgm:prSet presAssocID="{120755E6-FAED-471B-93C5-C20339594CD7}" presName="bgRect" presStyleLbl="bgShp" presStyleIdx="0" presStyleCnt="3"/>
+    <dgm:pt modelId="{0A7F583F-6688-42F8-9E2E-0AA0CAC6B89E}" type="pres">
+      <dgm:prSet presAssocID="{120755E6-FAED-471B-93C5-C20339594CD7}" presName="horz1" presStyleCnt="0"/>
       <dgm:spPr/>
     </dgm:pt>
-    <dgm:pt modelId="{ED35BB28-A131-4BC7-8BC5-2FB29DDD7D5C}" type="pres">
-      <dgm:prSet presAssocID="{120755E6-FAED-471B-93C5-C20339594CD7}" presName="iconRect" presStyleLbl="node1" presStyleIdx="0" presStyleCnt="3"/>
-      <dgm:spPr>
-        <a:blipFill>
-          <a:blip xmlns:r="http://schemas.openxmlformats.org/officeDocument/2006/relationships" r:embed="rId1">
-            <a:extLst>
-              <a:ext uri="{28A0092B-C50C-407E-A947-70E740481C1C}">
-                <a14:useLocalDpi xmlns:a14="http://schemas.microsoft.com/office/drawing/2010/main" val="0"/>
-              </a:ext>
-              <a:ext uri="{96DAC541-7B7A-43D3-8B79-37D633B846F1}">
-                <asvg:svgBlip xmlns:asvg="http://schemas.microsoft.com/office/drawing/2016/SVG/main" r:embed="rId2"/>
-              </a:ext>
-            </a:extLst>
-          </a:blip>
-          <a:stretch>
-            <a:fillRect/>
-          </a:stretch>
-        </a:blipFill>
-        <a:ln>
-          <a:noFill/>
-        </a:ln>
-      </dgm:spPr>
-      <dgm:extLst>
-        <a:ext uri="{E40237B7-FDA0-4F09-8148-C483321AD2D9}">
-          <dgm14:cNvPr xmlns:dgm14="http://schemas.microsoft.com/office/drawing/2010/diagram" id="0" name="" descr="Procesador"/>
-        </a:ext>
-      </dgm:extLst>
-    </dgm:pt>
-    <dgm:pt modelId="{623EC577-5277-4C26-8A20-8759ADE0DBD3}" type="pres">
-      <dgm:prSet presAssocID="{120755E6-FAED-471B-93C5-C20339594CD7}" presName="spaceRect" presStyleCnt="0"/>
+    <dgm:pt modelId="{3DB14E88-542A-41AF-9BC2-5138462981A6}" type="pres">
+      <dgm:prSet presAssocID="{120755E6-FAED-471B-93C5-C20339594CD7}" presName="tx1" presStyleLbl="revTx" presStyleIdx="0" presStyleCnt="3"/>
       <dgm:spPr/>
     </dgm:pt>
-    <dgm:pt modelId="{3ABFDFA5-4933-41EB-A1B7-D59F8AEB9108}" type="pres">
-      <dgm:prSet presAssocID="{120755E6-FAED-471B-93C5-C20339594CD7}" presName="parTx" presStyleLbl="revTx" presStyleIdx="0" presStyleCnt="3">
-        <dgm:presLayoutVars>
-          <dgm:chMax val="0"/>
-          <dgm:chPref val="0"/>
-        </dgm:presLayoutVars>
-      </dgm:prSet>
+    <dgm:pt modelId="{DE8F036E-D47C-46CF-ABDF-3FE41A48C06C}" type="pres">
+      <dgm:prSet presAssocID="{120755E6-FAED-471B-93C5-C20339594CD7}" presName="vert1" presStyleCnt="0"/>
       <dgm:spPr/>
     </dgm:pt>
-    <dgm:pt modelId="{62AE0D48-445C-4124-B0D0-E3BAD7884354}" type="pres">
-      <dgm:prSet presAssocID="{15EB108D-EDEA-44B5-A11B-9EEAC31C39F2}" presName="sibTrans" presStyleCnt="0"/>
+    <dgm:pt modelId="{09F1A6EC-F24F-4E67-A424-9BBEAA30A5B0}" type="pres">
+      <dgm:prSet presAssocID="{92C91567-2D35-49FB-B3A3-FF473F6B9BB0}" presName="thickLine" presStyleLbl="alignNode1" presStyleIdx="1" presStyleCnt="3"/>
       <dgm:spPr/>
     </dgm:pt>
-    <dgm:pt modelId="{6939B152-651B-4307-9909-76996B3AD25A}" type="pres">
-      <dgm:prSet presAssocID="{92C91567-2D35-49FB-B3A3-FF473F6B9BB0}" presName="compNode" presStyleCnt="0"/>
+    <dgm:pt modelId="{6ADAD699-37CE-4C6D-99D3-0B439A954A22}" type="pres">
+      <dgm:prSet presAssocID="{92C91567-2D35-49FB-B3A3-FF473F6B9BB0}" presName="horz1" presStyleCnt="0"/>
       <dgm:spPr/>
     </dgm:pt>
-    <dgm:pt modelId="{244F2ACF-7401-4D2B-BD96-D201A4F30579}" type="pres">
-      <dgm:prSet presAssocID="{92C91567-2D35-49FB-B3A3-FF473F6B9BB0}" presName="bgRect" presStyleLbl="bgShp" presStyleIdx="1" presStyleCnt="3"/>
+    <dgm:pt modelId="{90658E9A-0601-45F4-9F7E-493B84D59B00}" type="pres">
+      <dgm:prSet presAssocID="{92C91567-2D35-49FB-B3A3-FF473F6B9BB0}" presName="tx1" presStyleLbl="revTx" presStyleIdx="1" presStyleCnt="3"/>
       <dgm:spPr/>
     </dgm:pt>
-    <dgm:pt modelId="{0D82158A-25B8-4AA8-BF8F-173553DE4FFC}" type="pres">
-      <dgm:prSet presAssocID="{92C91567-2D35-49FB-B3A3-FF473F6B9BB0}" presName="iconRect" presStyleLbl="node1" presStyleIdx="1" presStyleCnt="3"/>
-      <dgm:spPr>
-        <a:blipFill>
-          <a:blip xmlns:r="http://schemas.openxmlformats.org/officeDocument/2006/relationships" r:embed="rId3">
-            <a:extLst>
-              <a:ext uri="{28A0092B-C50C-407E-A947-70E740481C1C}">
-                <a14:useLocalDpi xmlns:a14="http://schemas.microsoft.com/office/drawing/2010/main" val="0"/>
-              </a:ext>
-              <a:ext uri="{96DAC541-7B7A-43D3-8B79-37D633B846F1}">
-                <asvg:svgBlip xmlns:asvg="http://schemas.microsoft.com/office/drawing/2016/SVG/main" r:embed="rId4"/>
-              </a:ext>
-            </a:extLst>
-          </a:blip>
-          <a:stretch>
-            <a:fillRect/>
-          </a:stretch>
-        </a:blipFill>
-        <a:ln>
-          <a:noFill/>
-        </a:ln>
-      </dgm:spPr>
-      <dgm:extLst>
-        <a:ext uri="{E40237B7-FDA0-4F09-8148-C483321AD2D9}">
-          <dgm14:cNvPr xmlns:dgm14="http://schemas.microsoft.com/office/drawing/2010/diagram" id="0" name="" descr="Libros"/>
-        </a:ext>
-      </dgm:extLst>
-    </dgm:pt>
-    <dgm:pt modelId="{F383F70A-9BB3-4DFB-9F93-0885DC483A61}" type="pres">
-      <dgm:prSet presAssocID="{92C91567-2D35-49FB-B3A3-FF473F6B9BB0}" presName="spaceRect" presStyleCnt="0"/>
+    <dgm:pt modelId="{7CB8446B-370D-4F40-9BBC-4C7A56CBDB5E}" type="pres">
+      <dgm:prSet presAssocID="{92C91567-2D35-49FB-B3A3-FF473F6B9BB0}" presName="vert1" presStyleCnt="0"/>
       <dgm:spPr/>
     </dgm:pt>
-    <dgm:pt modelId="{C835DA41-A442-4D4A-880B-0D024B70A720}" type="pres">
-      <dgm:prSet presAssocID="{92C91567-2D35-49FB-B3A3-FF473F6B9BB0}" presName="parTx" presStyleLbl="revTx" presStyleIdx="1" presStyleCnt="3">
-        <dgm:presLayoutVars>
-          <dgm:chMax val="0"/>
-          <dgm:chPref val="0"/>
-        </dgm:presLayoutVars>
-      </dgm:prSet>
+    <dgm:pt modelId="{D1F9DBA7-EFED-4059-A428-4A19FFD9DB38}" type="pres">
+      <dgm:prSet presAssocID="{D0E05A49-BDE5-4C80-ABC5-F54D01B1E813}" presName="thickLine" presStyleLbl="alignNode1" presStyleIdx="2" presStyleCnt="3"/>
       <dgm:spPr/>
     </dgm:pt>
-    <dgm:pt modelId="{74601677-0287-4471-9B1D-619E9A866926}" type="pres">
-      <dgm:prSet presAssocID="{D65CC991-3A63-4C80-B88A-D7BD35A203E5}" presName="sibTrans" presStyleCnt="0"/>
+    <dgm:pt modelId="{0E9DACEE-9E80-4750-9CE8-80D5C740AEAE}" type="pres">
+      <dgm:prSet presAssocID="{D0E05A49-BDE5-4C80-ABC5-F54D01B1E813}" presName="horz1" presStyleCnt="0"/>
       <dgm:spPr/>
     </dgm:pt>
-    <dgm:pt modelId="{2113F040-E3DD-4E87-94E2-F51FF4AE386B}" type="pres">
-      <dgm:prSet presAssocID="{D0E05A49-BDE5-4C80-ABC5-F54D01B1E813}" presName="compNode" presStyleCnt="0"/>
+    <dgm:pt modelId="{FA71C7B0-3676-42B1-8EAB-05FEE83EA3E3}" type="pres">
+      <dgm:prSet presAssocID="{D0E05A49-BDE5-4C80-ABC5-F54D01B1E813}" presName="tx1" presStyleLbl="revTx" presStyleIdx="2" presStyleCnt="3"/>
       <dgm:spPr/>
     </dgm:pt>
-    <dgm:pt modelId="{36A98DEE-117F-4245-AFB9-E6324A4FD338}" type="pres">
-      <dgm:prSet presAssocID="{D0E05A49-BDE5-4C80-ABC5-F54D01B1E813}" presName="bgRect" presStyleLbl="bgShp" presStyleIdx="2" presStyleCnt="3"/>
-      <dgm:spPr/>
-    </dgm:pt>
-    <dgm:pt modelId="{C7D15DAF-DEFE-4020-B78C-361B30BE72EC}" type="pres">
-      <dgm:prSet presAssocID="{D0E05A49-BDE5-4C80-ABC5-F54D01B1E813}" presName="iconRect" presStyleLbl="node1" presStyleIdx="2" presStyleCnt="3"/>
-      <dgm:spPr>
-        <a:blipFill>
-          <a:blip xmlns:r="http://schemas.openxmlformats.org/officeDocument/2006/relationships" r:embed="rId5">
-            <a:extLst>
-              <a:ext uri="{28A0092B-C50C-407E-A947-70E740481C1C}">
-                <a14:useLocalDpi xmlns:a14="http://schemas.microsoft.com/office/drawing/2010/main" val="0"/>
-              </a:ext>
-              <a:ext uri="{96DAC541-7B7A-43D3-8B79-37D633B846F1}">
-                <asvg:svgBlip xmlns:asvg="http://schemas.microsoft.com/office/drawing/2016/SVG/main" r:embed="rId6"/>
-              </a:ext>
-            </a:extLst>
-          </a:blip>
-          <a:stretch>
-            <a:fillRect/>
-          </a:stretch>
-        </a:blipFill>
-        <a:ln>
-          <a:noFill/>
-        </a:ln>
-      </dgm:spPr>
-      <dgm:extLst>
-        <a:ext uri="{E40237B7-FDA0-4F09-8148-C483321AD2D9}">
-          <dgm14:cNvPr xmlns:dgm14="http://schemas.microsoft.com/office/drawing/2010/diagram" id="0" name="" descr="Web Design"/>
-        </a:ext>
-      </dgm:extLst>
-    </dgm:pt>
-    <dgm:pt modelId="{A4B34C39-4D67-49E8-BF2B-221335F31BED}" type="pres">
-      <dgm:prSet presAssocID="{D0E05A49-BDE5-4C80-ABC5-F54D01B1E813}" presName="spaceRect" presStyleCnt="0"/>
-      <dgm:spPr/>
-    </dgm:pt>
-    <dgm:pt modelId="{06BECED2-3635-42F1-B19F-C4E5D6E3F0A4}" type="pres">
-      <dgm:prSet presAssocID="{D0E05A49-BDE5-4C80-ABC5-F54D01B1E813}" presName="parTx" presStyleLbl="revTx" presStyleIdx="2" presStyleCnt="3">
-        <dgm:presLayoutVars>
-          <dgm:chMax val="0"/>
-          <dgm:chPref val="0"/>
-        </dgm:presLayoutVars>
-      </dgm:prSet>
+    <dgm:pt modelId="{6DB4EDA4-8FC2-4F92-BE00-D4F0F8CEA05E}" type="pres">
+      <dgm:prSet presAssocID="{D0E05A49-BDE5-4C80-ABC5-F54D01B1E813}" presName="vert1" presStyleCnt="0"/>
       <dgm:spPr/>
     </dgm:pt>
   </dgm:ptLst>
   <dgm:cxnLst>
-    <dgm:cxn modelId="{96867661-AAC1-4A73-864F-ABDA1A868A52}" type="presOf" srcId="{D0E05A49-BDE5-4C80-ABC5-F54D01B1E813}" destId="{06BECED2-3635-42F1-B19F-C4E5D6E3F0A4}" srcOrd="0" destOrd="0" presId="urn:microsoft.com/office/officeart/2018/2/layout/IconVerticalSolidList"/>
+    <dgm:cxn modelId="{F18B242D-F78F-4965-A782-3670F309EBAE}" type="presOf" srcId="{92C91567-2D35-49FB-B3A3-FF473F6B9BB0}" destId="{90658E9A-0601-45F4-9F7E-493B84D59B00}" srcOrd="0" destOrd="0" presId="urn:microsoft.com/office/officeart/2008/layout/LinedList"/>
+    <dgm:cxn modelId="{8E2B572F-3D69-4B85-B38B-934978512448}" type="presOf" srcId="{048F03C7-C8C4-4DE8-840C-E9819713C300}" destId="{2D85BAEE-1F2B-42ED-BB60-370AD692EC90}" srcOrd="0" destOrd="0" presId="urn:microsoft.com/office/officeart/2008/layout/LinedList"/>
+    <dgm:cxn modelId="{FFB97C31-E406-4A8B-A616-FC7C2F1C9D12}" type="presOf" srcId="{120755E6-FAED-471B-93C5-C20339594CD7}" destId="{3DB14E88-542A-41AF-9BC2-5138462981A6}" srcOrd="0" destOrd="0" presId="urn:microsoft.com/office/officeart/2008/layout/LinedList"/>
+    <dgm:cxn modelId="{EEBD1F76-C778-4B62-A438-C4EDD76656B1}" type="presOf" srcId="{D0E05A49-BDE5-4C80-ABC5-F54D01B1E813}" destId="{FA71C7B0-3676-42B1-8EAB-05FEE83EA3E3}" srcOrd="0" destOrd="0" presId="urn:microsoft.com/office/officeart/2008/layout/LinedList"/>
     <dgm:cxn modelId="{407E939C-279D-4F1E-8FC6-01D957CE131C}" srcId="{048F03C7-C8C4-4DE8-840C-E9819713C300}" destId="{120755E6-FAED-471B-93C5-C20339594CD7}" srcOrd="0" destOrd="0" parTransId="{81DB5204-4B92-45F3-BB38-7FB889539A33}" sibTransId="{15EB108D-EDEA-44B5-A11B-9EEAC31C39F2}"/>
     <dgm:cxn modelId="{3AD9A89E-6529-4E8B-9641-538710464CFA}" srcId="{048F03C7-C8C4-4DE8-840C-E9819713C300}" destId="{D0E05A49-BDE5-4C80-ABC5-F54D01B1E813}" srcOrd="2" destOrd="0" parTransId="{009DE9C7-6F8E-4475-8DA5-0BF4CFDCB75A}" sibTransId="{11A9D5C0-91C5-44B0-A601-F58D5AB6FFEC}"/>
     <dgm:cxn modelId="{8B48AEB0-AAFD-45D4-B05B-C4A84D5585FE}" srcId="{048F03C7-C8C4-4DE8-840C-E9819713C300}" destId="{92C91567-2D35-49FB-B3A3-FF473F6B9BB0}" srcOrd="1" destOrd="0" parTransId="{C24E57C5-2E47-431E-9731-67894E0BC943}" sibTransId="{D65CC991-3A63-4C80-B88A-D7BD35A203E5}"/>
-    <dgm:cxn modelId="{B1F419C5-4BC3-4D8F-9C07-445D08066368}" type="presOf" srcId="{92C91567-2D35-49FB-B3A3-FF473F6B9BB0}" destId="{C835DA41-A442-4D4A-880B-0D024B70A720}" srcOrd="0" destOrd="0" presId="urn:microsoft.com/office/officeart/2018/2/layout/IconVerticalSolidList"/>
-    <dgm:cxn modelId="{1DC515C8-33F9-4966-8712-93CC0355464F}" type="presOf" srcId="{048F03C7-C8C4-4DE8-840C-E9819713C300}" destId="{B90DB1A2-F134-4D61-A3BF-FB88AE324CEA}" srcOrd="0" destOrd="0" presId="urn:microsoft.com/office/officeart/2018/2/layout/IconVerticalSolidList"/>
-    <dgm:cxn modelId="{E7039FF3-8E1A-4E0B-AFB0-D27599FA738E}" type="presOf" srcId="{120755E6-FAED-471B-93C5-C20339594CD7}" destId="{3ABFDFA5-4933-41EB-A1B7-D59F8AEB9108}" srcOrd="0" destOrd="0" presId="urn:microsoft.com/office/officeart/2018/2/layout/IconVerticalSolidList"/>
-    <dgm:cxn modelId="{B4C345A4-81CD-403D-9F28-3467AFA0B855}" type="presParOf" srcId="{B90DB1A2-F134-4D61-A3BF-FB88AE324CEA}" destId="{44BB0ED9-AF6C-470C-822C-C261D7F66902}" srcOrd="0" destOrd="0" presId="urn:microsoft.com/office/officeart/2018/2/layout/IconVerticalSolidList"/>
-    <dgm:cxn modelId="{40F2AD59-C6AB-4EA7-B4D4-22FA69B78AA7}" type="presParOf" srcId="{44BB0ED9-AF6C-470C-822C-C261D7F66902}" destId="{0150BFE2-AFBD-4D0C-A2AC-D41DC30AB828}" srcOrd="0" destOrd="0" presId="urn:microsoft.com/office/officeart/2018/2/layout/IconVerticalSolidList"/>
-    <dgm:cxn modelId="{5EF50BC8-D73C-416F-98CC-6352B7CFDF9D}" type="presParOf" srcId="{44BB0ED9-AF6C-470C-822C-C261D7F66902}" destId="{ED35BB28-A131-4BC7-8BC5-2FB29DDD7D5C}" srcOrd="1" destOrd="0" presId="urn:microsoft.com/office/officeart/2018/2/layout/IconVerticalSolidList"/>
-    <dgm:cxn modelId="{6C19B054-D29F-49BA-957E-8A8E829D22A8}" type="presParOf" srcId="{44BB0ED9-AF6C-470C-822C-C261D7F66902}" destId="{623EC577-5277-4C26-8A20-8759ADE0DBD3}" srcOrd="2" destOrd="0" presId="urn:microsoft.com/office/officeart/2018/2/layout/IconVerticalSolidList"/>
-    <dgm:cxn modelId="{DEC9306C-4A5B-449F-9994-B9EC308D42AD}" type="presParOf" srcId="{44BB0ED9-AF6C-470C-822C-C261D7F66902}" destId="{3ABFDFA5-4933-41EB-A1B7-D59F8AEB9108}" srcOrd="3" destOrd="0" presId="urn:microsoft.com/office/officeart/2018/2/layout/IconVerticalSolidList"/>
-    <dgm:cxn modelId="{1956472F-179F-41C0-BFBA-235A266F46E3}" type="presParOf" srcId="{B90DB1A2-F134-4D61-A3BF-FB88AE324CEA}" destId="{62AE0D48-445C-4124-B0D0-E3BAD7884354}" srcOrd="1" destOrd="0" presId="urn:microsoft.com/office/officeart/2018/2/layout/IconVerticalSolidList"/>
-    <dgm:cxn modelId="{1DFD3C45-FBA1-40D8-9A69-6C6BFC6BA913}" type="presParOf" srcId="{B90DB1A2-F134-4D61-A3BF-FB88AE324CEA}" destId="{6939B152-651B-4307-9909-76996B3AD25A}" srcOrd="2" destOrd="0" presId="urn:microsoft.com/office/officeart/2018/2/layout/IconVerticalSolidList"/>
-    <dgm:cxn modelId="{F96137EC-A8F3-4D7E-9917-5FF4F53892FF}" type="presParOf" srcId="{6939B152-651B-4307-9909-76996B3AD25A}" destId="{244F2ACF-7401-4D2B-BD96-D201A4F30579}" srcOrd="0" destOrd="0" presId="urn:microsoft.com/office/officeart/2018/2/layout/IconVerticalSolidList"/>
-    <dgm:cxn modelId="{BC5DAEBC-B7B0-4F66-9D19-8DC387832414}" type="presParOf" srcId="{6939B152-651B-4307-9909-76996B3AD25A}" destId="{0D82158A-25B8-4AA8-BF8F-173553DE4FFC}" srcOrd="1" destOrd="0" presId="urn:microsoft.com/office/officeart/2018/2/layout/IconVerticalSolidList"/>
-    <dgm:cxn modelId="{223E7591-26BF-41E2-88F4-73C0C5F4D64C}" type="presParOf" srcId="{6939B152-651B-4307-9909-76996B3AD25A}" destId="{F383F70A-9BB3-4DFB-9F93-0885DC483A61}" srcOrd="2" destOrd="0" presId="urn:microsoft.com/office/officeart/2018/2/layout/IconVerticalSolidList"/>
-    <dgm:cxn modelId="{B6BE068B-949E-4703-851D-6AC59BB6F792}" type="presParOf" srcId="{6939B152-651B-4307-9909-76996B3AD25A}" destId="{C835DA41-A442-4D4A-880B-0D024B70A720}" srcOrd="3" destOrd="0" presId="urn:microsoft.com/office/officeart/2018/2/layout/IconVerticalSolidList"/>
-    <dgm:cxn modelId="{1634D59E-D0FD-470A-A789-95A346005E0A}" type="presParOf" srcId="{B90DB1A2-F134-4D61-A3BF-FB88AE324CEA}" destId="{74601677-0287-4471-9B1D-619E9A866926}" srcOrd="3" destOrd="0" presId="urn:microsoft.com/office/officeart/2018/2/layout/IconVerticalSolidList"/>
-    <dgm:cxn modelId="{6144F787-3433-47A3-8235-A38D1DC89722}" type="presParOf" srcId="{B90DB1A2-F134-4D61-A3BF-FB88AE324CEA}" destId="{2113F040-E3DD-4E87-94E2-F51FF4AE386B}" srcOrd="4" destOrd="0" presId="urn:microsoft.com/office/officeart/2018/2/layout/IconVerticalSolidList"/>
-    <dgm:cxn modelId="{73899792-FCE9-4E64-82E9-62DD0E1801DC}" type="presParOf" srcId="{2113F040-E3DD-4E87-94E2-F51FF4AE386B}" destId="{36A98DEE-117F-4245-AFB9-E6324A4FD338}" srcOrd="0" destOrd="0" presId="urn:microsoft.com/office/officeart/2018/2/layout/IconVerticalSolidList"/>
-    <dgm:cxn modelId="{A2D0AD3C-9655-4048-954C-DC4AAE7FD986}" type="presParOf" srcId="{2113F040-E3DD-4E87-94E2-F51FF4AE386B}" destId="{C7D15DAF-DEFE-4020-B78C-361B30BE72EC}" srcOrd="1" destOrd="0" presId="urn:microsoft.com/office/officeart/2018/2/layout/IconVerticalSolidList"/>
-    <dgm:cxn modelId="{E058E191-5CF1-4965-8CEB-82CE123C54C6}" type="presParOf" srcId="{2113F040-E3DD-4E87-94E2-F51FF4AE386B}" destId="{A4B34C39-4D67-49E8-BF2B-221335F31BED}" srcOrd="2" destOrd="0" presId="urn:microsoft.com/office/officeart/2018/2/layout/IconVerticalSolidList"/>
-    <dgm:cxn modelId="{270D80BC-5C53-48E3-B15F-D7AC27C91C98}" type="presParOf" srcId="{2113F040-E3DD-4E87-94E2-F51FF4AE386B}" destId="{06BECED2-3635-42F1-B19F-C4E5D6E3F0A4}" srcOrd="3" destOrd="0" presId="urn:microsoft.com/office/officeart/2018/2/layout/IconVerticalSolidList"/>
+    <dgm:cxn modelId="{AB0638C7-6CEF-40EF-A682-2FD8DB127A7C}" type="presParOf" srcId="{2D85BAEE-1F2B-42ED-BB60-370AD692EC90}" destId="{3A5BDE82-DA80-4486-9BFC-C812E223675B}" srcOrd="0" destOrd="0" presId="urn:microsoft.com/office/officeart/2008/layout/LinedList"/>
+    <dgm:cxn modelId="{22783723-2883-4428-A45D-4D4FFEE309F3}" type="presParOf" srcId="{2D85BAEE-1F2B-42ED-BB60-370AD692EC90}" destId="{0A7F583F-6688-42F8-9E2E-0AA0CAC6B89E}" srcOrd="1" destOrd="0" presId="urn:microsoft.com/office/officeart/2008/layout/LinedList"/>
+    <dgm:cxn modelId="{D3050AB3-402E-4B1A-9AF0-082D963203B3}" type="presParOf" srcId="{0A7F583F-6688-42F8-9E2E-0AA0CAC6B89E}" destId="{3DB14E88-542A-41AF-9BC2-5138462981A6}" srcOrd="0" destOrd="0" presId="urn:microsoft.com/office/officeart/2008/layout/LinedList"/>
+    <dgm:cxn modelId="{80012FD9-237C-4E17-AC58-97DA49D42316}" type="presParOf" srcId="{0A7F583F-6688-42F8-9E2E-0AA0CAC6B89E}" destId="{DE8F036E-D47C-46CF-ABDF-3FE41A48C06C}" srcOrd="1" destOrd="0" presId="urn:microsoft.com/office/officeart/2008/layout/LinedList"/>
+    <dgm:cxn modelId="{5A116F16-5767-41D3-B69A-74DE6029279A}" type="presParOf" srcId="{2D85BAEE-1F2B-42ED-BB60-370AD692EC90}" destId="{09F1A6EC-F24F-4E67-A424-9BBEAA30A5B0}" srcOrd="2" destOrd="0" presId="urn:microsoft.com/office/officeart/2008/layout/LinedList"/>
+    <dgm:cxn modelId="{503A33B4-4789-42AF-9A35-DD8D68A8A854}" type="presParOf" srcId="{2D85BAEE-1F2B-42ED-BB60-370AD692EC90}" destId="{6ADAD699-37CE-4C6D-99D3-0B439A954A22}" srcOrd="3" destOrd="0" presId="urn:microsoft.com/office/officeart/2008/layout/LinedList"/>
+    <dgm:cxn modelId="{FF13F152-D173-4131-8F07-95F9E751A0E2}" type="presParOf" srcId="{6ADAD699-37CE-4C6D-99D3-0B439A954A22}" destId="{90658E9A-0601-45F4-9F7E-493B84D59B00}" srcOrd="0" destOrd="0" presId="urn:microsoft.com/office/officeart/2008/layout/LinedList"/>
+    <dgm:cxn modelId="{C28F9ACE-0884-49A7-B53D-555206D1ED10}" type="presParOf" srcId="{6ADAD699-37CE-4C6D-99D3-0B439A954A22}" destId="{7CB8446B-370D-4F40-9BBC-4C7A56CBDB5E}" srcOrd="1" destOrd="0" presId="urn:microsoft.com/office/officeart/2008/layout/LinedList"/>
+    <dgm:cxn modelId="{6532E979-4EC9-4E71-BE16-BC58665C3A95}" type="presParOf" srcId="{2D85BAEE-1F2B-42ED-BB60-370AD692EC90}" destId="{D1F9DBA7-EFED-4059-A428-4A19FFD9DB38}" srcOrd="4" destOrd="0" presId="urn:microsoft.com/office/officeart/2008/layout/LinedList"/>
+    <dgm:cxn modelId="{E82CA954-8F3B-4133-9244-737F72BCF5D6}" type="presParOf" srcId="{2D85BAEE-1F2B-42ED-BB60-370AD692EC90}" destId="{0E9DACEE-9E80-4750-9CE8-80D5C740AEAE}" srcOrd="5" destOrd="0" presId="urn:microsoft.com/office/officeart/2008/layout/LinedList"/>
+    <dgm:cxn modelId="{E64E3A0A-32E9-4922-9F05-2BACA74144D5}" type="presParOf" srcId="{0E9DACEE-9E80-4750-9CE8-80D5C740AEAE}" destId="{FA71C7B0-3676-42B1-8EAB-05FEE83EA3E3}" srcOrd="0" destOrd="0" presId="urn:microsoft.com/office/officeart/2008/layout/LinedList"/>
+    <dgm:cxn modelId="{68D79EC9-14BB-4F50-93BB-E636A2BCFB7E}" type="presParOf" srcId="{0E9DACEE-9E80-4750-9CE8-80D5C740AEAE}" destId="{6DB4EDA4-8FC2-4F92-BE00-D4F0F8CEA05E}" srcOrd="1" destOrd="0" presId="urn:microsoft.com/office/officeart/2008/layout/LinedList"/>
   </dgm:cxnLst>
   <dgm:bg/>
   <dgm:whole/>
   <dgm:extLst>
     <a:ext uri="http://schemas.microsoft.com/office/drawing/2008/diagram">
-      <dsp:dataModelExt xmlns:dsp="http://schemas.microsoft.com/office/drawing/2008/diagram" relId="rId6" minVer="http://schemas.openxmlformats.org/drawingml/2006/diagram"/>
+      <dsp:dataModelExt xmlns:dsp="http://schemas.microsoft.com/office/drawing/2008/diagram" relId="rId8" minVer="http://schemas.openxmlformats.org/drawingml/2006/diagram"/>
     </a:ext>
   </dgm:extLst>
 </dgm:dataModel>
@@ -3962,91 +3718,85 @@
       <dsp:cNvGrpSpPr/>
     </dsp:nvGrpSpPr>
     <dsp:grpSpPr/>
-    <dsp:sp modelId="{0150BFE2-AFBD-4D0C-A2AC-D41DC30AB828}">
+    <dsp:sp modelId="{3A5BDE82-DA80-4486-9BFC-C812E223675B}">
       <dsp:nvSpPr>
         <dsp:cNvPr id="0" name=""/>
         <dsp:cNvSpPr/>
       </dsp:nvSpPr>
       <dsp:spPr>
         <a:xfrm>
-          <a:off x="0" y="656"/>
-          <a:ext cx="6620255" cy="1535816"/>
+          <a:off x="0" y="1839"/>
+          <a:ext cx="6300216" cy="0"/>
         </a:xfrm>
-        <a:prstGeom prst="roundRect">
-          <a:avLst>
-            <a:gd name="adj" fmla="val 10000"/>
-          </a:avLst>
-        </a:prstGeom>
-        <a:solidFill>
-          <a:schemeClr val="bg1">
-            <a:lumMod val="95000"/>
-            <a:hueOff val="0"/>
-            <a:satOff val="0"/>
-            <a:lumOff val="0"/>
-            <a:alphaOff val="0"/>
-          </a:schemeClr>
-        </a:solidFill>
-        <a:ln>
-          <a:noFill/>
-        </a:ln>
-        <a:effectLst/>
-      </dsp:spPr>
-      <dsp:style>
-        <a:lnRef idx="0">
-          <a:scrgbClr r="0" g="0" b="0"/>
-        </a:lnRef>
-        <a:fillRef idx="1">
-          <a:scrgbClr r="0" g="0" b="0"/>
-        </a:fillRef>
-        <a:effectRef idx="0">
-          <a:scrgbClr r="0" g="0" b="0"/>
-        </a:effectRef>
-        <a:fontRef idx="minor"/>
-      </dsp:style>
-    </dsp:sp>
-    <dsp:sp modelId="{ED35BB28-A131-4BC7-8BC5-2FB29DDD7D5C}">
-      <dsp:nvSpPr>
-        <dsp:cNvPr id="0" name=""/>
-        <dsp:cNvSpPr/>
-      </dsp:nvSpPr>
-      <dsp:spPr>
-        <a:xfrm>
-          <a:off x="464584" y="346215"/>
-          <a:ext cx="844699" cy="844699"/>
-        </a:xfrm>
-        <a:prstGeom prst="rect">
+        <a:prstGeom prst="line">
           <a:avLst/>
         </a:prstGeom>
-        <a:blipFill>
-          <a:blip xmlns:r="http://schemas.openxmlformats.org/officeDocument/2006/relationships" r:embed="rId1">
-            <a:extLst>
-              <a:ext uri="{28A0092B-C50C-407E-A947-70E740481C1C}">
-                <a14:useLocalDpi xmlns:a14="http://schemas.microsoft.com/office/drawing/2010/main" val="0"/>
-              </a:ext>
-              <a:ext uri="{96DAC541-7B7A-43D3-8B79-37D633B846F1}">
-                <asvg:svgBlip xmlns:asvg="http://schemas.microsoft.com/office/drawing/2016/SVG/main" r:embed="rId2"/>
-              </a:ext>
-            </a:extLst>
-          </a:blip>
-          <a:stretch>
-            <a:fillRect/>
-          </a:stretch>
-        </a:blipFill>
-        <a:ln w="19050" cap="flat" cmpd="sng" algn="ctr">
-          <a:noFill/>
+        <a:gradFill rotWithShape="0">
+          <a:gsLst>
+            <a:gs pos="0">
+              <a:schemeClr val="accent5">
+                <a:hueOff val="0"/>
+                <a:satOff val="0"/>
+                <a:lumOff val="0"/>
+                <a:alphaOff val="0"/>
+                <a:satMod val="103000"/>
+                <a:lumMod val="102000"/>
+                <a:tint val="94000"/>
+              </a:schemeClr>
+            </a:gs>
+            <a:gs pos="50000">
+              <a:schemeClr val="accent5">
+                <a:hueOff val="0"/>
+                <a:satOff val="0"/>
+                <a:lumOff val="0"/>
+                <a:alphaOff val="0"/>
+                <a:satMod val="110000"/>
+                <a:lumMod val="100000"/>
+                <a:shade val="100000"/>
+              </a:schemeClr>
+            </a:gs>
+            <a:gs pos="100000">
+              <a:schemeClr val="accent5">
+                <a:hueOff val="0"/>
+                <a:satOff val="0"/>
+                <a:lumOff val="0"/>
+                <a:alphaOff val="0"/>
+                <a:lumMod val="99000"/>
+                <a:satMod val="120000"/>
+                <a:shade val="78000"/>
+              </a:schemeClr>
+            </a:gs>
+          </a:gsLst>
+          <a:lin ang="5400000" scaled="0"/>
+        </a:gradFill>
+        <a:ln w="12700" cap="flat" cmpd="sng" algn="ctr">
+          <a:solidFill>
+            <a:schemeClr val="accent5">
+              <a:hueOff val="0"/>
+              <a:satOff val="0"/>
+              <a:lumOff val="0"/>
+              <a:alphaOff val="0"/>
+            </a:schemeClr>
+          </a:solidFill>
           <a:prstDash val="solid"/>
           <a:miter lim="800000"/>
         </a:ln>
-        <a:effectLst/>
+        <a:effectLst>
+          <a:outerShdw blurRad="57150" dist="19050" dir="5400000" algn="ctr" rotWithShape="0">
+            <a:srgbClr val="000000">
+              <a:alpha val="63000"/>
+            </a:srgbClr>
+          </a:outerShdw>
+        </a:effectLst>
       </dsp:spPr>
       <dsp:style>
-        <a:lnRef idx="2">
+        <a:lnRef idx="1">
           <a:scrgbClr r="0" g="0" b="0"/>
         </a:lnRef>
-        <a:fillRef idx="1">
+        <a:fillRef idx="3">
           <a:scrgbClr r="0" g="0" b="0"/>
         </a:fillRef>
-        <a:effectRef idx="0">
+        <a:effectRef idx="3">
           <a:scrgbClr r="0" g="0" b="0"/>
         </a:effectRef>
         <a:fontRef idx="minor">
@@ -4054,15 +3804,15 @@
         </a:fontRef>
       </dsp:style>
     </dsp:sp>
-    <dsp:sp modelId="{3ABFDFA5-4933-41EB-A1B7-D59F8AEB9108}">
+    <dsp:sp modelId="{3DB14E88-542A-41AF-9BC2-5138462981A6}">
       <dsp:nvSpPr>
         <dsp:cNvPr id="0" name=""/>
         <dsp:cNvSpPr/>
       </dsp:nvSpPr>
       <dsp:spPr>
         <a:xfrm>
-          <a:off x="1773868" y="656"/>
-          <a:ext cx="4846387" cy="1535816"/>
+          <a:off x="0" y="1839"/>
+          <a:ext cx="6300216" cy="1254549"/>
         </a:xfrm>
         <a:prstGeom prst="rect">
           <a:avLst/>
@@ -4086,12 +3836,12 @@
         <a:fontRef idx="minor"/>
       </dsp:style>
       <dsp:txBody>
-        <a:bodyPr spcFirstLastPara="0" vert="horz" wrap="square" lIns="162541" tIns="162541" rIns="162541" bIns="162541" numCol="1" spcCol="1270" anchor="ctr" anchorCtr="0">
+        <a:bodyPr spcFirstLastPara="0" vert="horz" wrap="square" lIns="60960" tIns="60960" rIns="60960" bIns="60960" numCol="1" spcCol="1270" anchor="t" anchorCtr="0">
           <a:noAutofit/>
         </a:bodyPr>
         <a:lstStyle/>
         <a:p>
-          <a:pPr marL="0" lvl="0" indent="0" algn="l" defTabSz="622300">
+          <a:pPr marL="0" lvl="0" indent="0" algn="l" defTabSz="711200">
             <a:lnSpc>
               <a:spcPct val="90000"/>
             </a:lnSpc>
@@ -4104,118 +3854,112 @@
             <a:buNone/>
           </a:pPr>
           <a:r>
-            <a:rPr lang="es-MX" sz="1400" kern="1200" dirty="0"/>
+            <a:rPr lang="es-MX" sz="1600" kern="1200" dirty="0"/>
             <a:t>En los últimos años donde conceptos como ciencia de datos, </a:t>
           </a:r>
           <a:r>
-            <a:rPr lang="es-MX" sz="1400" kern="1200" dirty="0" err="1"/>
+            <a:rPr lang="es-MX" sz="1600" kern="1200" dirty="0" err="1"/>
             <a:t>big</a:t>
           </a:r>
           <a:r>
-            <a:rPr lang="es-MX" sz="1400" kern="1200" dirty="0"/>
+            <a:rPr lang="es-MX" sz="1600" kern="1200" dirty="0"/>
             <a:t> data, machine </a:t>
           </a:r>
           <a:r>
-            <a:rPr lang="es-MX" sz="1400" kern="1200" dirty="0" err="1"/>
+            <a:rPr lang="es-MX" sz="1600" kern="1200" dirty="0" err="1"/>
             <a:t>learning</a:t>
           </a:r>
           <a:r>
-            <a:rPr lang="es-MX" sz="1400" kern="1200" dirty="0"/>
+            <a:rPr lang="es-MX" sz="1600" kern="1200" dirty="0"/>
             <a:t> han cobrado mucha popularidad, esta popularidad ha provocado que se desarrollen soluciones distintas para el manejo de datos, y más cuando hablamos de volúmenes masivos.</a:t>
           </a:r>
-          <a:endParaRPr lang="en-US" sz="1400" kern="1200" dirty="0"/>
+          <a:endParaRPr lang="en-US" sz="1600" kern="1200" dirty="0"/>
         </a:p>
       </dsp:txBody>
       <dsp:txXfrm>
-        <a:off x="1773868" y="656"/>
-        <a:ext cx="4846387" cy="1535816"/>
+        <a:off x="0" y="1839"/>
+        <a:ext cx="6300216" cy="1254549"/>
       </dsp:txXfrm>
     </dsp:sp>
-    <dsp:sp modelId="{244F2ACF-7401-4D2B-BD96-D201A4F30579}">
+    <dsp:sp modelId="{09F1A6EC-F24F-4E67-A424-9BBEAA30A5B0}">
       <dsp:nvSpPr>
         <dsp:cNvPr id="0" name=""/>
         <dsp:cNvSpPr/>
       </dsp:nvSpPr>
       <dsp:spPr>
         <a:xfrm>
-          <a:off x="0" y="1920427"/>
-          <a:ext cx="6620255" cy="1535816"/>
+          <a:off x="0" y="1256389"/>
+          <a:ext cx="6300216" cy="0"/>
         </a:xfrm>
-        <a:prstGeom prst="roundRect">
-          <a:avLst>
-            <a:gd name="adj" fmla="val 10000"/>
-          </a:avLst>
-        </a:prstGeom>
-        <a:solidFill>
-          <a:schemeClr val="bg1">
-            <a:lumMod val="95000"/>
-            <a:hueOff val="0"/>
-            <a:satOff val="0"/>
-            <a:lumOff val="0"/>
-            <a:alphaOff val="0"/>
-          </a:schemeClr>
-        </a:solidFill>
-        <a:ln>
-          <a:noFill/>
-        </a:ln>
-        <a:effectLst/>
-      </dsp:spPr>
-      <dsp:style>
-        <a:lnRef idx="0">
-          <a:scrgbClr r="0" g="0" b="0"/>
-        </a:lnRef>
-        <a:fillRef idx="1">
-          <a:scrgbClr r="0" g="0" b="0"/>
-        </a:fillRef>
-        <a:effectRef idx="0">
-          <a:scrgbClr r="0" g="0" b="0"/>
-        </a:effectRef>
-        <a:fontRef idx="minor"/>
-      </dsp:style>
-    </dsp:sp>
-    <dsp:sp modelId="{0D82158A-25B8-4AA8-BF8F-173553DE4FFC}">
-      <dsp:nvSpPr>
-        <dsp:cNvPr id="0" name=""/>
-        <dsp:cNvSpPr/>
-      </dsp:nvSpPr>
-      <dsp:spPr>
-        <a:xfrm>
-          <a:off x="464584" y="2265986"/>
-          <a:ext cx="844699" cy="844699"/>
-        </a:xfrm>
-        <a:prstGeom prst="rect">
+        <a:prstGeom prst="line">
           <a:avLst/>
         </a:prstGeom>
-        <a:blipFill>
-          <a:blip xmlns:r="http://schemas.openxmlformats.org/officeDocument/2006/relationships" r:embed="rId3">
-            <a:extLst>
-              <a:ext uri="{28A0092B-C50C-407E-A947-70E740481C1C}">
-                <a14:useLocalDpi xmlns:a14="http://schemas.microsoft.com/office/drawing/2010/main" val="0"/>
-              </a:ext>
-              <a:ext uri="{96DAC541-7B7A-43D3-8B79-37D633B846F1}">
-                <asvg:svgBlip xmlns:asvg="http://schemas.microsoft.com/office/drawing/2016/SVG/main" r:embed="rId4"/>
-              </a:ext>
-            </a:extLst>
-          </a:blip>
-          <a:stretch>
-            <a:fillRect/>
-          </a:stretch>
-        </a:blipFill>
-        <a:ln w="19050" cap="flat" cmpd="sng" algn="ctr">
-          <a:noFill/>
+        <a:gradFill rotWithShape="0">
+          <a:gsLst>
+            <a:gs pos="0">
+              <a:schemeClr val="accent5">
+                <a:hueOff val="4187701"/>
+                <a:satOff val="449"/>
+                <a:lumOff val="-8628"/>
+                <a:alphaOff val="0"/>
+                <a:satMod val="103000"/>
+                <a:lumMod val="102000"/>
+                <a:tint val="94000"/>
+              </a:schemeClr>
+            </a:gs>
+            <a:gs pos="50000">
+              <a:schemeClr val="accent5">
+                <a:hueOff val="4187701"/>
+                <a:satOff val="449"/>
+                <a:lumOff val="-8628"/>
+                <a:alphaOff val="0"/>
+                <a:satMod val="110000"/>
+                <a:lumMod val="100000"/>
+                <a:shade val="100000"/>
+              </a:schemeClr>
+            </a:gs>
+            <a:gs pos="100000">
+              <a:schemeClr val="accent5">
+                <a:hueOff val="4187701"/>
+                <a:satOff val="449"/>
+                <a:lumOff val="-8628"/>
+                <a:alphaOff val="0"/>
+                <a:lumMod val="99000"/>
+                <a:satMod val="120000"/>
+                <a:shade val="78000"/>
+              </a:schemeClr>
+            </a:gs>
+          </a:gsLst>
+          <a:lin ang="5400000" scaled="0"/>
+        </a:gradFill>
+        <a:ln w="12700" cap="flat" cmpd="sng" algn="ctr">
+          <a:solidFill>
+            <a:schemeClr val="accent5">
+              <a:hueOff val="4187701"/>
+              <a:satOff val="449"/>
+              <a:lumOff val="-8628"/>
+              <a:alphaOff val="0"/>
+            </a:schemeClr>
+          </a:solidFill>
           <a:prstDash val="solid"/>
           <a:miter lim="800000"/>
         </a:ln>
-        <a:effectLst/>
+        <a:effectLst>
+          <a:outerShdw blurRad="57150" dist="19050" dir="5400000" algn="ctr" rotWithShape="0">
+            <a:srgbClr val="000000">
+              <a:alpha val="63000"/>
+            </a:srgbClr>
+          </a:outerShdw>
+        </a:effectLst>
       </dsp:spPr>
       <dsp:style>
-        <a:lnRef idx="2">
+        <a:lnRef idx="1">
           <a:scrgbClr r="0" g="0" b="0"/>
         </a:lnRef>
-        <a:fillRef idx="1">
+        <a:fillRef idx="3">
           <a:scrgbClr r="0" g="0" b="0"/>
         </a:fillRef>
-        <a:effectRef idx="0">
+        <a:effectRef idx="3">
           <a:scrgbClr r="0" g="0" b="0"/>
         </a:effectRef>
         <a:fontRef idx="minor">
@@ -4223,15 +3967,15 @@
         </a:fontRef>
       </dsp:style>
     </dsp:sp>
-    <dsp:sp modelId="{C835DA41-A442-4D4A-880B-0D024B70A720}">
+    <dsp:sp modelId="{90658E9A-0601-45F4-9F7E-493B84D59B00}">
       <dsp:nvSpPr>
         <dsp:cNvPr id="0" name=""/>
         <dsp:cNvSpPr/>
       </dsp:nvSpPr>
       <dsp:spPr>
         <a:xfrm>
-          <a:off x="1773868" y="1920427"/>
-          <a:ext cx="4846387" cy="1535816"/>
+          <a:off x="0" y="1256389"/>
+          <a:ext cx="6300216" cy="1254549"/>
         </a:xfrm>
         <a:prstGeom prst="rect">
           <a:avLst/>
@@ -4255,12 +3999,12 @@
         <a:fontRef idx="minor"/>
       </dsp:style>
       <dsp:txBody>
-        <a:bodyPr spcFirstLastPara="0" vert="horz" wrap="square" lIns="162541" tIns="162541" rIns="162541" bIns="162541" numCol="1" spcCol="1270" anchor="ctr" anchorCtr="0">
+        <a:bodyPr spcFirstLastPara="0" vert="horz" wrap="square" lIns="60960" tIns="60960" rIns="60960" bIns="60960" numCol="1" spcCol="1270" anchor="t" anchorCtr="0">
           <a:noAutofit/>
         </a:bodyPr>
         <a:lstStyle/>
         <a:p>
-          <a:pPr marL="0" lvl="0" indent="0" algn="l" defTabSz="622300">
+          <a:pPr marL="0" lvl="0" indent="0" algn="l" defTabSz="711200">
             <a:lnSpc>
               <a:spcPct val="90000"/>
             </a:lnSpc>
@@ -4273,102 +4017,96 @@
             <a:buNone/>
           </a:pPr>
           <a:r>
-            <a:rPr lang="es-MX" sz="1400" kern="1200"/>
+            <a:rPr lang="es-MX" sz="1600" kern="1200"/>
             <a:t>Empezando con Apache Spark surge en 2009 como proyecto de investigación de la universidad de California, Berkeley, para mejorar el procesamiento de datos especialmente para tareas de aprendizaje automático. En 2010 se convirtió en un proyecto de código abierto</a:t>
           </a:r>
-          <a:endParaRPr lang="en-US" sz="1400" kern="1200"/>
+          <a:endParaRPr lang="en-US" sz="1600" kern="1200"/>
         </a:p>
       </dsp:txBody>
       <dsp:txXfrm>
-        <a:off x="1773868" y="1920427"/>
-        <a:ext cx="4846387" cy="1535816"/>
+        <a:off x="0" y="1256389"/>
+        <a:ext cx="6300216" cy="1254549"/>
       </dsp:txXfrm>
     </dsp:sp>
-    <dsp:sp modelId="{36A98DEE-117F-4245-AFB9-E6324A4FD338}">
+    <dsp:sp modelId="{D1F9DBA7-EFED-4059-A428-4A19FFD9DB38}">
       <dsp:nvSpPr>
         <dsp:cNvPr id="0" name=""/>
         <dsp:cNvSpPr/>
       </dsp:nvSpPr>
       <dsp:spPr>
         <a:xfrm>
-          <a:off x="0" y="3840198"/>
-          <a:ext cx="6620255" cy="1535816"/>
+          <a:off x="0" y="2510938"/>
+          <a:ext cx="6300216" cy="0"/>
         </a:xfrm>
-        <a:prstGeom prst="roundRect">
-          <a:avLst>
-            <a:gd name="adj" fmla="val 10000"/>
-          </a:avLst>
-        </a:prstGeom>
-        <a:solidFill>
-          <a:schemeClr val="bg1">
-            <a:lumMod val="95000"/>
-            <a:hueOff val="0"/>
-            <a:satOff val="0"/>
-            <a:lumOff val="0"/>
-            <a:alphaOff val="0"/>
-          </a:schemeClr>
-        </a:solidFill>
-        <a:ln>
-          <a:noFill/>
-        </a:ln>
-        <a:effectLst/>
-      </dsp:spPr>
-      <dsp:style>
-        <a:lnRef idx="0">
-          <a:scrgbClr r="0" g="0" b="0"/>
-        </a:lnRef>
-        <a:fillRef idx="1">
-          <a:scrgbClr r="0" g="0" b="0"/>
-        </a:fillRef>
-        <a:effectRef idx="0">
-          <a:scrgbClr r="0" g="0" b="0"/>
-        </a:effectRef>
-        <a:fontRef idx="minor"/>
-      </dsp:style>
-    </dsp:sp>
-    <dsp:sp modelId="{C7D15DAF-DEFE-4020-B78C-361B30BE72EC}">
-      <dsp:nvSpPr>
-        <dsp:cNvPr id="0" name=""/>
-        <dsp:cNvSpPr/>
-      </dsp:nvSpPr>
-      <dsp:spPr>
-        <a:xfrm>
-          <a:off x="464584" y="4185757"/>
-          <a:ext cx="844699" cy="844699"/>
-        </a:xfrm>
-        <a:prstGeom prst="rect">
+        <a:prstGeom prst="line">
           <a:avLst/>
         </a:prstGeom>
-        <a:blipFill>
-          <a:blip xmlns:r="http://schemas.openxmlformats.org/officeDocument/2006/relationships" r:embed="rId5">
-            <a:extLst>
-              <a:ext uri="{28A0092B-C50C-407E-A947-70E740481C1C}">
-                <a14:useLocalDpi xmlns:a14="http://schemas.microsoft.com/office/drawing/2010/main" val="0"/>
-              </a:ext>
-              <a:ext uri="{96DAC541-7B7A-43D3-8B79-37D633B846F1}">
-                <asvg:svgBlip xmlns:asvg="http://schemas.microsoft.com/office/drawing/2016/SVG/main" r:embed="rId6"/>
-              </a:ext>
-            </a:extLst>
-          </a:blip>
-          <a:stretch>
-            <a:fillRect/>
-          </a:stretch>
-        </a:blipFill>
-        <a:ln w="19050" cap="flat" cmpd="sng" algn="ctr">
-          <a:noFill/>
+        <a:gradFill rotWithShape="0">
+          <a:gsLst>
+            <a:gs pos="0">
+              <a:schemeClr val="accent5">
+                <a:hueOff val="8375403"/>
+                <a:satOff val="897"/>
+                <a:lumOff val="-17256"/>
+                <a:alphaOff val="0"/>
+                <a:satMod val="103000"/>
+                <a:lumMod val="102000"/>
+                <a:tint val="94000"/>
+              </a:schemeClr>
+            </a:gs>
+            <a:gs pos="50000">
+              <a:schemeClr val="accent5">
+                <a:hueOff val="8375403"/>
+                <a:satOff val="897"/>
+                <a:lumOff val="-17256"/>
+                <a:alphaOff val="0"/>
+                <a:satMod val="110000"/>
+                <a:lumMod val="100000"/>
+                <a:shade val="100000"/>
+              </a:schemeClr>
+            </a:gs>
+            <a:gs pos="100000">
+              <a:schemeClr val="accent5">
+                <a:hueOff val="8375403"/>
+                <a:satOff val="897"/>
+                <a:lumOff val="-17256"/>
+                <a:alphaOff val="0"/>
+                <a:lumMod val="99000"/>
+                <a:satMod val="120000"/>
+                <a:shade val="78000"/>
+              </a:schemeClr>
+            </a:gs>
+          </a:gsLst>
+          <a:lin ang="5400000" scaled="0"/>
+        </a:gradFill>
+        <a:ln w="12700" cap="flat" cmpd="sng" algn="ctr">
+          <a:solidFill>
+            <a:schemeClr val="accent5">
+              <a:hueOff val="8375403"/>
+              <a:satOff val="897"/>
+              <a:lumOff val="-17256"/>
+              <a:alphaOff val="0"/>
+            </a:schemeClr>
+          </a:solidFill>
           <a:prstDash val="solid"/>
           <a:miter lim="800000"/>
         </a:ln>
-        <a:effectLst/>
+        <a:effectLst>
+          <a:outerShdw blurRad="57150" dist="19050" dir="5400000" algn="ctr" rotWithShape="0">
+            <a:srgbClr val="000000">
+              <a:alpha val="63000"/>
+            </a:srgbClr>
+          </a:outerShdw>
+        </a:effectLst>
       </dsp:spPr>
       <dsp:style>
-        <a:lnRef idx="2">
+        <a:lnRef idx="1">
           <a:scrgbClr r="0" g="0" b="0"/>
         </a:lnRef>
-        <a:fillRef idx="1">
+        <a:fillRef idx="3">
           <a:scrgbClr r="0" g="0" b="0"/>
         </a:fillRef>
-        <a:effectRef idx="0">
+        <a:effectRef idx="3">
           <a:scrgbClr r="0" g="0" b="0"/>
         </a:effectRef>
         <a:fontRef idx="minor">
@@ -4376,15 +4114,15 @@
         </a:fontRef>
       </dsp:style>
     </dsp:sp>
-    <dsp:sp modelId="{06BECED2-3635-42F1-B19F-C4E5D6E3F0A4}">
+    <dsp:sp modelId="{FA71C7B0-3676-42B1-8EAB-05FEE83EA3E3}">
       <dsp:nvSpPr>
         <dsp:cNvPr id="0" name=""/>
         <dsp:cNvSpPr/>
       </dsp:nvSpPr>
       <dsp:spPr>
         <a:xfrm>
-          <a:off x="1773868" y="3840198"/>
-          <a:ext cx="4846387" cy="1535816"/>
+          <a:off x="0" y="2510938"/>
+          <a:ext cx="6300216" cy="1254549"/>
         </a:xfrm>
         <a:prstGeom prst="rect">
           <a:avLst/>
@@ -4408,12 +4146,12 @@
         <a:fontRef idx="minor"/>
       </dsp:style>
       <dsp:txBody>
-        <a:bodyPr spcFirstLastPara="0" vert="horz" wrap="square" lIns="162541" tIns="162541" rIns="162541" bIns="162541" numCol="1" spcCol="1270" anchor="ctr" anchorCtr="0">
+        <a:bodyPr spcFirstLastPara="0" vert="horz" wrap="square" lIns="60960" tIns="60960" rIns="60960" bIns="60960" numCol="1" spcCol="1270" anchor="t" anchorCtr="0">
           <a:noAutofit/>
         </a:bodyPr>
         <a:lstStyle/>
         <a:p>
-          <a:pPr marL="0" lvl="0" indent="0" algn="l" defTabSz="622300">
+          <a:pPr marL="0" lvl="0" indent="0" algn="l" defTabSz="711200">
             <a:lnSpc>
               <a:spcPct val="90000"/>
             </a:lnSpc>
@@ -4426,15 +4164,15 @@
             <a:buNone/>
           </a:pPr>
           <a:r>
-            <a:rPr lang="es-MX" sz="1400" kern="1200"/>
+            <a:rPr lang="es-MX" sz="1600" kern="1200"/>
             <a:t>Databricks es una plataforma de Analisis basada en Apache Spark, en esencia proporciona un ambiente optimo para el desarrollo de Spark. </a:t>
           </a:r>
-          <a:endParaRPr lang="en-US" sz="1400" kern="1200"/>
+          <a:endParaRPr lang="en-US" sz="1600" kern="1200"/>
         </a:p>
       </dsp:txBody>
       <dsp:txXfrm>
-        <a:off x="1773868" y="3840198"/>
-        <a:ext cx="4846387" cy="1535816"/>
+        <a:off x="0" y="2510938"/>
+        <a:ext cx="6300216" cy="1254549"/>
       </dsp:txXfrm>
     </dsp:sp>
   </dsp:spTree>
@@ -5978,40 +5716,94 @@
 </file>
 
 <file path=ppt/diagrams/layout1.xml><?xml version="1.0" encoding="utf-8"?>
-<dgm:layoutDef xmlns:dgm="http://schemas.openxmlformats.org/drawingml/2006/diagram" xmlns:a="http://schemas.openxmlformats.org/drawingml/2006/main" uniqueId="urn:microsoft.com/office/officeart/2018/2/layout/IconVerticalSolidList">
-  <dgm:title val="Icon Vertical Solid List"/>
-  <dgm:desc val="Use to show a series of visuals from top to bottom with Level 1 or Level 1 and Level 2 text grouped in a shape. Works best with icons or small pictures with lengthier descriptions."/>
+<dgm:layoutDef xmlns:dgm="http://schemas.openxmlformats.org/drawingml/2006/diagram" xmlns:a="http://schemas.openxmlformats.org/drawingml/2006/main" uniqueId="urn:microsoft.com/office/officeart/2008/layout/LinedList">
+  <dgm:title val=""/>
+  <dgm:desc val=""/>
   <dgm:catLst>
-    <dgm:cat type="icon" pri="500"/>
+    <dgm:cat type="hierarchy" pri="8000"/>
+    <dgm:cat type="list" pri="2500"/>
   </dgm:catLst>
-  <dgm:sampData useDef="1">
+  <dgm:sampData>
     <dgm:dataModel>
-      <dgm:ptLst/>
+      <dgm:ptLst>
+        <dgm:pt modelId="0" type="doc"/>
+        <dgm:pt modelId="1">
+          <dgm:prSet phldr="1"/>
+        </dgm:pt>
+        <dgm:pt modelId="11">
+          <dgm:prSet phldr="1"/>
+        </dgm:pt>
+        <dgm:pt modelId="12">
+          <dgm:prSet phldr="1"/>
+        </dgm:pt>
+        <dgm:pt modelId="13">
+          <dgm:prSet phldr="1"/>
+        </dgm:pt>
+      </dgm:ptLst>
+      <dgm:cxnLst>
+        <dgm:cxn modelId="2" srcId="0" destId="1" srcOrd="0" destOrd="0"/>
+        <dgm:cxn modelId="3" srcId="1" destId="11" srcOrd="0" destOrd="0"/>
+        <dgm:cxn modelId="4" srcId="1" destId="12" srcOrd="1" destOrd="0"/>
+        <dgm:cxn modelId="5" srcId="1" destId="13" srcOrd="2" destOrd="0"/>
+      </dgm:cxnLst>
       <dgm:bg/>
       <dgm:whole/>
     </dgm:dataModel>
   </dgm:sampData>
-  <dgm:styleData useDef="1">
+  <dgm:styleData>
     <dgm:dataModel>
-      <dgm:ptLst/>
+      <dgm:ptLst>
+        <dgm:pt modelId="0" type="doc"/>
+        <dgm:pt modelId="1">
+          <dgm:prSet phldr="1"/>
+        </dgm:pt>
+        <dgm:pt modelId="11">
+          <dgm:prSet phldr="1"/>
+        </dgm:pt>
+        <dgm:pt modelId="12">
+          <dgm:prSet phldr="1"/>
+        </dgm:pt>
+      </dgm:ptLst>
+      <dgm:cxnLst>
+        <dgm:cxn modelId="2" srcId="0" destId="1" srcOrd="0" destOrd="0"/>
+        <dgm:cxn modelId="3" srcId="1" destId="11" srcOrd="0" destOrd="0"/>
+        <dgm:cxn modelId="4" srcId="1" destId="12" srcOrd="1" destOrd="0"/>
+      </dgm:cxnLst>
       <dgm:bg/>
       <dgm:whole/>
     </dgm:dataModel>
   </dgm:styleData>
-  <dgm:clrData useDef="1">
+  <dgm:clrData>
     <dgm:dataModel>
-      <dgm:ptLst/>
+      <dgm:ptLst>
+        <dgm:pt modelId="0" type="doc"/>
+        <dgm:pt modelId="1">
+          <dgm:prSet phldr="1"/>
+        </dgm:pt>
+        <dgm:pt modelId="11">
+          <dgm:prSet phldr="1"/>
+        </dgm:pt>
+        <dgm:pt modelId="12">
+          <dgm:prSet phldr="1"/>
+        </dgm:pt>
+      </dgm:ptLst>
+      <dgm:cxnLst>
+        <dgm:cxn modelId="2" srcId="0" destId="1" srcOrd="0" destOrd="0"/>
+        <dgm:cxn modelId="3" srcId="1" destId="11" srcOrd="0" destOrd="0"/>
+        <dgm:cxn modelId="4" srcId="1" destId="12" srcOrd="1" destOrd="0"/>
+      </dgm:cxnLst>
       <dgm:bg/>
       <dgm:whole/>
     </dgm:dataModel>
   </dgm:clrData>
-  <dgm:layoutNode name="root">
+  <dgm:layoutNode name="vert0">
     <dgm:varLst>
       <dgm:dir/>
-      <dgm:resizeHandles val="exact"/>
+      <dgm:animOne val="branch"/>
+      <dgm:animLvl val="lvl"/>
     </dgm:varLst>
     <dgm:choose name="Name0">
-      <dgm:if name="Name1" axis="self" func="var" arg="dir" op="equ" val="norm">
+      <dgm:if name="Name1" func="var" arg="dir" op="equ" val="norm">
         <dgm:alg type="lin">
           <dgm:param type="linDir" val="fromT"/>
           <dgm:param type="nodeHorzAlign" val="l"/>
@@ -6028,246 +5820,364 @@
       <dgm:adjLst/>
     </dgm:shape>
     <dgm:presOf/>
-    <dgm:choose name="Name3">
-      <dgm:if name="Name4" axis="ch" ptType="node" func="cnt" op="lte" val="3">
-        <dgm:constrLst>
-          <dgm:constr type="h" for="ch" forName="compNode" refType="h" fact="0.3"/>
-          <dgm:constr type="w" for="ch" forName="compNode" refType="w"/>
-          <dgm:constr type="h" for="ch" forName="sibTrans" refType="h" refFor="ch" refForName="compNode" fact="0.25"/>
-          <dgm:constr type="primFontSz" for="des" forName="parTx" val="25"/>
-          <dgm:constr type="primFontSz" for="des" forName="desTx" refType="primFontSz" refFor="des" refForName="parTx" op="lte" fact="0.75"/>
-          <dgm:constr type="h" for="des" forName="compNode" op="equ"/>
-          <dgm:constr type="h" for="des" forName="bgRect" op="equ"/>
-          <dgm:constr type="h" for="des" forName="iconRect" op="equ"/>
-          <dgm:constr type="w" for="des" forName="iconRect" op="equ"/>
-          <dgm:constr type="h" for="des" forName="spaceRect" op="equ"/>
-          <dgm:constr type="h" for="des" forName="parTx" op="equ"/>
-          <dgm:constr type="h" for="des" forName="desTx" op="equ"/>
-        </dgm:constrLst>
-      </dgm:if>
-      <dgm:if name="Name5" axis="ch" ptType="node" func="cnt" op="lte" val="4">
-        <dgm:constrLst>
-          <dgm:constr type="h" for="ch" forName="compNode" refType="h" fact="0.3"/>
-          <dgm:constr type="w" for="ch" forName="compNode" refType="w"/>
-          <dgm:constr type="h" for="ch" forName="sibTrans" refType="h" refFor="ch" refForName="compNode" fact="0.25"/>
-          <dgm:constr type="primFontSz" for="des" forName="parTx" val="22"/>
-          <dgm:constr type="primFontSz" for="des" forName="desTx" refType="primFontSz" refFor="des" refForName="parTx" op="lte" fact="0.75"/>
-          <dgm:constr type="h" for="des" forName="compNode" op="equ"/>
-          <dgm:constr type="h" for="des" forName="bgRect" op="equ"/>
-          <dgm:constr type="h" for="des" forName="iconRect" op="equ"/>
-          <dgm:constr type="w" for="des" forName="iconRect" op="equ"/>
-          <dgm:constr type="h" for="des" forName="spaceRect" op="equ"/>
-          <dgm:constr type="h" for="des" forName="parTx" op="equ"/>
-          <dgm:constr type="h" for="des" forName="desTx" op="equ"/>
-        </dgm:constrLst>
-      </dgm:if>
-      <dgm:if name="Name6" axis="ch" ptType="node" func="cnt" op="lte" val="6">
-        <dgm:constrLst>
-          <dgm:constr type="h" for="ch" forName="compNode" refType="h" fact="0.3"/>
-          <dgm:constr type="w" for="ch" forName="compNode" refType="w"/>
-          <dgm:constr type="h" for="ch" forName="sibTrans" refType="h" refFor="ch" refForName="compNode" fact="0.25"/>
-          <dgm:constr type="primFontSz" for="des" forName="parTx" val="19"/>
-          <dgm:constr type="primFontSz" for="des" forName="desTx" refType="primFontSz" refFor="des" refForName="parTx" op="lte" fact="0.75"/>
-          <dgm:constr type="h" for="des" forName="compNode" op="equ"/>
-          <dgm:constr type="h" for="des" forName="bgRect" op="equ"/>
-          <dgm:constr type="h" for="des" forName="iconRect" op="equ"/>
-          <dgm:constr type="w" for="des" forName="iconRect" op="equ"/>
-          <dgm:constr type="h" for="des" forName="spaceRect" op="equ"/>
-          <dgm:constr type="h" for="des" forName="parTx" op="equ"/>
-          <dgm:constr type="h" for="des" forName="desTx" op="equ"/>
-        </dgm:constrLst>
-      </dgm:if>
-      <dgm:else name="Name7">
-        <dgm:constrLst>
-          <dgm:constr type="h" for="ch" forName="compNode" refType="h" fact="0.3"/>
-          <dgm:constr type="w" for="ch" forName="compNode" refType="w"/>
-          <dgm:constr type="h" for="ch" forName="sibTrans" refType="h" refFor="ch" refForName="compNode" fact="0.25"/>
-          <dgm:constr type="primFontSz" for="des" forName="parTx" val="16"/>
-          <dgm:constr type="primFontSz" for="des" forName="desTx" refType="primFontSz" refFor="des" refForName="parTx" op="lte" fact="0.75"/>
-          <dgm:constr type="h" for="des" forName="compNode" op="equ"/>
-          <dgm:constr type="h" for="des" forName="bgRect" op="equ"/>
-          <dgm:constr type="h" for="des" forName="iconRect" op="equ"/>
-          <dgm:constr type="w" for="des" forName="iconRect" op="equ"/>
-          <dgm:constr type="h" for="des" forName="spaceRect" op="equ"/>
-          <dgm:constr type="h" for="des" forName="parTx" op="equ"/>
-          <dgm:constr type="h" for="des" forName="desTx" op="equ"/>
-        </dgm:constrLst>
-      </dgm:else>
-    </dgm:choose>
-    <dgm:ruleLst>
-      <dgm:rule type="h" for="ch" forName="compNode" val="0" fact="NaN" max="NaN"/>
-    </dgm:ruleLst>
-    <dgm:forEach name="Name8" axis="ch" ptType="node">
-      <dgm:layoutNode name="compNode">
-        <dgm:alg type="composite"/>
+    <dgm:constrLst>
+      <dgm:constr type="w" for="ch" forName="horz1" refType="w"/>
+      <dgm:constr type="h" for="ch" forName="horz1" refType="h"/>
+      <dgm:constr type="h" for="des" forName="vert1" refType="h"/>
+      <dgm:constr type="h" for="des" forName="tx1" refType="h"/>
+      <dgm:constr type="h" for="des" forName="horz2" refType="h"/>
+      <dgm:constr type="h" for="des" forName="vert2" refType="h"/>
+      <dgm:constr type="h" for="des" forName="horz3" refType="h"/>
+      <dgm:constr type="h" for="des" forName="vert3" refType="h"/>
+      <dgm:constr type="h" for="des" forName="horz4" refType="h"/>
+      <dgm:constr type="h" for="des" ptType="node" refType="h"/>
+      <dgm:constr type="primFontSz" for="des" forName="tx1" op="equ" val="65"/>
+      <dgm:constr type="primFontSz" for="des" forName="tx2" op="equ" val="65"/>
+      <dgm:constr type="primFontSz" for="des" forName="tx3" op="equ" val="65"/>
+      <dgm:constr type="primFontSz" for="des" forName="tx4" op="equ" val="65"/>
+      <dgm:constr type="w" for="des" forName="thickLine" refType="w"/>
+      <dgm:constr type="h" for="des" forName="thickLine"/>
+      <dgm:constr type="h" for="des" forName="thinLine1"/>
+      <dgm:constr type="h" for="des" forName="thinLine2b"/>
+      <dgm:constr type="h" for="des" forName="thinLine3"/>
+      <dgm:constr type="h" for="des" forName="vertSpace2a" refType="h" fact="0.05"/>
+      <dgm:constr type="h" for="des" forName="vertSpace2b" refType="h" refFor="des" refForName="vertSpace2a"/>
+    </dgm:constrLst>
+    <dgm:forEach name="Name3" axis="ch" ptType="node">
+      <dgm:layoutNode name="thickLine" styleLbl="alignNode1">
+        <dgm:alg type="sp"/>
+        <dgm:shape xmlns:r="http://schemas.openxmlformats.org/officeDocument/2006/relationships" type="line" r:blip="">
+          <dgm:adjLst/>
+        </dgm:shape>
+        <dgm:presOf/>
+      </dgm:layoutNode>
+      <dgm:layoutNode name="horz1">
+        <dgm:choose name="Name4">
+          <dgm:if name="Name5" func="var" arg="dir" op="equ" val="norm">
+            <dgm:alg type="lin">
+              <dgm:param type="linDir" val="fromL"/>
+              <dgm:param type="nodeVertAlign" val="t"/>
+            </dgm:alg>
+          </dgm:if>
+          <dgm:else name="Name6">
+            <dgm:alg type="lin">
+              <dgm:param type="linDir" val="fromR"/>
+              <dgm:param type="nodeVertAlign" val="t"/>
+            </dgm:alg>
+          </dgm:else>
+        </dgm:choose>
         <dgm:shape xmlns:r="http://schemas.openxmlformats.org/officeDocument/2006/relationships" r:blip="">
           <dgm:adjLst/>
         </dgm:shape>
-        <dgm:presOf axis="self"/>
-        <dgm:choose name="Name9">
-          <dgm:if name="Name10" axis="ch" ptType="node" func="cnt" op="gte" val="1">
+        <dgm:presOf/>
+        <dgm:choose name="Name7">
+          <dgm:if name="Name8" axis="root des" func="maxDepth" op="equ" val="1">
             <dgm:constrLst>
-              <dgm:constr type="w" for="ch" forName="bgRect" refType="w"/>
-              <dgm:constr type="h" for="ch" forName="bgRect" refType="h"/>
-              <dgm:constr type="l" for="ch" forName="bgRect"/>
-              <dgm:constr type="t" for="ch" forName="bgRect"/>
-              <dgm:constr type="h" for="ch" forName="iconRect" refType="h" fact="0.55"/>
-              <dgm:constr type="w" for="ch" forName="iconRect" refType="h" refFor="ch" refForName="iconRect"/>
-              <dgm:constr type="l" for="ch" forName="iconRect" refType="h" refFor="ch" refForName="iconRect" fact="0.55"/>
-              <dgm:constr type="ctrY" for="ch" forName="iconRect" refType="ctrY" refFor="ch" refForName="bgRect"/>
-              <dgm:constr type="w" for="ch" forName="spaceRect" refType="l" refFor="ch" refForName="iconRect"/>
-              <dgm:constr type="h" for="ch" forName="spaceRect" refType="h"/>
-              <dgm:constr type="l" for="ch" forName="spaceRect" refType="r" refFor="ch" refForName="iconRect"/>
-              <dgm:constr type="t" for="ch" forName="spaceRect"/>
-              <dgm:constr type="w" for="ch" forName="parTx" refType="w" fact="0.45"/>
-              <dgm:constr type="h" for="ch" forName="parTx" refType="h"/>
-              <dgm:constr type="l" for="ch" forName="parTx" refType="r" refFor="ch" refForName="spaceRect"/>
-              <dgm:constr type="t" for="ch" forName="parTx"/>
-              <dgm:constr type="h" for="ch" forName="desTx" refType="h"/>
-              <dgm:constr type="l" for="ch" forName="desTx" refType="r" refFor="ch" refForName="parTx"/>
-              <dgm:constr type="t" for="ch" forName="desTx"/>
+              <dgm:constr type="w" for="ch" forName="tx1" refType="w"/>
             </dgm:constrLst>
           </dgm:if>
-          <dgm:else name="Name11">
+          <dgm:if name="Name9" axis="root des" func="maxDepth" op="equ" val="2">
             <dgm:constrLst>
-              <dgm:constr type="w" for="ch" forName="bgRect" refType="w"/>
-              <dgm:constr type="h" for="ch" forName="bgRect" refType="h"/>
-              <dgm:constr type="l" for="ch" forName="bgRect"/>
-              <dgm:constr type="t" for="ch" forName="bgRect"/>
-              <dgm:constr type="h" for="ch" forName="iconRect" refType="h" fact="0.55"/>
-              <dgm:constr type="w" for="ch" forName="iconRect" refType="h" refFor="ch" refForName="iconRect"/>
-              <dgm:constr type="l" for="ch" forName="iconRect" refType="h" refFor="ch" refForName="iconRect" fact="0.55"/>
-              <dgm:constr type="ctrY" for="ch" forName="iconRect" refType="ctrY" refFor="ch" refForName="bgRect"/>
-              <dgm:constr type="w" for="ch" forName="spaceRect" refType="l" refFor="ch" refForName="iconRect"/>
-              <dgm:constr type="h" for="ch" forName="spaceRect" refType="h"/>
-              <dgm:constr type="l" for="ch" forName="spaceRect" refType="r" refFor="ch" refForName="iconRect"/>
-              <dgm:constr type="t" for="ch" forName="spaceRect"/>
-              <dgm:constr type="h" for="ch" forName="parTx" refType="h"/>
-              <dgm:constr type="l" for="ch" forName="parTx" refType="r" refFor="ch" refForName="spaceRect"/>
-              <dgm:constr type="t" for="ch" forName="parTx"/>
+              <dgm:constr type="w" for="ch" forName="tx1" refType="w" fact="0.2"/>
+              <dgm:constr type="w" for="des" forName="tx2" refType="w" fact="0.785"/>
+              <dgm:constr type="w" for="des" forName="horzSpace2" refType="w" fact="0.015"/>
+              <dgm:constr type="w" for="des" forName="thinLine2b" refType="w" fact="0.8"/>
             </dgm:constrLst>
-          </dgm:else>
+          </dgm:if>
+          <dgm:if name="Name10" axis="root des" func="maxDepth" op="equ" val="3">
+            <dgm:constrLst>
+              <dgm:constr type="w" for="ch" forName="tx1" refType="w" fact="0.2"/>
+              <dgm:constr type="w" for="des" forName="tx2" refType="w" fact="0.385"/>
+              <dgm:constr type="w" for="des" forName="tx3" refType="w" fact="0.385"/>
+              <dgm:constr type="w" for="des" forName="horzSpace2" refType="w" fact="0.015"/>
+              <dgm:constr type="w" for="des" forName="horzSpace3" refType="w" fact="0.015"/>
+              <dgm:constr type="w" for="des" forName="thinLine2b" refType="w" fact="0.8"/>
+              <dgm:constr type="w" for="des" forName="thinLine3" refType="w" fact="0.385"/>
+            </dgm:constrLst>
+          </dgm:if>
+          <dgm:if name="Name11" axis="root des" func="maxDepth" op="gte" val="4">
+            <dgm:constrLst>
+              <dgm:constr type="w" for="ch" forName="tx1" refType="w" fact="0.2"/>
+              <dgm:constr type="w" for="des" forName="tx2" refType="w" fact="0.2516"/>
+              <dgm:constr type="w" for="des" forName="tx3" refType="w" fact="0.2516"/>
+              <dgm:constr type="w" for="des" forName="tx4" refType="w" fact="0.2516"/>
+              <dgm:constr type="w" for="des" forName="horzSpace2" refType="w" fact="0.015"/>
+              <dgm:constr type="w" for="des" forName="horzSpace3" refType="w" fact="0.015"/>
+              <dgm:constr type="w" for="des" forName="horzSpace4" refType="w" fact="0.015"/>
+              <dgm:constr type="w" for="des" forName="thinLine2b" refType="w" fact="0.8"/>
+              <dgm:constr type="w" for="des" forName="thinLine3" refType="w" fact="0.5332"/>
+            </dgm:constrLst>
+          </dgm:if>
+          <dgm:else name="Name12"/>
         </dgm:choose>
-        <dgm:ruleLst>
-          <dgm:rule type="h" val="INF" fact="NaN" max="NaN"/>
-        </dgm:ruleLst>
-        <dgm:layoutNode name="bgRect" styleLbl="bgShp">
-          <dgm:alg type="sp"/>
-          <dgm:shape xmlns:r="http://schemas.openxmlformats.org/officeDocument/2006/relationships" type="roundRect" r:blip="">
-            <dgm:adjLst>
-              <dgm:adj idx="1" val="0.1"/>
-            </dgm:adjLst>
-          </dgm:shape>
-          <dgm:presOf/>
-          <dgm:constrLst/>
-          <dgm:ruleLst/>
-        </dgm:layoutNode>
-        <dgm:layoutNode name="iconRect" styleLbl="node1">
-          <dgm:alg type="sp"/>
-          <dgm:shape xmlns:r="http://schemas.openxmlformats.org/officeDocument/2006/relationships" type="rect" r:blip="" blipPhldr="1">
+        <dgm:layoutNode name="tx1" styleLbl="revTx">
+          <dgm:alg type="tx">
+            <dgm:param type="parTxLTRAlign" val="l"/>
+            <dgm:param type="parTxRTLAlign" val="r"/>
+            <dgm:param type="txAnchorVert" val="t"/>
+          </dgm:alg>
+          <dgm:shape xmlns:r="http://schemas.openxmlformats.org/officeDocument/2006/relationships" type="rect" r:blip="">
             <dgm:adjLst/>
           </dgm:shape>
-          <dgm:presOf/>
-          <dgm:constrLst/>
-          <dgm:ruleLst/>
+          <dgm:presOf axis="self"/>
+          <dgm:constrLst>
+            <dgm:constr type="tMarg" refType="primFontSz" fact="0.3"/>
+            <dgm:constr type="bMarg" refType="primFontSz" fact="0.3"/>
+            <dgm:constr type="lMarg" refType="primFontSz" fact="0.3"/>
+            <dgm:constr type="rMarg" refType="primFontSz" fact="0.3"/>
+          </dgm:constrLst>
+          <dgm:ruleLst>
+            <dgm:rule type="primFontSz" val="5" fact="NaN" max="NaN"/>
+          </dgm:ruleLst>
         </dgm:layoutNode>
-        <dgm:layoutNode name="spaceRect">
-          <dgm:alg type="sp"/>
+        <dgm:layoutNode name="vert1">
+          <dgm:choose name="Name13">
+            <dgm:if name="Name14" func="var" arg="dir" op="equ" val="norm">
+              <dgm:alg type="lin">
+                <dgm:param type="linDir" val="fromT"/>
+                <dgm:param type="nodeHorzAlign" val="l"/>
+              </dgm:alg>
+            </dgm:if>
+            <dgm:else name="Name15">
+              <dgm:alg type="lin">
+                <dgm:param type="linDir" val="fromT"/>
+                <dgm:param type="nodeHorzAlign" val="r"/>
+              </dgm:alg>
+            </dgm:else>
+          </dgm:choose>
           <dgm:shape xmlns:r="http://schemas.openxmlformats.org/officeDocument/2006/relationships" r:blip="">
             <dgm:adjLst/>
           </dgm:shape>
           <dgm:presOf/>
-          <dgm:constrLst/>
-          <dgm:ruleLst/>
-        </dgm:layoutNode>
-        <dgm:layoutNode name="parTx" styleLbl="revTx">
-          <dgm:varLst>
-            <dgm:chMax val="0"/>
-            <dgm:chPref val="0"/>
-          </dgm:varLst>
-          <dgm:alg type="tx">
-            <dgm:param type="txAnchorVert" val="mid"/>
-            <dgm:param type="parTxLTRAlign" val="l"/>
-            <dgm:param type="shpTxLTRAlignCh" val="l"/>
-            <dgm:param type="parTxRTLAlign" val="r"/>
-            <dgm:param type="shpTxRTLAlignCh" val="r"/>
-          </dgm:alg>
-          <dgm:shape xmlns:r="http://schemas.openxmlformats.org/officeDocument/2006/relationships" type="rect" r:blip="">
-            <dgm:adjLst/>
-          </dgm:shape>
-          <dgm:presOf axis="self" ptType="node"/>
-          <dgm:constrLst>
-            <dgm:constr type="lMarg" refType="h" fact="0.3"/>
-            <dgm:constr type="rMarg" refType="h" fact="0.3"/>
-            <dgm:constr type="tMarg" refType="h" fact="0.3"/>
-            <dgm:constr type="bMarg" refType="h" fact="0.3"/>
-          </dgm:constrLst>
-          <dgm:ruleLst>
-            <dgm:rule type="primFontSz" val="14" fact="NaN" max="NaN"/>
-            <dgm:rule type="h" val="INF" fact="NaN" max="NaN"/>
-          </dgm:ruleLst>
-        </dgm:layoutNode>
-        <dgm:choose name="Name12">
-          <dgm:if name="Name13" axis="ch" ptType="node" func="cnt" op="gte" val="1">
-            <dgm:layoutNode name="desTx" styleLbl="revTx">
-              <dgm:varLst/>
-              <dgm:alg type="tx">
-                <dgm:param type="txAnchorVertCh" val="mid"/>
-                <dgm:param type="parTxLTRAlign" val="l"/>
-                <dgm:param type="shpTxLTRAlignCh" val="l"/>
-                <dgm:param type="parTxRTLAlign" val="r"/>
-                <dgm:param type="shpTxRTLAlignCh" val="r"/>
-                <dgm:param type="stBulletLvl" val="0"/>
-              </dgm:alg>
-              <dgm:shape xmlns:r="http://schemas.openxmlformats.org/officeDocument/2006/relationships" type="rect" r:blip="">
+          <dgm:forEach name="Name16" axis="ch" ptType="node">
+            <dgm:choose name="Name17">
+              <dgm:if name="Name18" axis="self" ptType="node" func="pos" op="equ" val="1">
+                <dgm:layoutNode name="vertSpace2a">
+                  <dgm:alg type="sp"/>
+                  <dgm:shape xmlns:r="http://schemas.openxmlformats.org/officeDocument/2006/relationships" r:blip="">
+                    <dgm:adjLst/>
+                  </dgm:shape>
+                  <dgm:presOf/>
+                </dgm:layoutNode>
+              </dgm:if>
+              <dgm:else name="Name19"/>
+            </dgm:choose>
+            <dgm:layoutNode name="horz2">
+              <dgm:choose name="Name20">
+                <dgm:if name="Name21" func="var" arg="dir" op="equ" val="norm">
+                  <dgm:alg type="lin">
+                    <dgm:param type="linDir" val="fromL"/>
+                    <dgm:param type="nodeVertAlign" val="t"/>
+                  </dgm:alg>
+                </dgm:if>
+                <dgm:else name="Name22">
+                  <dgm:alg type="lin">
+                    <dgm:param type="linDir" val="fromR"/>
+                    <dgm:param type="nodeVertAlign" val="t"/>
+                  </dgm:alg>
+                </dgm:else>
+              </dgm:choose>
+              <dgm:shape xmlns:r="http://schemas.openxmlformats.org/officeDocument/2006/relationships" r:blip="">
                 <dgm:adjLst/>
               </dgm:shape>
-              <dgm:presOf axis="des" ptType="node"/>
-              <dgm:constrLst>
-                <dgm:constr type="primFontSz" val="18"/>
-                <dgm:constr type="secFontSz" refType="primFontSz"/>
-                <dgm:constr type="lMarg" refType="h" fact="0.3"/>
-                <dgm:constr type="rMarg" refType="h" fact="0.3"/>
-                <dgm:constr type="tMarg" refType="h" fact="0.3"/>
-                <dgm:constr type="bMarg" refType="h" fact="0.3"/>
-              </dgm:constrLst>
-              <dgm:ruleLst>
-                <dgm:rule type="primFontSz" val="11" fact="NaN" max="NaN"/>
-              </dgm:ruleLst>
+              <dgm:presOf/>
+              <dgm:layoutNode name="horzSpace2">
+                <dgm:alg type="sp"/>
+                <dgm:shape xmlns:r="http://schemas.openxmlformats.org/officeDocument/2006/relationships" r:blip="">
+                  <dgm:adjLst/>
+                </dgm:shape>
+                <dgm:presOf/>
+              </dgm:layoutNode>
+              <dgm:layoutNode name="tx2" styleLbl="revTx">
+                <dgm:alg type="tx">
+                  <dgm:param type="parTxLTRAlign" val="l"/>
+                  <dgm:param type="parTxRTLAlign" val="r"/>
+                  <dgm:param type="txAnchorVert" val="t"/>
+                </dgm:alg>
+                <dgm:shape xmlns:r="http://schemas.openxmlformats.org/officeDocument/2006/relationships" type="rect" r:blip="">
+                  <dgm:adjLst/>
+                </dgm:shape>
+                <dgm:presOf axis="self"/>
+                <dgm:constrLst>
+                  <dgm:constr type="tMarg" refType="primFontSz" fact="0.3"/>
+                  <dgm:constr type="bMarg" refType="primFontSz" fact="0.3"/>
+                  <dgm:constr type="lMarg" refType="primFontSz" fact="0.3"/>
+                  <dgm:constr type="rMarg" refType="primFontSz" fact="0.3"/>
+                </dgm:constrLst>
+                <dgm:ruleLst>
+                  <dgm:rule type="primFontSz" val="5" fact="NaN" max="NaN"/>
+                </dgm:ruleLst>
+              </dgm:layoutNode>
+              <dgm:layoutNode name="vert2">
+                <dgm:choose name="Name23">
+                  <dgm:if name="Name24" func="var" arg="dir" op="equ" val="norm">
+                    <dgm:alg type="lin">
+                      <dgm:param type="linDir" val="fromT"/>
+                      <dgm:param type="nodeHorzAlign" val="l"/>
+                    </dgm:alg>
+                  </dgm:if>
+                  <dgm:else name="Name25">
+                    <dgm:alg type="lin">
+                      <dgm:param type="linDir" val="fromT"/>
+                      <dgm:param type="nodeHorzAlign" val="r"/>
+                    </dgm:alg>
+                  </dgm:else>
+                </dgm:choose>
+                <dgm:shape xmlns:r="http://schemas.openxmlformats.org/officeDocument/2006/relationships" r:blip="">
+                  <dgm:adjLst/>
+                </dgm:shape>
+                <dgm:presOf/>
+                <dgm:forEach name="Name26" axis="ch" ptType="node">
+                  <dgm:layoutNode name="horz3">
+                    <dgm:choose name="Name27">
+                      <dgm:if name="Name28" func="var" arg="dir" op="equ" val="norm">
+                        <dgm:alg type="lin">
+                          <dgm:param type="linDir" val="fromL"/>
+                          <dgm:param type="nodeVertAlign" val="t"/>
+                        </dgm:alg>
+                      </dgm:if>
+                      <dgm:else name="Name29">
+                        <dgm:alg type="lin">
+                          <dgm:param type="linDir" val="fromR"/>
+                          <dgm:param type="nodeVertAlign" val="t"/>
+                        </dgm:alg>
+                      </dgm:else>
+                    </dgm:choose>
+                    <dgm:shape xmlns:r="http://schemas.openxmlformats.org/officeDocument/2006/relationships" r:blip="">
+                      <dgm:adjLst/>
+                    </dgm:shape>
+                    <dgm:presOf/>
+                    <dgm:layoutNode name="horzSpace3">
+                      <dgm:alg type="sp"/>
+                      <dgm:shape xmlns:r="http://schemas.openxmlformats.org/officeDocument/2006/relationships" r:blip="">
+                        <dgm:adjLst/>
+                      </dgm:shape>
+                      <dgm:presOf/>
+                    </dgm:layoutNode>
+                    <dgm:layoutNode name="tx3" styleLbl="revTx">
+                      <dgm:alg type="tx">
+                        <dgm:param type="parTxLTRAlign" val="l"/>
+                        <dgm:param type="parTxRTLAlign" val="r"/>
+                        <dgm:param type="txAnchorVert" val="t"/>
+                      </dgm:alg>
+                      <dgm:shape xmlns:r="http://schemas.openxmlformats.org/officeDocument/2006/relationships" type="rect" r:blip="">
+                        <dgm:adjLst/>
+                      </dgm:shape>
+                      <dgm:presOf axis="self"/>
+                      <dgm:constrLst>
+                        <dgm:constr type="tMarg" refType="primFontSz" fact="0.3"/>
+                        <dgm:constr type="bMarg" refType="primFontSz" fact="0.3"/>
+                        <dgm:constr type="lMarg" refType="primFontSz" fact="0.3"/>
+                        <dgm:constr type="rMarg" refType="primFontSz" fact="0.3"/>
+                      </dgm:constrLst>
+                      <dgm:ruleLst>
+                        <dgm:rule type="primFontSz" val="5" fact="NaN" max="NaN"/>
+                      </dgm:ruleLst>
+                    </dgm:layoutNode>
+                    <dgm:layoutNode name="vert3">
+                      <dgm:choose name="Name30">
+                        <dgm:if name="Name31" func="var" arg="dir" op="equ" val="norm">
+                          <dgm:alg type="lin">
+                            <dgm:param type="linDir" val="fromT"/>
+                            <dgm:param type="nodeHorzAlign" val="l"/>
+                          </dgm:alg>
+                        </dgm:if>
+                        <dgm:else name="Name32">
+                          <dgm:alg type="lin">
+                            <dgm:param type="linDir" val="fromT"/>
+                            <dgm:param type="nodeHorzAlign" val="r"/>
+                          </dgm:alg>
+                        </dgm:else>
+                      </dgm:choose>
+                      <dgm:shape xmlns:r="http://schemas.openxmlformats.org/officeDocument/2006/relationships" r:blip="">
+                        <dgm:adjLst/>
+                      </dgm:shape>
+                      <dgm:presOf/>
+                      <dgm:forEach name="Name33" axis="ch" ptType="node">
+                        <dgm:layoutNode name="horz4">
+                          <dgm:choose name="Name34">
+                            <dgm:if name="Name35" func="var" arg="dir" op="equ" val="norm">
+                              <dgm:alg type="lin">
+                                <dgm:param type="linDir" val="fromL"/>
+                                <dgm:param type="nodeVertAlign" val="t"/>
+                              </dgm:alg>
+                            </dgm:if>
+                            <dgm:else name="Name36">
+                              <dgm:alg type="lin">
+                                <dgm:param type="linDir" val="fromR"/>
+                                <dgm:param type="nodeVertAlign" val="t"/>
+                              </dgm:alg>
+                            </dgm:else>
+                          </dgm:choose>
+                          <dgm:shape xmlns:r="http://schemas.openxmlformats.org/officeDocument/2006/relationships" r:blip="">
+                            <dgm:adjLst/>
+                          </dgm:shape>
+                          <dgm:presOf/>
+                          <dgm:layoutNode name="horzSpace4">
+                            <dgm:alg type="sp"/>
+                            <dgm:shape xmlns:r="http://schemas.openxmlformats.org/officeDocument/2006/relationships" r:blip="">
+                              <dgm:adjLst/>
+                            </dgm:shape>
+                            <dgm:presOf/>
+                          </dgm:layoutNode>
+                          <dgm:layoutNode name="tx4" styleLbl="revTx">
+                            <dgm:varLst>
+                              <dgm:bulletEnabled val="1"/>
+                            </dgm:varLst>
+                            <dgm:alg type="tx">
+                              <dgm:param type="parTxLTRAlign" val="l"/>
+                              <dgm:param type="parTxRTLAlign" val="r"/>
+                              <dgm:param type="txAnchorVert" val="t"/>
+                            </dgm:alg>
+                            <dgm:shape xmlns:r="http://schemas.openxmlformats.org/officeDocument/2006/relationships" type="rect" r:blip="">
+                              <dgm:adjLst/>
+                            </dgm:shape>
+                            <dgm:presOf axis="desOrSelf" ptType="node"/>
+                            <dgm:constrLst>
+                              <dgm:constr type="tMarg" refType="primFontSz" fact="0.3"/>
+                              <dgm:constr type="bMarg" refType="primFontSz" fact="0.3"/>
+                              <dgm:constr type="lMarg" refType="primFontSz" fact="0.3"/>
+                              <dgm:constr type="rMarg" refType="primFontSz" fact="0.3"/>
+                            </dgm:constrLst>
+                            <dgm:ruleLst>
+                              <dgm:rule type="primFontSz" val="5" fact="NaN" max="NaN"/>
+                            </dgm:ruleLst>
+                          </dgm:layoutNode>
+                        </dgm:layoutNode>
+                      </dgm:forEach>
+                    </dgm:layoutNode>
+                  </dgm:layoutNode>
+                  <dgm:forEach name="Name37" axis="followSib" ptType="sibTrans" cnt="1">
+                    <dgm:layoutNode name="thinLine3" styleLbl="callout">
+                      <dgm:alg type="sp"/>
+                      <dgm:shape xmlns:r="http://schemas.openxmlformats.org/officeDocument/2006/relationships" type="line" r:blip="">
+                        <dgm:adjLst/>
+                      </dgm:shape>
+                      <dgm:presOf/>
+                    </dgm:layoutNode>
+                  </dgm:forEach>
+                </dgm:forEach>
+              </dgm:layoutNode>
             </dgm:layoutNode>
-          </dgm:if>
-          <dgm:else name="Name14"/>
-        </dgm:choose>
+            <dgm:layoutNode name="thinLine2b" styleLbl="callout">
+              <dgm:alg type="sp"/>
+              <dgm:shape xmlns:r="http://schemas.openxmlformats.org/officeDocument/2006/relationships" type="line" r:blip="">
+                <dgm:adjLst/>
+              </dgm:shape>
+              <dgm:presOf/>
+            </dgm:layoutNode>
+            <dgm:layoutNode name="vertSpace2b">
+              <dgm:alg type="sp"/>
+              <dgm:shape xmlns:r="http://schemas.openxmlformats.org/officeDocument/2006/relationships" r:blip="">
+                <dgm:adjLst/>
+              </dgm:shape>
+              <dgm:presOf/>
+            </dgm:layoutNode>
+          </dgm:forEach>
+        </dgm:layoutNode>
       </dgm:layoutNode>
-      <dgm:forEach name="Name15" axis="followSib" ptType="sibTrans" cnt="1">
-        <dgm:layoutNode name="sibTrans">
-          <dgm:alg type="sp"/>
-          <dgm:shape xmlns:r="http://schemas.openxmlformats.org/officeDocument/2006/relationships" r:blip="">
-            <dgm:adjLst/>
-          </dgm:shape>
-          <dgm:presOf axis="self"/>
-          <dgm:constrLst/>
-          <dgm:ruleLst/>
-        </dgm:layoutNode>
-      </dgm:forEach>
     </dgm:forEach>
   </dgm:layoutNode>
-  <dgm:extLst>
-    <a:ext uri="{68A01E43-0DF5-4B5B-8FA6-DAF915123BFB}">
-      <dgm1612:lstStyle xmlns:dgm1612="http://schemas.microsoft.com/office/drawing/2016/12/diagram">
-        <a:lvl1pPr>
-          <a:lnSpc>
-            <a:spcPct val="100000"/>
-          </a:lnSpc>
-        </a:lvl1pPr>
-        <a:lvl2pPr>
-          <a:lnSpc>
-            <a:spcPct val="100000"/>
-          </a:lnSpc>
-        </a:lvl2pPr>
-      </dgm1612:lstStyle>
-    </a:ext>
-  </dgm:extLst>
 </dgm:layoutDef>
 </file>
 
@@ -6691,11 +6601,11 @@
 </file>
 
 <file path=ppt/diagrams/quickStyle1.xml><?xml version="1.0" encoding="utf-8"?>
-<dgm:styleDef xmlns:dgm="http://schemas.openxmlformats.org/drawingml/2006/diagram" xmlns:a="http://schemas.openxmlformats.org/drawingml/2006/main" uniqueId="urn:microsoft.com/office/officeart/2005/8/quickstyle/simple1">
+<dgm:styleDef xmlns:dgm="http://schemas.openxmlformats.org/drawingml/2006/diagram" xmlns:a="http://schemas.openxmlformats.org/drawingml/2006/main" uniqueId="urn:microsoft.com/office/officeart/2005/8/quickstyle/simple5">
   <dgm:title val=""/>
   <dgm:desc val=""/>
   <dgm:catLst>
-    <dgm:cat type="simple" pri="10100"/>
+    <dgm:cat type="simple" pri="10500"/>
   </dgm:catLst>
   <dgm:scene3d>
     <a:camera prst="orthographicFront"/>
@@ -6709,13 +6619,13 @@
     <dgm:sp3d/>
     <dgm:txPr/>
     <dgm:style>
-      <a:lnRef idx="2">
+      <a:lnRef idx="0">
         <a:scrgbClr r="0" g="0" b="0"/>
       </a:lnRef>
-      <a:fillRef idx="1">
+      <a:fillRef idx="3">
         <a:scrgbClr r="0" g="0" b="0"/>
       </a:fillRef>
-      <a:effectRef idx="0">
+      <a:effectRef idx="3">
         <a:scrgbClr r="0" g="0" b="0"/>
       </a:effectRef>
       <a:fontRef idx="minor">
@@ -6731,13 +6641,13 @@
     <dgm:sp3d/>
     <dgm:txPr/>
     <dgm:style>
-      <a:lnRef idx="2">
+      <a:lnRef idx="0">
         <a:scrgbClr r="0" g="0" b="0"/>
       </a:lnRef>
-      <a:fillRef idx="1">
+      <a:fillRef idx="3">
         <a:scrgbClr r="0" g="0" b="0"/>
       </a:fillRef>
-      <a:effectRef idx="0">
+      <a:effectRef idx="3">
         <a:scrgbClr r="0" g="0" b="0"/>
       </a:effectRef>
       <a:fontRef idx="minor">
@@ -6753,13 +6663,13 @@
     <dgm:sp3d/>
     <dgm:txPr/>
     <dgm:style>
-      <a:lnRef idx="2">
+      <a:lnRef idx="0">
         <a:scrgbClr r="0" g="0" b="0"/>
       </a:lnRef>
-      <a:fillRef idx="1">
+      <a:fillRef idx="3">
         <a:scrgbClr r="0" g="0" b="0"/>
       </a:fillRef>
-      <a:effectRef idx="0">
+      <a:effectRef idx="3">
         <a:scrgbClr r="0" g="0" b="0"/>
       </a:effectRef>
       <a:fontRef idx="minor">
@@ -6775,13 +6685,13 @@
     <dgm:sp3d/>
     <dgm:txPr/>
     <dgm:style>
-      <a:lnRef idx="2">
+      <a:lnRef idx="1">
         <a:scrgbClr r="0" g="0" b="0"/>
       </a:lnRef>
-      <a:fillRef idx="1">
+      <a:fillRef idx="3">
         <a:scrgbClr r="0" g="0" b="0"/>
       </a:fillRef>
-      <a:effectRef idx="0">
+      <a:effectRef idx="3">
         <a:scrgbClr r="0" g="0" b="0"/>
       </a:effectRef>
       <a:fontRef idx="minor">
@@ -6797,13 +6707,13 @@
     <dgm:sp3d/>
     <dgm:txPr/>
     <dgm:style>
-      <a:lnRef idx="2">
+      <a:lnRef idx="0">
         <a:scrgbClr r="0" g="0" b="0"/>
       </a:lnRef>
-      <a:fillRef idx="1">
+      <a:fillRef idx="3">
         <a:scrgbClr r="0" g="0" b="0"/>
       </a:fillRef>
-      <a:effectRef idx="0">
+      <a:effectRef idx="3">
         <a:scrgbClr r="0" g="0" b="0"/>
       </a:effectRef>
       <a:fontRef idx="minor">
@@ -6819,13 +6729,13 @@
     <dgm:sp3d/>
     <dgm:txPr/>
     <dgm:style>
-      <a:lnRef idx="2">
+      <a:lnRef idx="0">
         <a:scrgbClr r="0" g="0" b="0"/>
       </a:lnRef>
-      <a:fillRef idx="1">
+      <a:fillRef idx="3">
         <a:scrgbClr r="0" g="0" b="0"/>
       </a:fillRef>
-      <a:effectRef idx="0">
+      <a:effectRef idx="3">
         <a:scrgbClr r="0" g="0" b="0"/>
       </a:effectRef>
       <a:fontRef idx="minor">
@@ -6841,13 +6751,13 @@
     <dgm:sp3d/>
     <dgm:txPr/>
     <dgm:style>
-      <a:lnRef idx="2">
+      <a:lnRef idx="0">
         <a:scrgbClr r="0" g="0" b="0"/>
       </a:lnRef>
-      <a:fillRef idx="1">
+      <a:fillRef idx="3">
         <a:scrgbClr r="0" g="0" b="0"/>
       </a:fillRef>
-      <a:effectRef idx="0">
+      <a:effectRef idx="3">
         <a:scrgbClr r="0" g="0" b="0"/>
       </a:effectRef>
       <a:fontRef idx="minor">
@@ -6863,13 +6773,13 @@
     <dgm:sp3d/>
     <dgm:txPr/>
     <dgm:style>
-      <a:lnRef idx="2">
+      <a:lnRef idx="0">
         <a:scrgbClr r="0" g="0" b="0"/>
       </a:lnRef>
-      <a:fillRef idx="1">
+      <a:fillRef idx="3">
         <a:scrgbClr r="0" g="0" b="0"/>
       </a:fillRef>
-      <a:effectRef idx="0">
+      <a:effectRef idx="3">
         <a:scrgbClr r="0" g="0" b="0"/>
       </a:effectRef>
       <a:fontRef idx="minor">
@@ -6885,13 +6795,13 @@
     <dgm:sp3d/>
     <dgm:txPr/>
     <dgm:style>
-      <a:lnRef idx="2">
+      <a:lnRef idx="0">
         <a:scrgbClr r="0" g="0" b="0"/>
       </a:lnRef>
       <a:fillRef idx="1">
         <a:scrgbClr r="0" g="0" b="0"/>
       </a:fillRef>
-      <a:effectRef idx="0">
+      <a:effectRef idx="3">
         <a:scrgbClr r="0" g="0" b="0"/>
       </a:effectRef>
       <a:fontRef idx="minor"/>
@@ -6905,13 +6815,13 @@
     <dgm:sp3d/>
     <dgm:txPr/>
     <dgm:style>
-      <a:lnRef idx="2">
+      <a:lnRef idx="0">
         <a:scrgbClr r="0" g="0" b="0"/>
       </a:lnRef>
       <a:fillRef idx="1">
         <a:scrgbClr r="0" g="0" b="0"/>
       </a:fillRef>
-      <a:effectRef idx="0">
+      <a:effectRef idx="3">
         <a:scrgbClr r="0" g="0" b="0"/>
       </a:effectRef>
       <a:fontRef idx="minor"/>
@@ -6925,13 +6835,13 @@
     <dgm:sp3d/>
     <dgm:txPr/>
     <dgm:style>
-      <a:lnRef idx="2">
+      <a:lnRef idx="0">
         <a:scrgbClr r="0" g="0" b="0"/>
       </a:lnRef>
       <a:fillRef idx="1">
         <a:scrgbClr r="0" g="0" b="0"/>
       </a:fillRef>
-      <a:effectRef idx="0">
+      <a:effectRef idx="3">
         <a:scrgbClr r="0" g="0" b="0"/>
       </a:effectRef>
       <a:fontRef idx="minor"/>
@@ -6948,10 +6858,10 @@
       <a:lnRef idx="0">
         <a:scrgbClr r="0" g="0" b="0"/>
       </a:lnRef>
-      <a:fillRef idx="1">
+      <a:fillRef idx="3">
         <a:scrgbClr r="0" g="0" b="0"/>
       </a:fillRef>
-      <a:effectRef idx="0">
+      <a:effectRef idx="3">
         <a:scrgbClr r="0" g="0" b="0"/>
       </a:effectRef>
       <a:fontRef idx="minor">
@@ -6970,10 +6880,10 @@
       <a:lnRef idx="0">
         <a:scrgbClr r="0" g="0" b="0"/>
       </a:lnRef>
-      <a:fillRef idx="1">
+      <a:fillRef idx="3">
         <a:scrgbClr r="0" g="0" b="0"/>
       </a:fillRef>
-      <a:effectRef idx="0">
+      <a:effectRef idx="3">
         <a:scrgbClr r="0" g="0" b="0"/>
       </a:effectRef>
       <a:fontRef idx="minor">
@@ -6992,10 +6902,10 @@
       <a:lnRef idx="0">
         <a:scrgbClr r="0" g="0" b="0"/>
       </a:lnRef>
-      <a:fillRef idx="1">
+      <a:fillRef idx="3">
         <a:scrgbClr r="0" g="0" b="0"/>
       </a:fillRef>
-      <a:effectRef idx="0">
+      <a:effectRef idx="3">
         <a:scrgbClr r="0" g="0" b="0"/>
       </a:effectRef>
       <a:fontRef idx="minor">
@@ -7031,13 +6941,13 @@
     <dgm:sp3d/>
     <dgm:txPr/>
     <dgm:style>
-      <a:lnRef idx="2">
+      <a:lnRef idx="1">
         <a:scrgbClr r="0" g="0" b="0"/>
       </a:lnRef>
-      <a:fillRef idx="1">
+      <a:fillRef idx="0">
         <a:scrgbClr r="0" g="0" b="0"/>
       </a:fillRef>
-      <a:effectRef idx="0">
+      <a:effectRef idx="1">
         <a:scrgbClr r="0" g="0" b="0"/>
       </a:effectRef>
       <a:fontRef idx="minor"/>
@@ -7051,13 +6961,13 @@
     <dgm:sp3d/>
     <dgm:txPr/>
     <dgm:style>
-      <a:lnRef idx="2">
+      <a:lnRef idx="0">
         <a:scrgbClr r="0" g="0" b="0"/>
       </a:lnRef>
-      <a:fillRef idx="1">
+      <a:fillRef idx="3">
         <a:scrgbClr r="0" g="0" b="0"/>
       </a:fillRef>
-      <a:effectRef idx="0">
+      <a:effectRef idx="3">
         <a:scrgbClr r="0" g="0" b="0"/>
       </a:effectRef>
       <a:fontRef idx="minor">
@@ -7073,13 +6983,13 @@
     <dgm:sp3d/>
     <dgm:txPr/>
     <dgm:style>
-      <a:lnRef idx="2">
+      <a:lnRef idx="0">
         <a:scrgbClr r="0" g="0" b="0"/>
       </a:lnRef>
-      <a:fillRef idx="1">
+      <a:fillRef idx="3">
         <a:scrgbClr r="0" g="0" b="0"/>
       </a:fillRef>
-      <a:effectRef idx="0">
+      <a:effectRef idx="3">
         <a:scrgbClr r="0" g="0" b="0"/>
       </a:effectRef>
       <a:fontRef idx="minor">
@@ -7095,13 +7005,13 @@
     <dgm:sp3d/>
     <dgm:txPr/>
     <dgm:style>
-      <a:lnRef idx="2">
+      <a:lnRef idx="0">
         <a:scrgbClr r="0" g="0" b="0"/>
       </a:lnRef>
-      <a:fillRef idx="1">
+      <a:fillRef idx="3">
         <a:scrgbClr r="0" g="0" b="0"/>
       </a:fillRef>
-      <a:effectRef idx="0">
+      <a:effectRef idx="3">
         <a:scrgbClr r="0" g="0" b="0"/>
       </a:effectRef>
       <a:fontRef idx="minor">
@@ -7117,13 +7027,13 @@
     <dgm:sp3d/>
     <dgm:txPr/>
     <dgm:style>
-      <a:lnRef idx="2">
+      <a:lnRef idx="0">
         <a:scrgbClr r="0" g="0" b="0"/>
       </a:lnRef>
-      <a:fillRef idx="1">
+      <a:fillRef idx="3">
         <a:scrgbClr r="0" g="0" b="0"/>
       </a:fillRef>
-      <a:effectRef idx="0">
+      <a:effectRef idx="3">
         <a:scrgbClr r="0" g="0" b="0"/>
       </a:effectRef>
       <a:fontRef idx="minor">
@@ -7139,13 +7049,13 @@
     <dgm:sp3d/>
     <dgm:txPr/>
     <dgm:style>
-      <a:lnRef idx="2">
+      <a:lnRef idx="0">
         <a:scrgbClr r="0" g="0" b="0"/>
       </a:lnRef>
-      <a:fillRef idx="1">
+      <a:fillRef idx="3">
         <a:scrgbClr r="0" g="0" b="0"/>
       </a:fillRef>
-      <a:effectRef idx="0">
+      <a:effectRef idx="3">
         <a:scrgbClr r="0" g="0" b="0"/>
       </a:effectRef>
       <a:fontRef idx="minor">
@@ -7161,13 +7071,13 @@
     <dgm:sp3d/>
     <dgm:txPr/>
     <dgm:style>
-      <a:lnRef idx="2">
+      <a:lnRef idx="0">
         <a:scrgbClr r="0" g="0" b="0"/>
       </a:lnRef>
-      <a:fillRef idx="1">
+      <a:fillRef idx="3">
         <a:scrgbClr r="0" g="0" b="0"/>
       </a:fillRef>
-      <a:effectRef idx="0">
+      <a:effectRef idx="3">
         <a:scrgbClr r="0" g="0" b="0"/>
       </a:effectRef>
       <a:fontRef idx="minor">
@@ -7183,13 +7093,13 @@
     <dgm:sp3d/>
     <dgm:txPr/>
     <dgm:style>
-      <a:lnRef idx="2">
+      <a:lnRef idx="0">
         <a:scrgbClr r="0" g="0" b="0"/>
       </a:lnRef>
-      <a:fillRef idx="1">
+      <a:fillRef idx="3">
         <a:scrgbClr r="0" g="0" b="0"/>
       </a:fillRef>
-      <a:effectRef idx="0">
+      <a:effectRef idx="3">
         <a:scrgbClr r="0" g="0" b="0"/>
       </a:effectRef>
       <a:fontRef idx="minor">
@@ -7205,13 +7115,13 @@
     <dgm:sp3d/>
     <dgm:txPr/>
     <dgm:style>
-      <a:lnRef idx="2">
+      <a:lnRef idx="0">
         <a:scrgbClr r="0" g="0" b="0"/>
       </a:lnRef>
-      <a:fillRef idx="1">
+      <a:fillRef idx="3">
         <a:scrgbClr r="0" g="0" b="0"/>
       </a:fillRef>
-      <a:effectRef idx="0">
+      <a:effectRef idx="3">
         <a:scrgbClr r="0" g="0" b="0"/>
       </a:effectRef>
       <a:fontRef idx="minor">
@@ -7227,13 +7137,13 @@
     <dgm:sp3d/>
     <dgm:txPr/>
     <dgm:style>
-      <a:lnRef idx="2">
+      <a:lnRef idx="0">
         <a:scrgbClr r="0" g="0" b="0"/>
       </a:lnRef>
-      <a:fillRef idx="1">
+      <a:fillRef idx="3">
         <a:scrgbClr r="0" g="0" b="0"/>
       </a:fillRef>
-      <a:effectRef idx="0">
+      <a:effectRef idx="3">
         <a:scrgbClr r="0" g="0" b="0"/>
       </a:effectRef>
       <a:fontRef idx="minor">
@@ -7329,13 +7239,13 @@
     <dgm:sp3d/>
     <dgm:txPr/>
     <dgm:style>
-      <a:lnRef idx="2">
+      <a:lnRef idx="1">
         <a:scrgbClr r="0" g="0" b="0"/>
       </a:lnRef>
       <a:fillRef idx="1">
         <a:scrgbClr r="0" g="0" b="0"/>
       </a:fillRef>
-      <a:effectRef idx="0">
+      <a:effectRef idx="2">
         <a:scrgbClr r="0" g="0" b="0"/>
       </a:effectRef>
       <a:fontRef idx="minor"/>
@@ -7349,13 +7259,13 @@
     <dgm:sp3d/>
     <dgm:txPr/>
     <dgm:style>
-      <a:lnRef idx="2">
+      <a:lnRef idx="1">
         <a:scrgbClr r="0" g="0" b="0"/>
       </a:lnRef>
       <a:fillRef idx="1">
         <a:scrgbClr r="0" g="0" b="0"/>
       </a:fillRef>
-      <a:effectRef idx="0">
+      <a:effectRef idx="2">
         <a:scrgbClr r="0" g="0" b="0"/>
       </a:effectRef>
       <a:fontRef idx="minor"/>
@@ -7369,13 +7279,13 @@
     <dgm:sp3d/>
     <dgm:txPr/>
     <dgm:style>
-      <a:lnRef idx="2">
+      <a:lnRef idx="1">
         <a:scrgbClr r="0" g="0" b="0"/>
       </a:lnRef>
       <a:fillRef idx="1">
         <a:scrgbClr r="0" g="0" b="0"/>
       </a:fillRef>
-      <a:effectRef idx="0">
+      <a:effectRef idx="2">
         <a:scrgbClr r="0" g="0" b="0"/>
       </a:effectRef>
       <a:fontRef idx="minor"/>
@@ -7409,13 +7319,13 @@
     <dgm:sp3d/>
     <dgm:txPr/>
     <dgm:style>
-      <a:lnRef idx="2">
+      <a:lnRef idx="1">
         <a:scrgbClr r="0" g="0" b="0"/>
       </a:lnRef>
       <a:fillRef idx="1">
         <a:scrgbClr r="0" g="0" b="0"/>
       </a:fillRef>
-      <a:effectRef idx="0">
+      <a:effectRef idx="2">
         <a:scrgbClr r="0" g="0" b="0"/>
       </a:effectRef>
       <a:fontRef idx="minor"/>
@@ -7429,13 +7339,13 @@
     <dgm:sp3d/>
     <dgm:txPr/>
     <dgm:style>
-      <a:lnRef idx="2">
+      <a:lnRef idx="1">
         <a:scrgbClr r="0" g="0" b="0"/>
       </a:lnRef>
       <a:fillRef idx="1">
         <a:scrgbClr r="0" g="0" b="0"/>
       </a:fillRef>
-      <a:effectRef idx="0">
+      <a:effectRef idx="2">
         <a:scrgbClr r="0" g="0" b="0"/>
       </a:effectRef>
       <a:fontRef idx="minor"/>
@@ -7449,13 +7359,13 @@
     <dgm:sp3d/>
     <dgm:txPr/>
     <dgm:style>
-      <a:lnRef idx="2">
+      <a:lnRef idx="1">
         <a:scrgbClr r="0" g="0" b="0"/>
       </a:lnRef>
       <a:fillRef idx="1">
         <a:scrgbClr r="0" g="0" b="0"/>
       </a:fillRef>
-      <a:effectRef idx="0">
+      <a:effectRef idx="3">
         <a:scrgbClr r="0" g="0" b="0"/>
       </a:effectRef>
       <a:fontRef idx="minor"/>
@@ -7469,13 +7379,13 @@
     <dgm:sp3d/>
     <dgm:txPr/>
     <dgm:style>
-      <a:lnRef idx="2">
+      <a:lnRef idx="1">
         <a:scrgbClr r="0" g="0" b="0"/>
       </a:lnRef>
       <a:fillRef idx="1">
         <a:scrgbClr r="0" g="0" b="0"/>
       </a:fillRef>
-      <a:effectRef idx="0">
+      <a:effectRef idx="3">
         <a:scrgbClr r="0" g="0" b="0"/>
       </a:effectRef>
       <a:fontRef idx="minor"/>
@@ -7489,13 +7399,13 @@
     <dgm:sp3d/>
     <dgm:txPr/>
     <dgm:style>
-      <a:lnRef idx="2">
+      <a:lnRef idx="1">
         <a:scrgbClr r="0" g="0" b="0"/>
       </a:lnRef>
       <a:fillRef idx="1">
         <a:scrgbClr r="0" g="0" b="0"/>
       </a:fillRef>
-      <a:effectRef idx="0">
+      <a:effectRef idx="2">
         <a:scrgbClr r="0" g="0" b="0"/>
       </a:effectRef>
       <a:fontRef idx="minor"/>
@@ -7509,13 +7419,13 @@
     <dgm:sp3d/>
     <dgm:txPr/>
     <dgm:style>
-      <a:lnRef idx="2">
+      <a:lnRef idx="1">
         <a:scrgbClr r="0" g="0" b="0"/>
       </a:lnRef>
       <a:fillRef idx="1">
         <a:scrgbClr r="0" g="0" b="0"/>
       </a:fillRef>
-      <a:effectRef idx="0">
+      <a:effectRef idx="2">
         <a:scrgbClr r="0" g="0" b="0"/>
       </a:effectRef>
       <a:fontRef idx="minor"/>
@@ -7529,13 +7439,13 @@
     <dgm:sp3d/>
     <dgm:txPr/>
     <dgm:style>
-      <a:lnRef idx="2">
+      <a:lnRef idx="1">
         <a:scrgbClr r="0" g="0" b="0"/>
       </a:lnRef>
       <a:fillRef idx="1">
         <a:scrgbClr r="0" g="0" b="0"/>
       </a:fillRef>
-      <a:effectRef idx="0">
+      <a:effectRef idx="2">
         <a:scrgbClr r="0" g="0" b="0"/>
       </a:effectRef>
       <a:fontRef idx="minor"/>
@@ -7549,13 +7459,13 @@
     <dgm:sp3d/>
     <dgm:txPr/>
     <dgm:style>
-      <a:lnRef idx="2">
+      <a:lnRef idx="1">
         <a:scrgbClr r="0" g="0" b="0"/>
       </a:lnRef>
       <a:fillRef idx="1">
         <a:scrgbClr r="0" g="0" b="0"/>
       </a:fillRef>
-      <a:effectRef idx="0">
+      <a:effectRef idx="2">
         <a:scrgbClr r="0" g="0" b="0"/>
       </a:effectRef>
       <a:fontRef idx="minor"/>
@@ -7569,13 +7479,13 @@
     <dgm:sp3d/>
     <dgm:txPr/>
     <dgm:style>
-      <a:lnRef idx="2">
+      <a:lnRef idx="1">
         <a:scrgbClr r="0" g="0" b="0"/>
       </a:lnRef>
       <a:fillRef idx="1">
         <a:scrgbClr r="0" g="0" b="0"/>
       </a:fillRef>
-      <a:effectRef idx="0">
+      <a:effectRef idx="2">
         <a:scrgbClr r="0" g="0" b="0"/>
       </a:effectRef>
       <a:fontRef idx="minor"/>
@@ -7589,13 +7499,13 @@
     <dgm:sp3d/>
     <dgm:txPr/>
     <dgm:style>
-      <a:lnRef idx="2">
+      <a:lnRef idx="1">
         <a:scrgbClr r="0" g="0" b="0"/>
       </a:lnRef>
       <a:fillRef idx="1">
         <a:scrgbClr r="0" g="0" b="0"/>
       </a:fillRef>
-      <a:effectRef idx="0">
+      <a:effectRef idx="2">
         <a:scrgbClr r="0" g="0" b="0"/>
       </a:effectRef>
       <a:fontRef idx="minor"/>
@@ -7609,13 +7519,13 @@
     <dgm:sp3d/>
     <dgm:txPr/>
     <dgm:style>
-      <a:lnRef idx="2">
+      <a:lnRef idx="1">
         <a:scrgbClr r="0" g="0" b="0"/>
       </a:lnRef>
       <a:fillRef idx="1">
         <a:scrgbClr r="0" g="0" b="0"/>
       </a:fillRef>
-      <a:effectRef idx="0">
+      <a:effectRef idx="2">
         <a:scrgbClr r="0" g="0" b="0"/>
       </a:effectRef>
       <a:fontRef idx="minor"/>
@@ -7635,7 +7545,7 @@
       <a:fillRef idx="1">
         <a:scrgbClr r="0" g="0" b="0"/>
       </a:fillRef>
-      <a:effectRef idx="0">
+      <a:effectRef idx="2">
         <a:scrgbClr r="0" g="0" b="0"/>
       </a:effectRef>
       <a:fontRef idx="minor"/>
@@ -7655,7 +7565,7 @@
       <a:fillRef idx="1">
         <a:scrgbClr r="0" g="0" b="0"/>
       </a:fillRef>
-      <a:effectRef idx="0">
+      <a:effectRef idx="3">
         <a:scrgbClr r="0" g="0" b="0"/>
       </a:effectRef>
       <a:fontRef idx="minor"/>
@@ -7689,13 +7599,13 @@
     <dgm:sp3d/>
     <dgm:txPr/>
     <dgm:style>
-      <a:lnRef idx="2">
+      <a:lnRef idx="0">
         <a:scrgbClr r="0" g="0" b="0"/>
       </a:lnRef>
-      <a:fillRef idx="1">
+      <a:fillRef idx="3">
         <a:scrgbClr r="0" g="0" b="0"/>
       </a:fillRef>
-      <a:effectRef idx="0">
+      <a:effectRef idx="3">
         <a:scrgbClr r="0" g="0" b="0"/>
       </a:effectRef>
       <a:fontRef idx="minor"/>
@@ -9874,7 +9784,7 @@
           <a:p>
             <a:fld id="{B1B34F05-D79E-4EE1-89E1-911ABC7E7861}" type="datetimeFigureOut">
               <a:rPr lang="es-MX" smtClean="0"/>
-              <a:t>19/07/2025</a:t>
+              <a:t>24/07/2025</a:t>
             </a:fld>
             <a:endParaRPr lang="es-MX"/>
           </a:p>
@@ -10995,7 +10905,7 @@
           <a:p>
             <a:fld id="{E80C50CD-E178-4744-9B35-B2F624D6C5E9}" type="datetimeFigureOut">
               <a:rPr lang="en-US" smtClean="0"/>
-              <a:t>7/19/2025</a:t>
+              <a:t>7/24/2025</a:t>
             </a:fld>
             <a:endParaRPr lang="en-US"/>
           </a:p>
@@ -11193,7 +11103,7 @@
           <a:p>
             <a:fld id="{E80C50CD-E178-4744-9B35-B2F624D6C5E9}" type="datetimeFigureOut">
               <a:rPr lang="en-US" smtClean="0"/>
-              <a:t>7/19/2025</a:t>
+              <a:t>7/24/2025</a:t>
             </a:fld>
             <a:endParaRPr lang="en-US"/>
           </a:p>
@@ -11401,7 +11311,7 @@
           <a:p>
             <a:fld id="{E80C50CD-E178-4744-9B35-B2F624D6C5E9}" type="datetimeFigureOut">
               <a:rPr lang="en-US" smtClean="0"/>
-              <a:t>7/19/2025</a:t>
+              <a:t>7/24/2025</a:t>
             </a:fld>
             <a:endParaRPr lang="en-US"/>
           </a:p>
@@ -11651,7 +11561,7 @@
           <a:p>
             <a:fld id="{E80C50CD-E178-4744-9B35-B2F624D6C5E9}" type="datetimeFigureOut">
               <a:rPr lang="en-US" smtClean="0"/>
-              <a:t>7/19/2025</a:t>
+              <a:t>7/24/2025</a:t>
             </a:fld>
             <a:endParaRPr lang="en-US"/>
           </a:p>
@@ -11930,7 +11840,7 @@
           <a:p>
             <a:fld id="{E80C50CD-E178-4744-9B35-B2F624D6C5E9}" type="datetimeFigureOut">
               <a:rPr lang="en-US" smtClean="0"/>
-              <a:t>7/19/2025</a:t>
+              <a:t>7/24/2025</a:t>
             </a:fld>
             <a:endParaRPr lang="en-US"/>
           </a:p>
@@ -12247,7 +12157,7 @@
           <a:p>
             <a:fld id="{E80C50CD-E178-4744-9B35-B2F624D6C5E9}" type="datetimeFigureOut">
               <a:rPr lang="en-US" smtClean="0"/>
-              <a:t>7/19/2025</a:t>
+              <a:t>7/24/2025</a:t>
             </a:fld>
             <a:endParaRPr lang="en-US"/>
           </a:p>
@@ -12663,7 +12573,7 @@
           <a:p>
             <a:fld id="{E80C50CD-E178-4744-9B35-B2F624D6C5E9}" type="datetimeFigureOut">
               <a:rPr lang="en-US" smtClean="0"/>
-              <a:t>7/19/2025</a:t>
+              <a:t>7/24/2025</a:t>
             </a:fld>
             <a:endParaRPr lang="en-US"/>
           </a:p>
@@ -12804,7 +12714,7 @@
           <a:p>
             <a:fld id="{E80C50CD-E178-4744-9B35-B2F624D6C5E9}" type="datetimeFigureOut">
               <a:rPr lang="en-US" smtClean="0"/>
-              <a:t>7/19/2025</a:t>
+              <a:t>7/24/2025</a:t>
             </a:fld>
             <a:endParaRPr lang="en-US"/>
           </a:p>
@@ -12917,7 +12827,7 @@
           <a:p>
             <a:fld id="{E80C50CD-E178-4744-9B35-B2F624D6C5E9}" type="datetimeFigureOut">
               <a:rPr lang="en-US" smtClean="0"/>
-              <a:t>7/19/2025</a:t>
+              <a:t>7/24/2025</a:t>
             </a:fld>
             <a:endParaRPr lang="en-US"/>
           </a:p>
@@ -13234,7 +13144,7 @@
           <a:p>
             <a:fld id="{E80C50CD-E178-4744-9B35-B2F624D6C5E9}" type="datetimeFigureOut">
               <a:rPr lang="en-US" smtClean="0"/>
-              <a:t>7/19/2025</a:t>
+              <a:t>7/24/2025</a:t>
             </a:fld>
             <a:endParaRPr lang="en-US"/>
           </a:p>
@@ -13526,7 +13436,7 @@
           <a:p>
             <a:fld id="{E80C50CD-E178-4744-9B35-B2F624D6C5E9}" type="datetimeFigureOut">
               <a:rPr lang="en-US" smtClean="0"/>
-              <a:t>7/19/2025</a:t>
+              <a:t>7/24/2025</a:t>
             </a:fld>
             <a:endParaRPr lang="en-US"/>
           </a:p>
@@ -13766,7 +13676,7 @@
             <a:fld id="{E80C50CD-E178-4744-9B35-B2F624D6C5E9}" type="datetimeFigureOut">
               <a:rPr lang="en-US" smtClean="0"/>
               <a:pPr/>
-              <a:t>7/19/2025</a:t>
+              <a:t>7/24/2025</a:t>
             </a:fld>
             <a:endParaRPr lang="en-US"/>
           </a:p>
@@ -14491,6 +14401,23 @@
               </a:solidFill>
             </a:endParaRPr>
           </a:p>
+          <a:p>
+            <a:endParaRPr lang="es-MX" sz="2400" dirty="0">
+              <a:solidFill>
+                <a:srgbClr val="FFFFFF"/>
+              </a:solidFill>
+            </a:endParaRPr>
+          </a:p>
+          <a:p>
+            <a:r>
+              <a:rPr lang="es-MX" sz="2400" dirty="0">
+                <a:solidFill>
+                  <a:srgbClr val="FFFFFF"/>
+                </a:solidFill>
+              </a:rPr>
+              <a:t>Julio Cesar Ramiro Mayorga 1842201</a:t>
+            </a:r>
+          </a:p>
         </p:txBody>
       </p:sp>
       <p:sp>
@@ -14596,10 +14523,10 @@
       </p:grpSpPr>
       <p:sp useBgFill="1">
         <p:nvSpPr>
-          <p:cNvPr id="16" name="Rectangle 15">
+          <p:cNvPr id="3081" name="Rectangle 3080">
             <a:extLst>
               <a:ext uri="{FF2B5EF4-FFF2-40B4-BE49-F238E27FC236}">
-                <a16:creationId xmlns:a16="http://schemas.microsoft.com/office/drawing/2014/main" id="{4E17AA97-89A7-45C1-B813-BFF6C23D79E1}"/>
+                <a16:creationId xmlns:a16="http://schemas.microsoft.com/office/drawing/2014/main" id="{34C0330F-1D4F-4552-B799-615DD237B6DE}"/>
               </a:ext>
               <a:ext uri="{C183D7F6-B498-43B3-948B-1728B52AA6E4}">
                 <adec:decorative xmlns:adec="http://schemas.microsoft.com/office/drawing/2017/decorative" val="1"/>
@@ -14673,7 +14600,7 @@
         <p:spPr>
           <a:xfrm>
             <a:off x="521208" y="978408"/>
-            <a:ext cx="4032504" cy="3364992"/>
+            <a:ext cx="6300216" cy="1463040"/>
           </a:xfrm>
         </p:spPr>
         <p:txBody>
@@ -14691,10 +14618,10 @@
       </p:sp>
       <p:sp>
         <p:nvSpPr>
-          <p:cNvPr id="18" name="Rectangle 17">
+          <p:cNvPr id="3083" name="Rectangle 3082">
             <a:extLst>
               <a:ext uri="{FF2B5EF4-FFF2-40B4-BE49-F238E27FC236}">
-                <a16:creationId xmlns:a16="http://schemas.microsoft.com/office/drawing/2014/main" id="{33AC4FE1-D370-43A6-96C5-076716BB1E76}"/>
+                <a16:creationId xmlns:a16="http://schemas.microsoft.com/office/drawing/2014/main" id="{92BE0106-0C20-465B-A1BE-0BAC2737B1AD}"/>
               </a:ext>
               <a:ext uri="{C183D7F6-B498-43B3-948B-1728B52AA6E4}">
                 <adec:decorative xmlns:adec="http://schemas.microsoft.com/office/drawing/2017/decorative" val="1"/>
@@ -14714,8 +14641,8 @@
         </p:nvSpPr>
         <p:spPr>
           <a:xfrm>
-            <a:off x="517870" y="508090"/>
-            <a:ext cx="4032504" cy="149279"/>
+            <a:off x="517869" y="508090"/>
+            <a:ext cx="6281928" cy="149279"/>
           </a:xfrm>
           <a:prstGeom prst="rect">
             <a:avLst/>
@@ -14752,106 +14679,12 @@
           </a:p>
         </p:txBody>
       </p:sp>
-      <p:sp>
-        <p:nvSpPr>
-          <p:cNvPr id="20" name="Rectangle 19">
+      <p:pic>
+        <p:nvPicPr>
+          <p:cNvPr id="3076" name="Picture 4" descr="Databricks">
             <a:extLst>
               <a:ext uri="{FF2B5EF4-FFF2-40B4-BE49-F238E27FC236}">
-                <a16:creationId xmlns:a16="http://schemas.microsoft.com/office/drawing/2014/main" id="{4A3D569D-D3A6-49CA-A483-291E95DACA14}"/>
-              </a:ext>
-              <a:ext uri="{C183D7F6-B498-43B3-948B-1728B52AA6E4}">
-                <adec:decorative xmlns:adec="http://schemas.microsoft.com/office/drawing/2017/decorative" val="1"/>
-              </a:ext>
-            </a:extLst>
-          </p:cNvPr>
-          <p:cNvSpPr>
-            <a:spLocks noGrp="1" noRot="1" noChangeAspect="1" noMove="1" noResize="1" noEditPoints="1" noAdjustHandles="1" noChangeArrowheads="1" noChangeShapeType="1" noTextEdit="1"/>
-          </p:cNvSpPr>
-          <p:nvPr>
-            <p:extLst>
-              <p:ext uri="{386F3935-93C4-4BCD-93E2-E3B085C9AB24}">
-                <p16:designElem xmlns:p16="http://schemas.microsoft.com/office/powerpoint/2015/main" val="1"/>
-              </p:ext>
-            </p:extLst>
-          </p:nvPr>
-        </p:nvSpPr>
-        <p:spPr>
-          <a:xfrm>
-            <a:off x="5065776" y="611650"/>
-            <a:ext cx="6620256" cy="45719"/>
-          </a:xfrm>
-          <a:prstGeom prst="rect">
-            <a:avLst/>
-          </a:prstGeom>
-          <a:solidFill>
-            <a:schemeClr val="tx1"/>
-          </a:solidFill>
-          <a:ln>
-            <a:noFill/>
-          </a:ln>
-        </p:spPr>
-        <p:style>
-          <a:lnRef idx="2">
-            <a:schemeClr val="accent1">
-              <a:shade val="50000"/>
-            </a:schemeClr>
-          </a:lnRef>
-          <a:fillRef idx="1">
-            <a:schemeClr val="accent1"/>
-          </a:fillRef>
-          <a:effectRef idx="0">
-            <a:schemeClr val="accent1"/>
-          </a:effectRef>
-          <a:fontRef idx="minor">
-            <a:schemeClr val="lt1"/>
-          </a:fontRef>
-        </p:style>
-        <p:txBody>
-          <a:bodyPr rtlCol="0" anchor="ctr"/>
-          <a:lstStyle/>
-          <a:p>
-            <a:pPr algn="ctr"/>
-            <a:endParaRPr lang="en-US"/>
-          </a:p>
-        </p:txBody>
-      </p:sp>
-      <p:graphicFrame>
-        <p:nvGraphicFramePr>
-          <p:cNvPr id="12" name="Marcador de contenido 2">
-            <a:extLst>
-              <a:ext uri="{FF2B5EF4-FFF2-40B4-BE49-F238E27FC236}">
-                <a16:creationId xmlns:a16="http://schemas.microsoft.com/office/drawing/2014/main" id="{217C6D2A-06D0-5D08-2F0C-7E9CB5E39EE5}"/>
-              </a:ext>
-            </a:extLst>
-          </p:cNvPr>
-          <p:cNvGraphicFramePr>
-            <a:graphicFrameLocks noGrp="1"/>
-          </p:cNvGraphicFramePr>
-          <p:nvPr>
-            <p:ph idx="1"/>
-            <p:extLst>
-              <p:ext uri="{D42A27DB-BD31-4B8C-83A1-F6EECF244321}">
-                <p14:modId xmlns:p14="http://schemas.microsoft.com/office/powerpoint/2010/main" val="1059703439"/>
-              </p:ext>
-            </p:extLst>
-          </p:nvPr>
-        </p:nvGraphicFramePr>
-        <p:xfrm>
-          <a:off x="5065776" y="978408"/>
-          <a:ext cx="6620256" cy="5376672"/>
-        </p:xfrm>
-        <a:graphic>
-          <a:graphicData uri="http://schemas.openxmlformats.org/drawingml/2006/diagram">
-            <dgm:relIds xmlns:dgm="http://schemas.openxmlformats.org/drawingml/2006/diagram" xmlns:r="http://schemas.openxmlformats.org/officeDocument/2006/relationships" r:dm="rId2" r:lo="rId3" r:qs="rId4" r:cs="rId5"/>
-          </a:graphicData>
-        </a:graphic>
-      </p:graphicFrame>
-      <p:pic>
-        <p:nvPicPr>
-          <p:cNvPr id="3074" name="Picture 2" descr="Herramienta: PySpark - Tekne">
-            <a:extLst>
-              <a:ext uri="{FF2B5EF4-FFF2-40B4-BE49-F238E27FC236}">
-                <a16:creationId xmlns:a16="http://schemas.microsoft.com/office/drawing/2014/main" id="{D92EB7C5-A445-BE67-A59A-68D546F4F3AC}"/>
+                <a16:creationId xmlns:a16="http://schemas.microsoft.com/office/drawing/2014/main" id="{DF9C471D-C6BC-8A48-2896-F7B9EAF68275}"/>
               </a:ext>
             </a:extLst>
           </p:cNvPr>
@@ -14861,22 +14694,21 @@
           <p:nvPr/>
         </p:nvPicPr>
         <p:blipFill>
-          <a:blip r:embed="rId7">
+          <a:blip r:embed="rId2">
             <a:extLst>
               <a:ext uri="{28A0092B-C50C-407E-A947-70E740481C1C}">
                 <a14:useLocalDpi xmlns:a14="http://schemas.microsoft.com/office/drawing/2010/main" val="0"/>
               </a:ext>
             </a:extLst>
           </a:blip>
-          <a:srcRect/>
           <a:stretch>
             <a:fillRect/>
           </a:stretch>
         </p:blipFill>
         <p:spPr bwMode="auto">
           <a:xfrm>
-            <a:off x="848197" y="1853565"/>
-            <a:ext cx="3371850" cy="1352550"/>
+            <a:off x="7908166" y="512064"/>
+            <a:ext cx="3505518" cy="2807208"/>
           </a:xfrm>
           <a:prstGeom prst="rect">
             <a:avLst/>
@@ -14895,10 +14727,10 @@
       </p:pic>
       <p:pic>
         <p:nvPicPr>
-          <p:cNvPr id="3076" name="Picture 4" descr="Databricks">
+          <p:cNvPr id="3074" name="Picture 2" descr="Herramienta: PySpark - Tekne">
             <a:extLst>
               <a:ext uri="{FF2B5EF4-FFF2-40B4-BE49-F238E27FC236}">
-                <a16:creationId xmlns:a16="http://schemas.microsoft.com/office/drawing/2014/main" id="{DF9C471D-C6BC-8A48-2896-F7B9EAF68275}"/>
+                <a16:creationId xmlns:a16="http://schemas.microsoft.com/office/drawing/2014/main" id="{D92EB7C5-A445-BE67-A59A-68D546F4F3AC}"/>
               </a:ext>
             </a:extLst>
           </p:cNvPr>
@@ -14908,22 +14740,21 @@
           <p:nvPr/>
         </p:nvPicPr>
         <p:blipFill>
-          <a:blip r:embed="rId8">
+          <a:blip r:embed="rId3">
             <a:extLst>
               <a:ext uri="{28A0092B-C50C-407E-A947-70E740481C1C}">
                 <a14:useLocalDpi xmlns:a14="http://schemas.microsoft.com/office/drawing/2010/main" val="0"/>
               </a:ext>
             </a:extLst>
           </a:blip>
-          <a:srcRect/>
           <a:stretch>
             <a:fillRect/>
           </a:stretch>
         </p:blipFill>
         <p:spPr bwMode="auto">
           <a:xfrm>
-            <a:off x="505968" y="3304031"/>
-            <a:ext cx="3822192" cy="3060799"/>
+            <a:off x="7653817" y="4726570"/>
+            <a:ext cx="4014216" cy="1610222"/>
           </a:xfrm>
           <a:prstGeom prst="rect">
             <a:avLst/>
@@ -14940,6 +14771,37 @@
           </a:extLst>
         </p:spPr>
       </p:pic>
+      <p:graphicFrame>
+        <p:nvGraphicFramePr>
+          <p:cNvPr id="12" name="Marcador de contenido 2">
+            <a:extLst>
+              <a:ext uri="{FF2B5EF4-FFF2-40B4-BE49-F238E27FC236}">
+                <a16:creationId xmlns:a16="http://schemas.microsoft.com/office/drawing/2014/main" id="{217C6D2A-06D0-5D08-2F0C-7E9CB5E39EE5}"/>
+              </a:ext>
+            </a:extLst>
+          </p:cNvPr>
+          <p:cNvGraphicFramePr>
+            <a:graphicFrameLocks noGrp="1"/>
+          </p:cNvGraphicFramePr>
+          <p:nvPr>
+            <p:ph idx="1"/>
+            <p:extLst>
+              <p:ext uri="{D42A27DB-BD31-4B8C-83A1-F6EECF244321}">
+                <p14:modId xmlns:p14="http://schemas.microsoft.com/office/powerpoint/2010/main" val="4120641262"/>
+              </p:ext>
+            </p:extLst>
+          </p:nvPr>
+        </p:nvGraphicFramePr>
+        <p:xfrm>
+          <a:off x="521208" y="2578608"/>
+          <a:ext cx="6300216" cy="3767328"/>
+        </p:xfrm>
+        <a:graphic>
+          <a:graphicData uri="http://schemas.openxmlformats.org/drawingml/2006/diagram">
+            <dgm:relIds xmlns:dgm="http://schemas.openxmlformats.org/drawingml/2006/diagram" xmlns:r="http://schemas.openxmlformats.org/officeDocument/2006/relationships" r:dm="rId4" r:lo="rId5" r:qs="rId6" r:cs="rId7"/>
+          </a:graphicData>
+        </a:graphic>
+      </p:graphicFrame>
     </p:spTree>
     <p:extLst>
       <p:ext uri="{BB962C8B-B14F-4D97-AF65-F5344CB8AC3E}">
@@ -16962,6 +16824,1119 @@
 <file path=ppt/slides/slide6.xml><?xml version="1.0" encoding="utf-8"?>
 <p:sld xmlns:a="http://schemas.openxmlformats.org/drawingml/2006/main" xmlns:r="http://schemas.openxmlformats.org/officeDocument/2006/relationships" xmlns:p="http://schemas.openxmlformats.org/presentationml/2006/main">
   <p:cSld>
+    <p:bg>
+      <p:bgPr>
+        <a:solidFill>
+          <a:schemeClr val="bg1"/>
+        </a:solidFill>
+        <a:effectLst/>
+      </p:bgPr>
+    </p:bg>
+    <p:spTree>
+      <p:nvGrpSpPr>
+        <p:cNvPr id="1" name=""/>
+        <p:cNvGrpSpPr/>
+        <p:nvPr/>
+      </p:nvGrpSpPr>
+      <p:grpSpPr>
+        <a:xfrm>
+          <a:off x="0" y="0"/>
+          <a:ext cx="0" cy="0"/>
+          <a:chOff x="0" y="0"/>
+          <a:chExt cx="0" cy="0"/>
+        </a:xfrm>
+      </p:grpSpPr>
+      <p:sp>
+        <p:nvSpPr>
+          <p:cNvPr id="9" name="Freeform: Shape 8">
+            <a:extLst>
+              <a:ext uri="{FF2B5EF4-FFF2-40B4-BE49-F238E27FC236}">
+                <a16:creationId xmlns:a16="http://schemas.microsoft.com/office/drawing/2014/main" id="{774A975B-A886-5202-0489-6965514A0D14}"/>
+              </a:ext>
+              <a:ext uri="{C183D7F6-B498-43B3-948B-1728B52AA6E4}">
+                <adec:decorative xmlns:adec="http://schemas.microsoft.com/office/drawing/2017/decorative" val="1"/>
+              </a:ext>
+            </a:extLst>
+          </p:cNvPr>
+          <p:cNvSpPr>
+            <a:spLocks noGrp="1" noRot="1" noChangeAspect="1" noMove="1" noResize="1" noEditPoints="1" noAdjustHandles="1" noChangeArrowheads="1" noChangeShapeType="1" noTextEdit="1"/>
+          </p:cNvSpPr>
+          <p:nvPr>
+            <p:extLst>
+              <p:ext uri="{386F3935-93C4-4BCD-93E2-E3B085C9AB24}">
+                <p16:designElem xmlns:p16="http://schemas.microsoft.com/office/powerpoint/2015/main" val="1"/>
+              </p:ext>
+            </p:extLst>
+          </p:nvPr>
+        </p:nvSpPr>
+        <p:spPr>
+          <a:xfrm>
+            <a:off x="517869" y="508090"/>
+            <a:ext cx="11153214" cy="149279"/>
+          </a:xfrm>
+          <a:custGeom>
+            <a:avLst/>
+            <a:gdLst>
+              <a:gd name="connsiteX0" fmla="*/ 0 w 8085002"/>
+              <a:gd name="connsiteY0" fmla="*/ 0 h 149279"/>
+              <a:gd name="connsiteX1" fmla="*/ 8085002 w 8085002"/>
+              <a:gd name="connsiteY1" fmla="*/ 0 h 149279"/>
+              <a:gd name="connsiteX2" fmla="*/ 8085002 w 8085002"/>
+              <a:gd name="connsiteY2" fmla="*/ 149279 h 149279"/>
+              <a:gd name="connsiteX3" fmla="*/ 0 w 8085002"/>
+              <a:gd name="connsiteY3" fmla="*/ 149279 h 149279"/>
+            </a:gdLst>
+            <a:ahLst/>
+            <a:cxnLst>
+              <a:cxn ang="0">
+                <a:pos x="connsiteX0" y="connsiteY0"/>
+              </a:cxn>
+              <a:cxn ang="0">
+                <a:pos x="connsiteX1" y="connsiteY1"/>
+              </a:cxn>
+              <a:cxn ang="0">
+                <a:pos x="connsiteX2" y="connsiteY2"/>
+              </a:cxn>
+              <a:cxn ang="0">
+                <a:pos x="connsiteX3" y="connsiteY3"/>
+              </a:cxn>
+            </a:cxnLst>
+            <a:rect l="l" t="t" r="r" b="b"/>
+            <a:pathLst>
+              <a:path w="8085002" h="149279">
+                <a:moveTo>
+                  <a:pt x="0" y="0"/>
+                </a:moveTo>
+                <a:lnTo>
+                  <a:pt x="8085002" y="0"/>
+                </a:lnTo>
+                <a:lnTo>
+                  <a:pt x="8085002" y="149279"/>
+                </a:lnTo>
+                <a:lnTo>
+                  <a:pt x="0" y="149279"/>
+                </a:lnTo>
+                <a:close/>
+              </a:path>
+            </a:pathLst>
+          </a:custGeom>
+          <a:solidFill>
+            <a:schemeClr val="tx1"/>
+          </a:solidFill>
+          <a:ln>
+            <a:noFill/>
+          </a:ln>
+        </p:spPr>
+        <p:style>
+          <a:lnRef idx="2">
+            <a:schemeClr val="accent1">
+              <a:shade val="50000"/>
+            </a:schemeClr>
+          </a:lnRef>
+          <a:fillRef idx="1">
+            <a:schemeClr val="accent1"/>
+          </a:fillRef>
+          <a:effectRef idx="0">
+            <a:schemeClr val="accent1"/>
+          </a:effectRef>
+          <a:fontRef idx="minor">
+            <a:schemeClr val="lt1"/>
+          </a:fontRef>
+        </p:style>
+        <p:txBody>
+          <a:bodyPr wrap="square" rtlCol="0" anchor="ctr">
+            <a:noAutofit/>
+          </a:bodyPr>
+          <a:lstStyle/>
+          <a:p>
+            <a:pPr algn="ctr"/>
+            <a:endParaRPr lang="en-US"/>
+          </a:p>
+        </p:txBody>
+      </p:sp>
+      <p:sp>
+        <p:nvSpPr>
+          <p:cNvPr id="11" name="Freeform: Shape 10">
+            <a:extLst>
+              <a:ext uri="{FF2B5EF4-FFF2-40B4-BE49-F238E27FC236}">
+                <a16:creationId xmlns:a16="http://schemas.microsoft.com/office/drawing/2014/main" id="{EA67E988-5919-57BB-C7DE-D3EAD38A3045}"/>
+              </a:ext>
+              <a:ext uri="{C183D7F6-B498-43B3-948B-1728B52AA6E4}">
+                <adec:decorative xmlns:adec="http://schemas.microsoft.com/office/drawing/2017/decorative" val="1"/>
+              </a:ext>
+            </a:extLst>
+          </p:cNvPr>
+          <p:cNvSpPr>
+            <a:spLocks noGrp="1" noRot="1" noChangeAspect="1" noMove="1" noResize="1" noEditPoints="1" noAdjustHandles="1" noChangeArrowheads="1" noChangeShapeType="1" noTextEdit="1"/>
+          </p:cNvSpPr>
+          <p:nvPr>
+            <p:extLst>
+              <p:ext uri="{386F3935-93C4-4BCD-93E2-E3B085C9AB24}">
+                <p16:designElem xmlns:p16="http://schemas.microsoft.com/office/powerpoint/2015/main" val="1"/>
+              </p:ext>
+            </p:extLst>
+          </p:nvPr>
+        </p:nvSpPr>
+        <p:spPr>
+          <a:xfrm>
+            <a:off x="517870" y="6209925"/>
+            <a:ext cx="11155680" cy="45719"/>
+          </a:xfrm>
+          <a:custGeom>
+            <a:avLst/>
+            <a:gdLst/>
+            <a:ahLst/>
+            <a:cxnLst/>
+            <a:rect l="l" t="t" r="r" b="b"/>
+            <a:pathLst>
+              <a:path w="8715708" h="45719">
+                <a:moveTo>
+                  <a:pt x="0" y="0"/>
+                </a:moveTo>
+                <a:lnTo>
+                  <a:pt x="3694525" y="0"/>
+                </a:lnTo>
+                <a:lnTo>
+                  <a:pt x="5021183" y="0"/>
+                </a:lnTo>
+                <a:lnTo>
+                  <a:pt x="8715708" y="0"/>
+                </a:lnTo>
+                <a:lnTo>
+                  <a:pt x="8715708" y="45719"/>
+                </a:lnTo>
+                <a:lnTo>
+                  <a:pt x="5021183" y="45719"/>
+                </a:lnTo>
+                <a:lnTo>
+                  <a:pt x="3694525" y="45719"/>
+                </a:lnTo>
+                <a:lnTo>
+                  <a:pt x="0" y="45719"/>
+                </a:lnTo>
+                <a:close/>
+              </a:path>
+            </a:pathLst>
+          </a:custGeom>
+          <a:solidFill>
+            <a:schemeClr val="tx1"/>
+          </a:solidFill>
+          <a:ln>
+            <a:noFill/>
+          </a:ln>
+        </p:spPr>
+        <p:style>
+          <a:lnRef idx="2">
+            <a:schemeClr val="accent1">
+              <a:shade val="50000"/>
+            </a:schemeClr>
+          </a:lnRef>
+          <a:fillRef idx="1">
+            <a:schemeClr val="accent1"/>
+          </a:fillRef>
+          <a:effectRef idx="0">
+            <a:schemeClr val="accent1"/>
+          </a:effectRef>
+          <a:fontRef idx="minor">
+            <a:schemeClr val="lt1"/>
+          </a:fontRef>
+        </p:style>
+        <p:txBody>
+          <a:bodyPr wrap="square" rtlCol="0" anchor="ctr">
+            <a:noAutofit/>
+          </a:bodyPr>
+          <a:lstStyle/>
+          <a:p>
+            <a:pPr algn="ctr"/>
+            <a:endParaRPr lang="en-US"/>
+          </a:p>
+        </p:txBody>
+      </p:sp>
+      <p:sp useBgFill="1">
+        <p:nvSpPr>
+          <p:cNvPr id="13" name="Rectangle 12">
+            <a:extLst>
+              <a:ext uri="{FF2B5EF4-FFF2-40B4-BE49-F238E27FC236}">
+                <a16:creationId xmlns:a16="http://schemas.microsoft.com/office/drawing/2014/main" id="{FAF3766F-DEF3-4802-BB0D-7A18EDD9704F}"/>
+              </a:ext>
+              <a:ext uri="{C183D7F6-B498-43B3-948B-1728B52AA6E4}">
+                <adec:decorative xmlns:adec="http://schemas.microsoft.com/office/drawing/2017/decorative" val="1"/>
+              </a:ext>
+            </a:extLst>
+          </p:cNvPr>
+          <p:cNvSpPr>
+            <a:spLocks noGrp="1" noRot="1" noChangeAspect="1" noMove="1" noResize="1" noEditPoints="1" noAdjustHandles="1" noChangeArrowheads="1" noChangeShapeType="1" noTextEdit="1"/>
+          </p:cNvSpPr>
+          <p:nvPr>
+            <p:extLst>
+              <p:ext uri="{386F3935-93C4-4BCD-93E2-E3B085C9AB24}">
+                <p16:designElem xmlns:p16="http://schemas.microsoft.com/office/powerpoint/2015/main" val="1"/>
+              </p:ext>
+            </p:extLst>
+          </p:nvPr>
+        </p:nvSpPr>
+        <p:spPr>
+          <a:xfrm>
+            <a:off x="0" y="0"/>
+            <a:ext cx="12188952" cy="6857995"/>
+          </a:xfrm>
+          <a:prstGeom prst="rect">
+            <a:avLst/>
+          </a:prstGeom>
+          <a:ln>
+            <a:noFill/>
+          </a:ln>
+        </p:spPr>
+        <p:style>
+          <a:lnRef idx="2">
+            <a:schemeClr val="accent1">
+              <a:shade val="50000"/>
+            </a:schemeClr>
+          </a:lnRef>
+          <a:fillRef idx="1">
+            <a:schemeClr val="accent1"/>
+          </a:fillRef>
+          <a:effectRef idx="0">
+            <a:schemeClr val="accent1"/>
+          </a:effectRef>
+          <a:fontRef idx="minor">
+            <a:schemeClr val="lt1"/>
+          </a:fontRef>
+        </p:style>
+        <p:txBody>
+          <a:bodyPr rtlCol="0" anchor="ctr"/>
+          <a:lstStyle/>
+          <a:p>
+            <a:pPr algn="ctr"/>
+            <a:endParaRPr lang="en-US" dirty="0"/>
+          </a:p>
+        </p:txBody>
+      </p:sp>
+      <p:sp>
+        <p:nvSpPr>
+          <p:cNvPr id="2" name="Título 1">
+            <a:extLst>
+              <a:ext uri="{FF2B5EF4-FFF2-40B4-BE49-F238E27FC236}">
+                <a16:creationId xmlns:a16="http://schemas.microsoft.com/office/drawing/2014/main" id="{466AF823-998D-B8D4-E707-2DEBDB67760E}"/>
+              </a:ext>
+            </a:extLst>
+          </p:cNvPr>
+          <p:cNvSpPr>
+            <a:spLocks noGrp="1"/>
+          </p:cNvSpPr>
+          <p:nvPr>
+            <p:ph type="title"/>
+          </p:nvPr>
+        </p:nvSpPr>
+        <p:spPr>
+          <a:xfrm>
+            <a:off x="517870" y="978408"/>
+            <a:ext cx="3465681" cy="2450592"/>
+          </a:xfrm>
+        </p:spPr>
+        <p:txBody>
+          <a:bodyPr vert="horz" lIns="91440" tIns="45720" rIns="91440" bIns="45720" rtlCol="0" anchor="t">
+            <a:normAutofit/>
+          </a:bodyPr>
+          <a:lstStyle/>
+          <a:p>
+            <a:r>
+              <a:rPr lang="en-US" sz="4800" dirty="0">
+                <a:solidFill>
+                  <a:schemeClr val="tx2"/>
+                </a:solidFill>
+              </a:rPr>
+              <a:t>Más </a:t>
+            </a:r>
+            <a:r>
+              <a:rPr lang="en-US" sz="4800" dirty="0" err="1">
+                <a:solidFill>
+                  <a:schemeClr val="tx2"/>
+                </a:solidFill>
+              </a:rPr>
+              <a:t>sobre</a:t>
+            </a:r>
+            <a:r>
+              <a:rPr lang="en-US" sz="4800" dirty="0">
+                <a:solidFill>
+                  <a:schemeClr val="tx2"/>
+                </a:solidFill>
+              </a:rPr>
+              <a:t> </a:t>
+            </a:r>
+            <a:r>
+              <a:rPr lang="en-US" sz="4800" dirty="0" err="1">
+                <a:solidFill>
+                  <a:schemeClr val="tx2"/>
+                </a:solidFill>
+              </a:rPr>
+              <a:t>el</a:t>
+            </a:r>
+            <a:r>
+              <a:rPr lang="en-US" sz="4800" dirty="0">
+                <a:solidFill>
+                  <a:schemeClr val="tx2"/>
+                </a:solidFill>
+              </a:rPr>
+              <a:t> Catalyst Optimizer </a:t>
+            </a:r>
+          </a:p>
+        </p:txBody>
+      </p:sp>
+      <p:sp>
+        <p:nvSpPr>
+          <p:cNvPr id="15" name="Rectangle 14">
+            <a:extLst>
+              <a:ext uri="{FF2B5EF4-FFF2-40B4-BE49-F238E27FC236}">
+                <a16:creationId xmlns:a16="http://schemas.microsoft.com/office/drawing/2014/main" id="{D91952F0-771E-D2ED-C333-EEED6708B80C}"/>
+              </a:ext>
+              <a:ext uri="{C183D7F6-B498-43B3-948B-1728B52AA6E4}">
+                <adec:decorative xmlns:adec="http://schemas.microsoft.com/office/drawing/2017/decorative" val="1"/>
+              </a:ext>
+            </a:extLst>
+          </p:cNvPr>
+          <p:cNvSpPr>
+            <a:spLocks noGrp="1" noRot="1" noChangeAspect="1" noMove="1" noResize="1" noEditPoints="1" noAdjustHandles="1" noChangeArrowheads="1" noChangeShapeType="1" noTextEdit="1"/>
+          </p:cNvSpPr>
+          <p:nvPr>
+            <p:extLst>
+              <p:ext uri="{386F3935-93C4-4BCD-93E2-E3B085C9AB24}">
+                <p16:designElem xmlns:p16="http://schemas.microsoft.com/office/powerpoint/2015/main" val="1"/>
+              </p:ext>
+            </p:extLst>
+          </p:nvPr>
+        </p:nvSpPr>
+        <p:spPr>
+          <a:xfrm>
+            <a:off x="517871" y="508090"/>
+            <a:ext cx="3466424" cy="149279"/>
+          </a:xfrm>
+          <a:prstGeom prst="rect">
+            <a:avLst/>
+          </a:prstGeom>
+          <a:solidFill>
+            <a:schemeClr val="tx1"/>
+          </a:solidFill>
+          <a:ln>
+            <a:noFill/>
+          </a:ln>
+        </p:spPr>
+        <p:style>
+          <a:lnRef idx="2">
+            <a:schemeClr val="accent1">
+              <a:shade val="50000"/>
+            </a:schemeClr>
+          </a:lnRef>
+          <a:fillRef idx="1">
+            <a:schemeClr val="accent1"/>
+          </a:fillRef>
+          <a:effectRef idx="0">
+            <a:schemeClr val="accent1"/>
+          </a:effectRef>
+          <a:fontRef idx="minor">
+            <a:schemeClr val="lt1"/>
+          </a:fontRef>
+        </p:style>
+        <p:txBody>
+          <a:bodyPr rtlCol="0" anchor="ctr"/>
+          <a:lstStyle/>
+          <a:p>
+            <a:pPr algn="ctr"/>
+            <a:endParaRPr lang="en-US"/>
+          </a:p>
+        </p:txBody>
+      </p:sp>
+      <p:sp>
+        <p:nvSpPr>
+          <p:cNvPr id="17" name="Rectangle 16">
+            <a:extLst>
+              <a:ext uri="{FF2B5EF4-FFF2-40B4-BE49-F238E27FC236}">
+                <a16:creationId xmlns:a16="http://schemas.microsoft.com/office/drawing/2014/main" id="{3FB6D83C-2377-9CAD-A991-9E0B6AF25067}"/>
+              </a:ext>
+              <a:ext uri="{C183D7F6-B498-43B3-948B-1728B52AA6E4}">
+                <adec:decorative xmlns:adec="http://schemas.microsoft.com/office/drawing/2017/decorative" val="1"/>
+              </a:ext>
+            </a:extLst>
+          </p:cNvPr>
+          <p:cNvSpPr>
+            <a:spLocks noGrp="1" noRot="1" noChangeAspect="1" noMove="1" noResize="1" noEditPoints="1" noAdjustHandles="1" noChangeArrowheads="1" noChangeShapeType="1" noTextEdit="1"/>
+          </p:cNvSpPr>
+          <p:nvPr>
+            <p:extLst>
+              <p:ext uri="{386F3935-93C4-4BCD-93E2-E3B085C9AB24}">
+                <p16:designElem xmlns:p16="http://schemas.microsoft.com/office/powerpoint/2015/main" val="1"/>
+              </p:ext>
+            </p:extLst>
+          </p:nvPr>
+        </p:nvSpPr>
+        <p:spPr>
+          <a:xfrm>
+            <a:off x="521208" y="6299535"/>
+            <a:ext cx="3465681" cy="46469"/>
+          </a:xfrm>
+          <a:prstGeom prst="rect">
+            <a:avLst/>
+          </a:prstGeom>
+          <a:solidFill>
+            <a:schemeClr val="tx1"/>
+          </a:solidFill>
+          <a:ln>
+            <a:noFill/>
+          </a:ln>
+        </p:spPr>
+        <p:style>
+          <a:lnRef idx="2">
+            <a:schemeClr val="accent1">
+              <a:shade val="50000"/>
+            </a:schemeClr>
+          </a:lnRef>
+          <a:fillRef idx="1">
+            <a:schemeClr val="accent1"/>
+          </a:fillRef>
+          <a:effectRef idx="0">
+            <a:schemeClr val="accent1"/>
+          </a:effectRef>
+          <a:fontRef idx="minor">
+            <a:schemeClr val="lt1"/>
+          </a:fontRef>
+        </p:style>
+        <p:txBody>
+          <a:bodyPr rtlCol="0" anchor="ctr"/>
+          <a:lstStyle/>
+          <a:p>
+            <a:pPr marL="0" marR="0" lvl="0" indent="0" algn="ctr" defTabSz="914400" rtl="0" eaLnBrk="1" fontAlgn="auto" latinLnBrk="0" hangingPunct="1">
+              <a:lnSpc>
+                <a:spcPct val="100000"/>
+              </a:lnSpc>
+              <a:spcBef>
+                <a:spcPts val="0"/>
+              </a:spcBef>
+              <a:spcAft>
+                <a:spcPts val="0"/>
+              </a:spcAft>
+              <a:buClrTx/>
+              <a:buSzTx/>
+              <a:buFontTx/>
+              <a:buNone/>
+              <a:tabLst/>
+              <a:defRPr/>
+            </a:pPr>
+            <a:endParaRPr kumimoji="0" lang="en-US" sz="1800" b="0" i="0" u="none" strike="noStrike" kern="1200" cap="none" spc="0" normalizeH="0" baseline="0" noProof="0">
+              <a:ln>
+                <a:noFill/>
+              </a:ln>
+              <a:solidFill>
+                <a:prstClr val="white"/>
+              </a:solidFill>
+              <a:effectLst/>
+              <a:uLnTx/>
+              <a:uFillTx/>
+              <a:latin typeface="Bierstadt"/>
+              <a:ea typeface="+mn-ea"/>
+              <a:cs typeface="+mn-cs"/>
+            </a:endParaRPr>
+          </a:p>
+        </p:txBody>
+      </p:sp>
+      <p:graphicFrame>
+        <p:nvGraphicFramePr>
+          <p:cNvPr id="4" name="Tabla 3">
+            <a:extLst>
+              <a:ext uri="{FF2B5EF4-FFF2-40B4-BE49-F238E27FC236}">
+                <a16:creationId xmlns:a16="http://schemas.microsoft.com/office/drawing/2014/main" id="{9A140A98-9D99-6FDC-A8F2-A356A9EBF5A9}"/>
+              </a:ext>
+            </a:extLst>
+          </p:cNvPr>
+          <p:cNvGraphicFramePr>
+            <a:graphicFrameLocks noGrp="1"/>
+          </p:cNvGraphicFramePr>
+          <p:nvPr>
+            <p:extLst>
+              <p:ext uri="{D42A27DB-BD31-4B8C-83A1-F6EECF244321}">
+                <p14:modId xmlns:p14="http://schemas.microsoft.com/office/powerpoint/2010/main" val="1254612310"/>
+              </p:ext>
+            </p:extLst>
+          </p:nvPr>
+        </p:nvGraphicFramePr>
+        <p:xfrm>
+          <a:off x="4232366" y="772869"/>
+          <a:ext cx="7438427" cy="5411169"/>
+        </p:xfrm>
+        <a:graphic>
+          <a:graphicData uri="http://schemas.openxmlformats.org/drawingml/2006/table">
+            <a:tbl>
+              <a:tblPr/>
+              <a:tblGrid>
+                <a:gridCol w="3538552">
+                  <a:extLst>
+                    <a:ext uri="{9D8B030D-6E8A-4147-A177-3AD203B41FA5}">
+                      <a16:colId xmlns:a16="http://schemas.microsoft.com/office/drawing/2014/main" val="3477506182"/>
+                    </a:ext>
+                  </a:extLst>
+                </a:gridCol>
+                <a:gridCol w="3899875">
+                  <a:extLst>
+                    <a:ext uri="{9D8B030D-6E8A-4147-A177-3AD203B41FA5}">
+                      <a16:colId xmlns:a16="http://schemas.microsoft.com/office/drawing/2014/main" val="4131699168"/>
+                    </a:ext>
+                  </a:extLst>
+                </a:gridCol>
+              </a:tblGrid>
+              <a:tr h="381557">
+                <a:tc>
+                  <a:txBody>
+                    <a:bodyPr/>
+                    <a:lstStyle/>
+                    <a:p>
+                      <a:pPr algn="l" fontAlgn="ctr">
+                        <a:buNone/>
+                      </a:pPr>
+                      <a:r>
+                        <a:rPr lang="es-MX" sz="1700" b="0" i="0" u="none" strike="noStrike">
+                          <a:effectLst/>
+                          <a:latin typeface="Arial" panose="020B0604020202020204" pitchFamily="34" charset="0"/>
+                        </a:rPr>
+                        <a:t>Etapa</a:t>
+                      </a:r>
+                    </a:p>
+                  </a:txBody>
+                  <a:tcPr marL="86717" marR="86717" marT="43359" marB="43359" anchor="ctr">
+                    <a:lnL>
+                      <a:noFill/>
+                    </a:lnL>
+                    <a:lnR>
+                      <a:noFill/>
+                    </a:lnR>
+                    <a:lnT>
+                      <a:noFill/>
+                    </a:lnT>
+                    <a:lnB>
+                      <a:noFill/>
+                    </a:lnB>
+                    <a:noFill/>
+                  </a:tcPr>
+                </a:tc>
+                <a:tc>
+                  <a:txBody>
+                    <a:bodyPr/>
+                    <a:lstStyle/>
+                    <a:p>
+                      <a:pPr algn="l" fontAlgn="ctr">
+                        <a:buNone/>
+                      </a:pPr>
+                      <a:r>
+                        <a:rPr lang="es-MX" sz="1700" b="0" i="0" u="none" strike="noStrike">
+                          <a:effectLst/>
+                          <a:latin typeface="Arial" panose="020B0604020202020204" pitchFamily="34" charset="0"/>
+                        </a:rPr>
+                        <a:t>Descripción</a:t>
+                      </a:r>
+                    </a:p>
+                  </a:txBody>
+                  <a:tcPr marL="86717" marR="86717" marT="43359" marB="43359" anchor="ctr">
+                    <a:lnL>
+                      <a:noFill/>
+                    </a:lnL>
+                    <a:lnR>
+                      <a:noFill/>
+                    </a:lnR>
+                    <a:lnT>
+                      <a:noFill/>
+                    </a:lnT>
+                    <a:lnB>
+                      <a:noFill/>
+                    </a:lnB>
+                    <a:noFill/>
+                  </a:tcPr>
+                </a:tc>
+                <a:extLst>
+                  <a:ext uri="{0D108BD9-81ED-4DB2-BD59-A6C34878D82A}">
+                    <a16:rowId xmlns:a16="http://schemas.microsoft.com/office/drawing/2014/main" val="2559670308"/>
+                  </a:ext>
+                </a:extLst>
+              </a:tr>
+              <a:tr h="901861">
+                <a:tc>
+                  <a:txBody>
+                    <a:bodyPr/>
+                    <a:lstStyle/>
+                    <a:p>
+                      <a:pPr algn="l" fontAlgn="ctr">
+                        <a:buNone/>
+                      </a:pPr>
+                      <a:r>
+                        <a:rPr lang="es-MX" sz="1700" b="1" i="0" u="none" strike="noStrike">
+                          <a:effectLst/>
+                          <a:latin typeface="Arial" panose="020B0604020202020204" pitchFamily="34" charset="0"/>
+                        </a:rPr>
+                        <a:t>1. Análisis (Analysis)</a:t>
+                      </a:r>
+                      <a:endParaRPr lang="es-MX" sz="1700" b="0" i="0" u="none" strike="noStrike">
+                        <a:effectLst/>
+                        <a:latin typeface="Arial" panose="020B0604020202020204" pitchFamily="34" charset="0"/>
+                      </a:endParaRPr>
+                    </a:p>
+                  </a:txBody>
+                  <a:tcPr marL="86717" marR="86717" marT="43359" marB="43359" anchor="ctr">
+                    <a:lnL>
+                      <a:noFill/>
+                    </a:lnL>
+                    <a:lnR>
+                      <a:noFill/>
+                    </a:lnR>
+                    <a:lnT>
+                      <a:noFill/>
+                    </a:lnT>
+                    <a:lnB>
+                      <a:noFill/>
+                    </a:lnB>
+                    <a:noFill/>
+                  </a:tcPr>
+                </a:tc>
+                <a:tc>
+                  <a:txBody>
+                    <a:bodyPr/>
+                    <a:lstStyle/>
+                    <a:p>
+                      <a:pPr algn="l" fontAlgn="ctr">
+                        <a:buNone/>
+                      </a:pPr>
+                      <a:r>
+                        <a:rPr lang="es-MX" sz="1700" b="0" i="0" u="none" strike="noStrike">
+                          <a:effectLst/>
+                          <a:latin typeface="Arial" panose="020B0604020202020204" pitchFamily="34" charset="0"/>
+                        </a:rPr>
+                        <a:t>Spark convierte la consulta SQL o DataFrame en un </a:t>
+                      </a:r>
+                      <a:r>
+                        <a:rPr lang="es-MX" sz="1700" b="1" i="0" u="none" strike="noStrike">
+                          <a:effectLst/>
+                          <a:latin typeface="Arial" panose="020B0604020202020204" pitchFamily="34" charset="0"/>
+                        </a:rPr>
+                        <a:t>árbol lógico sin tipos</a:t>
+                      </a:r>
+                      <a:r>
+                        <a:rPr lang="es-MX" sz="1700" b="0" i="0" u="none" strike="noStrike">
+                          <a:effectLst/>
+                          <a:latin typeface="Arial" panose="020B0604020202020204" pitchFamily="34" charset="0"/>
+                        </a:rPr>
+                        <a:t> y lo valida contra el esquema.</a:t>
+                      </a:r>
+                    </a:p>
+                  </a:txBody>
+                  <a:tcPr marL="86717" marR="86717" marT="43359" marB="43359" anchor="ctr">
+                    <a:lnL>
+                      <a:noFill/>
+                    </a:lnL>
+                    <a:lnR>
+                      <a:noFill/>
+                    </a:lnR>
+                    <a:lnT>
+                      <a:noFill/>
+                    </a:lnT>
+                    <a:lnB>
+                      <a:noFill/>
+                    </a:lnB>
+                    <a:noFill/>
+                  </a:tcPr>
+                </a:tc>
+                <a:extLst>
+                  <a:ext uri="{0D108BD9-81ED-4DB2-BD59-A6C34878D82A}">
+                    <a16:rowId xmlns:a16="http://schemas.microsoft.com/office/drawing/2014/main" val="2750119952"/>
+                  </a:ext>
+                </a:extLst>
+              </a:tr>
+              <a:tr h="1162014">
+                <a:tc>
+                  <a:txBody>
+                    <a:bodyPr/>
+                    <a:lstStyle/>
+                    <a:p>
+                      <a:pPr algn="l" fontAlgn="ctr">
+                        <a:buNone/>
+                      </a:pPr>
+                      <a:r>
+                        <a:rPr lang="es-MX" sz="1700" b="1" i="0" u="none" strike="noStrike">
+                          <a:effectLst/>
+                          <a:latin typeface="Arial" panose="020B0604020202020204" pitchFamily="34" charset="0"/>
+                        </a:rPr>
+                        <a:t>2. Resolución (Resolution)</a:t>
+                      </a:r>
+                      <a:endParaRPr lang="es-MX" sz="1700" b="0" i="0" u="none" strike="noStrike">
+                        <a:effectLst/>
+                        <a:latin typeface="Arial" panose="020B0604020202020204" pitchFamily="34" charset="0"/>
+                      </a:endParaRPr>
+                    </a:p>
+                  </a:txBody>
+                  <a:tcPr marL="86717" marR="86717" marT="43359" marB="43359" anchor="ctr">
+                    <a:lnL>
+                      <a:noFill/>
+                    </a:lnL>
+                    <a:lnR>
+                      <a:noFill/>
+                    </a:lnR>
+                    <a:lnT>
+                      <a:noFill/>
+                    </a:lnT>
+                    <a:lnB>
+                      <a:noFill/>
+                    </a:lnB>
+                    <a:noFill/>
+                  </a:tcPr>
+                </a:tc>
+                <a:tc>
+                  <a:txBody>
+                    <a:bodyPr/>
+                    <a:lstStyle/>
+                    <a:p>
+                      <a:pPr algn="l" fontAlgn="ctr">
+                        <a:buNone/>
+                      </a:pPr>
+                      <a:r>
+                        <a:rPr lang="es-MX" sz="1700" b="0" i="0" u="none" strike="noStrike">
+                          <a:effectLst/>
+                          <a:latin typeface="Arial" panose="020B0604020202020204" pitchFamily="34" charset="0"/>
+                        </a:rPr>
+                        <a:t>Se resuelven referencias (como nombres de columnas y funciones), convirtiendo el árbol en una forma </a:t>
+                      </a:r>
+                      <a:r>
+                        <a:rPr lang="es-MX" sz="1700" b="1" i="0" u="none" strike="noStrike">
+                          <a:effectLst/>
+                          <a:latin typeface="Arial" panose="020B0604020202020204" pitchFamily="34" charset="0"/>
+                        </a:rPr>
+                        <a:t>tipada y válida</a:t>
+                      </a:r>
+                      <a:r>
+                        <a:rPr lang="es-MX" sz="1700" b="0" i="0" u="none" strike="noStrike">
+                          <a:effectLst/>
+                          <a:latin typeface="Arial" panose="020B0604020202020204" pitchFamily="34" charset="0"/>
+                        </a:rPr>
+                        <a:t>.</a:t>
+                      </a:r>
+                    </a:p>
+                  </a:txBody>
+                  <a:tcPr marL="86717" marR="86717" marT="43359" marB="43359" anchor="ctr">
+                    <a:lnL>
+                      <a:noFill/>
+                    </a:lnL>
+                    <a:lnR>
+                      <a:noFill/>
+                    </a:lnR>
+                    <a:lnT>
+                      <a:noFill/>
+                    </a:lnT>
+                    <a:lnB>
+                      <a:noFill/>
+                    </a:lnB>
+                    <a:noFill/>
+                  </a:tcPr>
+                </a:tc>
+                <a:extLst>
+                  <a:ext uri="{0D108BD9-81ED-4DB2-BD59-A6C34878D82A}">
+                    <a16:rowId xmlns:a16="http://schemas.microsoft.com/office/drawing/2014/main" val="1894235982"/>
+                  </a:ext>
+                </a:extLst>
+              </a:tr>
+              <a:tr h="1162014">
+                <a:tc>
+                  <a:txBody>
+                    <a:bodyPr/>
+                    <a:lstStyle/>
+                    <a:p>
+                      <a:pPr algn="l" fontAlgn="ctr">
+                        <a:buNone/>
+                      </a:pPr>
+                      <a:r>
+                        <a:rPr lang="es-MX" sz="1700" b="1" i="0" u="none" strike="noStrike">
+                          <a:effectLst/>
+                          <a:latin typeface="Arial" panose="020B0604020202020204" pitchFamily="34" charset="0"/>
+                        </a:rPr>
+                        <a:t>3. Optimización lógica</a:t>
+                      </a:r>
+                      <a:endParaRPr lang="es-MX" sz="1700" b="0" i="0" u="none" strike="noStrike">
+                        <a:effectLst/>
+                        <a:latin typeface="Arial" panose="020B0604020202020204" pitchFamily="34" charset="0"/>
+                      </a:endParaRPr>
+                    </a:p>
+                  </a:txBody>
+                  <a:tcPr marL="86717" marR="86717" marT="43359" marB="43359" anchor="ctr">
+                    <a:lnL>
+                      <a:noFill/>
+                    </a:lnL>
+                    <a:lnR>
+                      <a:noFill/>
+                    </a:lnR>
+                    <a:lnT>
+                      <a:noFill/>
+                    </a:lnT>
+                    <a:lnB>
+                      <a:noFill/>
+                    </a:lnB>
+                    <a:noFill/>
+                  </a:tcPr>
+                </a:tc>
+                <a:tc>
+                  <a:txBody>
+                    <a:bodyPr/>
+                    <a:lstStyle/>
+                    <a:p>
+                      <a:pPr algn="l" fontAlgn="ctr">
+                        <a:buNone/>
+                      </a:pPr>
+                      <a:r>
+                        <a:rPr lang="es-MX" sz="1700" b="0" i="0" u="none" strike="noStrike">
+                          <a:effectLst/>
+                          <a:latin typeface="Arial" panose="020B0604020202020204" pitchFamily="34" charset="0"/>
+                        </a:rPr>
+                        <a:t>Se aplica un conjunto de </a:t>
+                      </a:r>
+                      <a:r>
+                        <a:rPr lang="es-MX" sz="1700" b="1" i="0" u="none" strike="noStrike">
+                          <a:effectLst/>
+                          <a:latin typeface="Arial" panose="020B0604020202020204" pitchFamily="34" charset="0"/>
+                        </a:rPr>
+                        <a:t>reglas de optimización lógica</a:t>
+                      </a:r>
+                      <a:r>
+                        <a:rPr lang="es-MX" sz="1700" b="0" i="0" u="none" strike="noStrike">
+                          <a:effectLst/>
+                          <a:latin typeface="Arial" panose="020B0604020202020204" pitchFamily="34" charset="0"/>
+                        </a:rPr>
+                        <a:t>, como proyección de columnas, filtrado temprano, combinación de filtros, etc.</a:t>
+                      </a:r>
+                    </a:p>
+                  </a:txBody>
+                  <a:tcPr marL="86717" marR="86717" marT="43359" marB="43359" anchor="ctr">
+                    <a:lnL>
+                      <a:noFill/>
+                    </a:lnL>
+                    <a:lnR>
+                      <a:noFill/>
+                    </a:lnR>
+                    <a:lnT>
+                      <a:noFill/>
+                    </a:lnT>
+                    <a:lnB>
+                      <a:noFill/>
+                    </a:lnB>
+                    <a:noFill/>
+                  </a:tcPr>
+                </a:tc>
+                <a:extLst>
+                  <a:ext uri="{0D108BD9-81ED-4DB2-BD59-A6C34878D82A}">
+                    <a16:rowId xmlns:a16="http://schemas.microsoft.com/office/drawing/2014/main" val="3009654764"/>
+                  </a:ext>
+                </a:extLst>
+              </a:tr>
+              <a:tr h="1162014">
+                <a:tc>
+                  <a:txBody>
+                    <a:bodyPr/>
+                    <a:lstStyle/>
+                    <a:p>
+                      <a:pPr algn="l" fontAlgn="ctr">
+                        <a:buNone/>
+                      </a:pPr>
+                      <a:r>
+                        <a:rPr lang="es-MX" sz="1700" b="1" i="0" u="none" strike="noStrike">
+                          <a:effectLst/>
+                          <a:latin typeface="Arial" panose="020B0604020202020204" pitchFamily="34" charset="0"/>
+                        </a:rPr>
+                        <a:t>4. Generación de planes físicos</a:t>
+                      </a:r>
+                      <a:endParaRPr lang="es-MX" sz="1700" b="0" i="0" u="none" strike="noStrike">
+                        <a:effectLst/>
+                        <a:latin typeface="Arial" panose="020B0604020202020204" pitchFamily="34" charset="0"/>
+                      </a:endParaRPr>
+                    </a:p>
+                  </a:txBody>
+                  <a:tcPr marL="86717" marR="86717" marT="43359" marB="43359" anchor="ctr">
+                    <a:lnL>
+                      <a:noFill/>
+                    </a:lnL>
+                    <a:lnR>
+                      <a:noFill/>
+                    </a:lnR>
+                    <a:lnT>
+                      <a:noFill/>
+                    </a:lnT>
+                    <a:lnB>
+                      <a:noFill/>
+                    </a:lnB>
+                    <a:noFill/>
+                  </a:tcPr>
+                </a:tc>
+                <a:tc>
+                  <a:txBody>
+                    <a:bodyPr/>
+                    <a:lstStyle/>
+                    <a:p>
+                      <a:pPr algn="l" fontAlgn="ctr">
+                        <a:buNone/>
+                      </a:pPr>
+                      <a:r>
+                        <a:rPr lang="es-MX" sz="1700" b="0" i="0" u="none" strike="noStrike">
+                          <a:effectLst/>
+                          <a:latin typeface="Arial" panose="020B0604020202020204" pitchFamily="34" charset="0"/>
+                        </a:rPr>
+                        <a:t>Se crean múltiples </a:t>
+                      </a:r>
+                      <a:r>
+                        <a:rPr lang="es-MX" sz="1700" b="1" i="0" u="none" strike="noStrike">
+                          <a:effectLst/>
+                          <a:latin typeface="Arial" panose="020B0604020202020204" pitchFamily="34" charset="0"/>
+                        </a:rPr>
+                        <a:t>planes físicos</a:t>
+                      </a:r>
+                      <a:r>
+                        <a:rPr lang="es-MX" sz="1700" b="0" i="0" u="none" strike="noStrike">
+                          <a:effectLst/>
+                          <a:latin typeface="Arial" panose="020B0604020202020204" pitchFamily="34" charset="0"/>
+                        </a:rPr>
+                        <a:t> (distintas formas de ejecutar la consulta), cada uno con un estimado de costo.</a:t>
+                      </a:r>
+                    </a:p>
+                  </a:txBody>
+                  <a:tcPr marL="86717" marR="86717" marT="43359" marB="43359" anchor="ctr">
+                    <a:lnL>
+                      <a:noFill/>
+                    </a:lnL>
+                    <a:lnR>
+                      <a:noFill/>
+                    </a:lnR>
+                    <a:lnT>
+                      <a:noFill/>
+                    </a:lnT>
+                    <a:lnB>
+                      <a:noFill/>
+                    </a:lnB>
+                    <a:noFill/>
+                  </a:tcPr>
+                </a:tc>
+                <a:extLst>
+                  <a:ext uri="{0D108BD9-81ED-4DB2-BD59-A6C34878D82A}">
+                    <a16:rowId xmlns:a16="http://schemas.microsoft.com/office/drawing/2014/main" val="245544231"/>
+                  </a:ext>
+                </a:extLst>
+              </a:tr>
+              <a:tr h="641709">
+                <a:tc>
+                  <a:txBody>
+                    <a:bodyPr/>
+                    <a:lstStyle/>
+                    <a:p>
+                      <a:pPr algn="l" fontAlgn="ctr">
+                        <a:buNone/>
+                      </a:pPr>
+                      <a:r>
+                        <a:rPr lang="es-MX" sz="1700" b="1" i="0" u="none" strike="noStrike">
+                          <a:effectLst/>
+                          <a:latin typeface="Arial" panose="020B0604020202020204" pitchFamily="34" charset="0"/>
+                        </a:rPr>
+                        <a:t>5. Selección del plan óptimo</a:t>
+                      </a:r>
+                      <a:endParaRPr lang="es-MX" sz="1700" b="0" i="0" u="none" strike="noStrike">
+                        <a:effectLst/>
+                        <a:latin typeface="Arial" panose="020B0604020202020204" pitchFamily="34" charset="0"/>
+                      </a:endParaRPr>
+                    </a:p>
+                  </a:txBody>
+                  <a:tcPr marL="86717" marR="86717" marT="43359" marB="43359" anchor="ctr">
+                    <a:lnL>
+                      <a:noFill/>
+                    </a:lnL>
+                    <a:lnR>
+                      <a:noFill/>
+                    </a:lnR>
+                    <a:lnT>
+                      <a:noFill/>
+                    </a:lnT>
+                    <a:lnB>
+                      <a:noFill/>
+                    </a:lnB>
+                    <a:noFill/>
+                  </a:tcPr>
+                </a:tc>
+                <a:tc>
+                  <a:txBody>
+                    <a:bodyPr/>
+                    <a:lstStyle/>
+                    <a:p>
+                      <a:pPr algn="l" fontAlgn="ctr">
+                        <a:buNone/>
+                      </a:pPr>
+                      <a:r>
+                        <a:rPr lang="es-MX" sz="1700" b="0" i="0" u="none" strike="noStrike" dirty="0" err="1">
+                          <a:effectLst/>
+                          <a:latin typeface="Arial" panose="020B0604020202020204" pitchFamily="34" charset="0"/>
+                        </a:rPr>
+                        <a:t>Spark</a:t>
+                      </a:r>
+                      <a:r>
+                        <a:rPr lang="es-MX" sz="1700" b="0" i="0" u="none" strike="noStrike" dirty="0">
+                          <a:effectLst/>
+                          <a:latin typeface="Arial" panose="020B0604020202020204" pitchFamily="34" charset="0"/>
+                        </a:rPr>
+                        <a:t> elige el </a:t>
+                      </a:r>
+                      <a:r>
+                        <a:rPr lang="es-MX" sz="1700" b="1" i="0" u="none" strike="noStrike" dirty="0">
+                          <a:effectLst/>
+                          <a:latin typeface="Arial" panose="020B0604020202020204" pitchFamily="34" charset="0"/>
+                        </a:rPr>
+                        <a:t>plan físico de menor costo</a:t>
+                      </a:r>
+                      <a:r>
+                        <a:rPr lang="es-MX" sz="1700" b="0" i="0" u="none" strike="noStrike" dirty="0">
+                          <a:effectLst/>
+                          <a:latin typeface="Arial" panose="020B0604020202020204" pitchFamily="34" charset="0"/>
+                        </a:rPr>
+                        <a:t> y lo ejecuta en el clúster.</a:t>
+                      </a:r>
+                    </a:p>
+                  </a:txBody>
+                  <a:tcPr marL="86717" marR="86717" marT="43359" marB="43359" anchor="ctr">
+                    <a:lnL>
+                      <a:noFill/>
+                    </a:lnL>
+                    <a:lnR>
+                      <a:noFill/>
+                    </a:lnR>
+                    <a:lnT>
+                      <a:noFill/>
+                    </a:lnT>
+                    <a:lnB>
+                      <a:noFill/>
+                    </a:lnB>
+                    <a:noFill/>
+                  </a:tcPr>
+                </a:tc>
+                <a:extLst>
+                  <a:ext uri="{0D108BD9-81ED-4DB2-BD59-A6C34878D82A}">
+                    <a16:rowId xmlns:a16="http://schemas.microsoft.com/office/drawing/2014/main" val="631218351"/>
+                  </a:ext>
+                </a:extLst>
+              </a:tr>
+            </a:tbl>
+          </a:graphicData>
+        </a:graphic>
+      </p:graphicFrame>
+    </p:spTree>
+    <p:extLst>
+      <p:ext uri="{BB962C8B-B14F-4D97-AF65-F5344CB8AC3E}">
+        <p14:creationId xmlns:p14="http://schemas.microsoft.com/office/powerpoint/2010/main" val="170849869"/>
+      </p:ext>
+    </p:extLst>
+  </p:cSld>
+  <p:clrMapOvr>
+    <a:masterClrMapping/>
+  </p:clrMapOvr>
+</p:sld>
+</file>
+
+<file path=ppt/slides/slide7.xml><?xml version="1.0" encoding="utf-8"?>
+<p:sld xmlns:a="http://schemas.openxmlformats.org/drawingml/2006/main" xmlns:r="http://schemas.openxmlformats.org/officeDocument/2006/relationships" xmlns:p="http://schemas.openxmlformats.org/presentationml/2006/main">
+  <p:cSld>
     <p:spTree>
       <p:nvGrpSpPr>
         <p:cNvPr id="1" name=""/>
